--- a/docs/DC_Express_AI_Innovation_Report.pptx
+++ b/docs/DC_Express_AI_Innovation_Report.pptx
@@ -35,6 +35,12 @@
     <p:sldId id="283" r:id="rId34"/>
     <p:sldId id="284" r:id="rId35"/>
     <p:sldId id="285" r:id="rId36"/>
+    <p:sldId id="286" r:id="rId37"/>
+    <p:sldId id="287" r:id="rId38"/>
+    <p:sldId id="288" r:id="rId39"/>
+    <p:sldId id="289" r:id="rId40"/>
+    <p:sldId id="290" r:id="rId41"/>
+    <p:sldId id="291" r:id="rId42"/>
   </p:sldIdLst>
   <p:sldSz cx="12191695" cy="6858000" type="screen4x3"/>
   <p:notesSz cx="6858000" cy="9144000"/>
@@ -134,6 +140,1668 @@
     </a:lvl9pPr>
   </p:defaultTextStyle>
 </p:presentation>
+</file>
+
+<file path=ppt/charts/chart1.xml><?xml version="1.0" encoding="utf-8"?>
+<c:chartSpace xmlns:c="http://schemas.openxmlformats.org/drawingml/2006/chart" xmlns:a="http://schemas.openxmlformats.org/drawingml/2006/main" xmlns:r="http://schemas.openxmlformats.org/officeDocument/2006/relationships">
+  <c:date1904 val="0"/>
+  <c:chart>
+    <c:autoTitleDeleted val="1"/>
+    <c:plotArea>
+      <c:barChart>
+        <c:barDir val="col"/>
+        <c:grouping val="clustered"/>
+        <c:ser>
+          <c:idx val="0"/>
+          <c:order val="0"/>
+          <c:tx>
+            <c:strRef>
+              <c:f>Sheet1!$B$1</c:f>
+              <c:strCache>
+                <c:ptCount val="1"/>
+                <c:pt idx="0">
+                  <c:v>값</c:v>
+                </c:pt>
+              </c:strCache>
+            </c:strRef>
+          </c:tx>
+          <c:spPr>
+            <a:solidFill>
+              <a:srgbClr val="6C2ED6"/>
+            </a:solidFill>
+          </c:spPr>
+          <c:dPt>
+            <c:idx val="0"/>
+            <c:spPr>
+              <a:solidFill>
+                <a:srgbClr val="6C2ED6"/>
+              </a:solidFill>
+            </c:spPr>
+          </c:dPt>
+          <c:dPt>
+            <c:idx val="1"/>
+            <c:spPr>
+              <a:solidFill>
+                <a:srgbClr val="6C2ED6"/>
+              </a:solidFill>
+            </c:spPr>
+          </c:dPt>
+          <c:dPt>
+            <c:idx val="2"/>
+            <c:spPr>
+              <a:solidFill>
+                <a:srgbClr val="6C2ED6"/>
+              </a:solidFill>
+            </c:spPr>
+          </c:dPt>
+          <c:dPt>
+            <c:idx val="3"/>
+            <c:spPr>
+              <a:solidFill>
+                <a:srgbClr val="6C2ED6"/>
+              </a:solidFill>
+            </c:spPr>
+          </c:dPt>
+          <c:dPt>
+            <c:idx val="4"/>
+            <c:spPr>
+              <a:solidFill>
+                <a:srgbClr val="16A34A"/>
+              </a:solidFill>
+            </c:spPr>
+          </c:dPt>
+          <c:dLbls>
+            <c:dLbl>
+              <c:idx val="0"/>
+              <c:tx>
+                <c:rich>
+                  <a:bodyPr/>
+                  <a:lstStyle/>
+                  <a:p>
+                    <a:pPr>
+                      <a:defRPr sz="1300" b="1">
+                        <a:solidFill>
+                          <a:srgbClr val="1F1F1F"/>
+                        </a:solidFill>
+                        <a:latin typeface="맑은 고딕"/>
+                      </a:defRPr>
+                    </a:pPr>
+                    <a:r>
+                      <a:t>~28개월</a:t>
+                    </a:r>
+                  </a:p>
+                </c:rich>
+              </c:tx>
+              <c:showLegendKey val="0"/>
+              <c:showVal val="1"/>
+              <c:showCatName val="0"/>
+              <c:showSerName val="0"/>
+              <c:showPercent val="0"/>
+              <c:showBubbleSize val="0"/>
+            </c:dLbl>
+            <c:dLbl>
+              <c:idx val="1"/>
+              <c:tx>
+                <c:rich>
+                  <a:bodyPr/>
+                  <a:lstStyle/>
+                  <a:p>
+                    <a:pPr>
+                      <a:defRPr sz="1300" b="1">
+                        <a:solidFill>
+                          <a:srgbClr val="1F1F1F"/>
+                        </a:solidFill>
+                        <a:latin typeface="맑은 고딕"/>
+                      </a:defRPr>
+                    </a:pPr>
+                    <a:r>
+                      <a:t>~14개월</a:t>
+                    </a:r>
+                  </a:p>
+                </c:rich>
+              </c:tx>
+              <c:showLegendKey val="0"/>
+              <c:showVal val="1"/>
+              <c:showCatName val="0"/>
+              <c:showSerName val="0"/>
+              <c:showPercent val="0"/>
+              <c:showBubbleSize val="0"/>
+            </c:dLbl>
+            <c:dLbl>
+              <c:idx val="2"/>
+              <c:tx>
+                <c:rich>
+                  <a:bodyPr/>
+                  <a:lstStyle/>
+                  <a:p>
+                    <a:pPr>
+                      <a:defRPr sz="1300" b="1">
+                        <a:solidFill>
+                          <a:srgbClr val="1F1F1F"/>
+                        </a:solidFill>
+                        <a:latin typeface="맑은 고딕"/>
+                      </a:defRPr>
+                    </a:pPr>
+                    <a:r>
+                      <a:t>~9개월</a:t>
+                    </a:r>
+                  </a:p>
+                </c:rich>
+              </c:tx>
+              <c:showLegendKey val="0"/>
+              <c:showVal val="1"/>
+              <c:showCatName val="0"/>
+              <c:showSerName val="0"/>
+              <c:showPercent val="0"/>
+              <c:showBubbleSize val="0"/>
+            </c:dLbl>
+            <c:dLbl>
+              <c:idx val="3"/>
+              <c:tx>
+                <c:rich>
+                  <a:bodyPr/>
+                  <a:lstStyle/>
+                  <a:p>
+                    <a:pPr>
+                      <a:defRPr sz="1300" b="1">
+                        <a:solidFill>
+                          <a:srgbClr val="1F1F1F"/>
+                        </a:solidFill>
+                        <a:latin typeface="맑은 고딕"/>
+                      </a:defRPr>
+                    </a:pPr>
+                    <a:r>
+                      <a:t>~7개월</a:t>
+                    </a:r>
+                  </a:p>
+                </c:rich>
+              </c:tx>
+              <c:showLegendKey val="0"/>
+              <c:showVal val="1"/>
+              <c:showCatName val="0"/>
+              <c:showSerName val="0"/>
+              <c:showPercent val="0"/>
+              <c:showBubbleSize val="0"/>
+            </c:dLbl>
+            <c:dLbl>
+              <c:idx val="4"/>
+              <c:tx>
+                <c:rich>
+                  <a:bodyPr/>
+                  <a:lstStyle/>
+                  <a:p>
+                    <a:pPr>
+                      <a:defRPr sz="1300" b="1">
+                        <a:solidFill>
+                          <a:srgbClr val="1F1F1F"/>
+                        </a:solidFill>
+                        <a:latin typeface="맑은 고딕"/>
+                      </a:defRPr>
+                    </a:pPr>
+                    <a:r>
+                      <a:t>4.5개월</a:t>
+                    </a:r>
+                  </a:p>
+                </c:rich>
+              </c:tx>
+              <c:showLegendKey val="0"/>
+              <c:showVal val="1"/>
+              <c:showCatName val="0"/>
+              <c:showSerName val="0"/>
+              <c:showPercent val="0"/>
+              <c:showBubbleSize val="0"/>
+            </c:dLbl>
+            <c:showLegendKey val="0"/>
+            <c:showVal val="0"/>
+            <c:showCatName val="0"/>
+            <c:showSerName val="0"/>
+            <c:showPercent val="0"/>
+            <c:showBubbleSize val="0"/>
+            <c:showLeaderLines val="1"/>
+          </c:dLbls>
+          <c:cat>
+            <c:strRef>
+              <c:f>Sheet1!$A$2:$A$6</c:f>
+              <c:strCache>
+                <c:ptCount val="5"/>
+                <c:pt idx="0">
+                  <c:v>1명
+(AI 없이)</c:v>
+                </c:pt>
+                <c:pt idx="1">
+                  <c:v>2명 팀</c:v>
+                </c:pt>
+                <c:pt idx="2">
+                  <c:v>3명 팀</c:v>
+                </c:pt>
+                <c:pt idx="3">
+                  <c:v>4명 팀</c:v>
+                </c:pt>
+                <c:pt idx="4">
+                  <c:v>1명 + AI
+(실제)</c:v>
+                </c:pt>
+              </c:strCache>
+            </c:strRef>
+          </c:cat>
+          <c:val>
+            <c:numRef>
+              <c:f>Sheet1!$B$2:$B$6</c:f>
+              <c:numCache>
+                <c:formatCode>General</c:formatCode>
+                <c:ptCount val="5"/>
+                <c:pt idx="0">
+                  <c:v>28</c:v>
+                </c:pt>
+                <c:pt idx="1">
+                  <c:v>14</c:v>
+                </c:pt>
+                <c:pt idx="2">
+                  <c:v>9</c:v>
+                </c:pt>
+                <c:pt idx="3">
+                  <c:v>7</c:v>
+                </c:pt>
+                <c:pt idx="4">
+                  <c:v>4.5</c:v>
+                </c:pt>
+              </c:numCache>
+            </c:numRef>
+          </c:val>
+        </c:ser>
+        <c:dLbls>
+          <c:numFmt formatCode="General" sourceLinked="0"/>
+          <c:txPr>
+            <a:bodyPr/>
+            <a:lstStyle/>
+            <a:p>
+              <a:pPr>
+                <a:defRPr sz="1400" b="1">
+                  <a:latin typeface="맑은 고딕"/>
+                </a:defRPr>
+              </a:pPr>
+            </a:p>
+          </c:txPr>
+          <c:showLegendKey val="0"/>
+          <c:showVal val="1"/>
+          <c:showCatName val="0"/>
+          <c:showSerName val="0"/>
+          <c:showPercent val="0"/>
+          <c:showBubbleSize val="0"/>
+          <c:showLeaderLines val="1"/>
+        </c:dLbls>
+        <c:axId val="-2068027336"/>
+        <c:axId val="-2113994440"/>
+      </c:barChart>
+      <c:catAx>
+        <c:axId val="-2068027336"/>
+        <c:scaling>
+          <c:orientation val="minMax"/>
+        </c:scaling>
+        <c:delete val="0"/>
+        <c:axPos val="b"/>
+        <c:majorTickMark val="out"/>
+        <c:minorTickMark val="none"/>
+        <c:tickLblPos val="nextTo"/>
+        <c:txPr>
+          <a:bodyPr/>
+          <a:lstStyle/>
+          <a:p>
+            <a:pPr>
+              <a:defRPr sz="1300">
+                <a:latin typeface="맑은 고딕"/>
+              </a:defRPr>
+            </a:pPr>
+          </a:p>
+        </c:txPr>
+        <c:crossAx val="-2113994440"/>
+        <c:crosses val="autoZero"/>
+        <c:auto val="1"/>
+        <c:lblAlgn val="ctr"/>
+        <c:lblOffset val="100"/>
+        <c:noMultiLvlLbl val="0"/>
+      </c:catAx>
+      <c:valAx>
+        <c:axId val="-2113994440"/>
+        <c:scaling/>
+        <c:delete val="0"/>
+        <c:axPos val="l"/>
+        <c:majorGridlines/>
+        <c:majorTickMark val="out"/>
+        <c:minorTickMark val="none"/>
+        <c:tickLblPos val="nextTo"/>
+        <c:txPr>
+          <a:bodyPr/>
+          <a:lstStyle/>
+          <a:p>
+            <a:pPr>
+              <a:defRPr sz="1100"/>
+            </a:pPr>
+          </a:p>
+        </c:txPr>
+        <c:crossAx val="-2068027336"/>
+        <c:crosses val="autoZero"/>
+      </c:valAx>
+    </c:plotArea>
+    <c:dispBlanksAs val="gap"/>
+  </c:chart>
+  <c:txPr>
+    <a:bodyPr/>
+    <a:lstStyle/>
+    <a:p>
+      <a:pPr>
+        <a:defRPr sz="1800"/>
+      </a:pPr>
+      <a:endParaRPr lang="en-US"/>
+    </a:p>
+  </c:txPr>
+  <c:externalData r:id="rId1">
+    <c:autoUpdate val="0"/>
+  </c:externalData>
+</c:chartSpace>
+</file>
+
+<file path=ppt/charts/chart2.xml><?xml version="1.0" encoding="utf-8"?>
+<c:chartSpace xmlns:c="http://schemas.openxmlformats.org/drawingml/2006/chart" xmlns:a="http://schemas.openxmlformats.org/drawingml/2006/main" xmlns:r="http://schemas.openxmlformats.org/officeDocument/2006/relationships">
+  <c:date1904 val="0"/>
+  <c:chart>
+    <c:autoTitleDeleted val="1"/>
+    <c:plotArea>
+      <c:barChart>
+        <c:barDir val="bar"/>
+        <c:grouping val="clustered"/>
+        <c:ser>
+          <c:idx val="0"/>
+          <c:order val="0"/>
+          <c:tx>
+            <c:strRef>
+              <c:f>Sheet1!$B$1</c:f>
+              <c:strCache>
+                <c:ptCount val="1"/>
+                <c:pt idx="0">
+                  <c:v>값</c:v>
+                </c:pt>
+              </c:strCache>
+            </c:strRef>
+          </c:tx>
+          <c:spPr>
+            <a:solidFill>
+              <a:srgbClr val="6C2ED6"/>
+            </a:solidFill>
+          </c:spPr>
+          <c:dPt>
+            <c:idx val="0"/>
+            <c:spPr>
+              <a:solidFill>
+                <a:srgbClr val="6C2ED6"/>
+              </a:solidFill>
+            </c:spPr>
+          </c:dPt>
+          <c:dPt>
+            <c:idx val="1"/>
+            <c:spPr>
+              <a:solidFill>
+                <a:srgbClr val="16A34A"/>
+              </a:solidFill>
+            </c:spPr>
+          </c:dPt>
+          <c:dLbls>
+            <c:dLbl>
+              <c:idx val="0"/>
+              <c:tx>
+                <c:rich>
+                  <a:bodyPr/>
+                  <a:lstStyle/>
+                  <a:p>
+                    <a:pPr>
+                      <a:defRPr sz="1300" b="1">
+                        <a:solidFill>
+                          <a:srgbClr val="1F1F1F"/>
+                        </a:solidFill>
+                        <a:latin typeface="맑은 고딕"/>
+                      </a:defRPr>
+                    </a:pPr>
+                    <a:r>
+                      <a:t>약 3.5~5.5억 원</a:t>
+                    </a:r>
+                  </a:p>
+                </c:rich>
+              </c:tx>
+              <c:showLegendKey val="0"/>
+              <c:showVal val="1"/>
+              <c:showCatName val="0"/>
+              <c:showSerName val="0"/>
+              <c:showPercent val="0"/>
+              <c:showBubbleSize val="0"/>
+            </c:dLbl>
+            <c:dLbl>
+              <c:idx val="1"/>
+              <c:tx>
+                <c:rich>
+                  <a:bodyPr/>
+                  <a:lstStyle/>
+                  <a:p>
+                    <a:pPr>
+                      <a:defRPr sz="1300" b="1">
+                        <a:solidFill>
+                          <a:srgbClr val="1F1F1F"/>
+                        </a:solidFill>
+                        <a:latin typeface="맑은 고딕"/>
+                      </a:defRPr>
+                    </a:pPr>
+                    <a:r>
+                      <a:t>약 4,500만 원</a:t>
+                    </a:r>
+                  </a:p>
+                </c:rich>
+              </c:tx>
+              <c:showLegendKey val="0"/>
+              <c:showVal val="1"/>
+              <c:showCatName val="0"/>
+              <c:showSerName val="0"/>
+              <c:showPercent val="0"/>
+              <c:showBubbleSize val="0"/>
+            </c:dLbl>
+            <c:showLegendKey val="0"/>
+            <c:showVal val="0"/>
+            <c:showCatName val="0"/>
+            <c:showSerName val="0"/>
+            <c:showPercent val="0"/>
+            <c:showBubbleSize val="0"/>
+            <c:showLeaderLines val="1"/>
+          </c:dLbls>
+          <c:cat>
+            <c:strRef>
+              <c:f>Sheet1!$A$2:$A$3</c:f>
+              <c:strCache>
+                <c:ptCount val="2"/>
+                <c:pt idx="0">
+                  <c:v>외주 개발
+(팀 3~4명)</c:v>
+                </c:pt>
+                <c:pt idx="1">
+                  <c:v>1인 + AI
+(실제)</c:v>
+                </c:pt>
+              </c:strCache>
+            </c:strRef>
+          </c:cat>
+          <c:val>
+            <c:numRef>
+              <c:f>Sheet1!$B$2:$B$3</c:f>
+              <c:numCache>
+                <c:formatCode>General</c:formatCode>
+                <c:ptCount val="2"/>
+                <c:pt idx="0">
+                  <c:v>45000</c:v>
+                </c:pt>
+                <c:pt idx="1">
+                  <c:v>4500</c:v>
+                </c:pt>
+              </c:numCache>
+            </c:numRef>
+          </c:val>
+        </c:ser>
+        <c:dLbls>
+          <c:numFmt formatCode="General" sourceLinked="0"/>
+          <c:txPr>
+            <a:bodyPr/>
+            <a:lstStyle/>
+            <a:p>
+              <a:pPr>
+                <a:defRPr sz="1400" b="1">
+                  <a:latin typeface="맑은 고딕"/>
+                </a:defRPr>
+              </a:pPr>
+            </a:p>
+          </c:txPr>
+          <c:showLegendKey val="0"/>
+          <c:showVal val="1"/>
+          <c:showCatName val="0"/>
+          <c:showSerName val="0"/>
+          <c:showPercent val="0"/>
+          <c:showBubbleSize val="0"/>
+          <c:showLeaderLines val="1"/>
+        </c:dLbls>
+        <c:axId val="-2068027336"/>
+        <c:axId val="-2113994440"/>
+      </c:barChart>
+      <c:catAx>
+        <c:axId val="-2068027336"/>
+        <c:scaling>
+          <c:orientation val="minMax"/>
+        </c:scaling>
+        <c:delete val="0"/>
+        <c:axPos val="l"/>
+        <c:majorTickMark val="out"/>
+        <c:minorTickMark val="none"/>
+        <c:tickLblPos val="nextTo"/>
+        <c:txPr>
+          <a:bodyPr/>
+          <a:lstStyle/>
+          <a:p>
+            <a:pPr>
+              <a:defRPr sz="1300">
+                <a:latin typeface="맑은 고딕"/>
+              </a:defRPr>
+            </a:pPr>
+          </a:p>
+        </c:txPr>
+        <c:crossAx val="-2113994440"/>
+        <c:crosses val="autoZero"/>
+        <c:auto val="1"/>
+        <c:lblAlgn val="ctr"/>
+        <c:lblOffset val="100"/>
+        <c:noMultiLvlLbl val="0"/>
+      </c:catAx>
+      <c:valAx>
+        <c:axId val="-2113994440"/>
+        <c:scaling/>
+        <c:delete val="0"/>
+        <c:axPos val="b"/>
+        <c:majorGridlines/>
+        <c:majorTickMark val="out"/>
+        <c:minorTickMark val="none"/>
+        <c:tickLblPos val="nextTo"/>
+        <c:txPr>
+          <a:bodyPr/>
+          <a:lstStyle/>
+          <a:p>
+            <a:pPr>
+              <a:defRPr sz="1100"/>
+            </a:pPr>
+          </a:p>
+        </c:txPr>
+        <c:crossAx val="-2068027336"/>
+        <c:crosses val="autoZero"/>
+      </c:valAx>
+    </c:plotArea>
+    <c:dispBlanksAs val="gap"/>
+  </c:chart>
+  <c:txPr>
+    <a:bodyPr/>
+    <a:lstStyle/>
+    <a:p>
+      <a:pPr>
+        <a:defRPr sz="1800"/>
+      </a:pPr>
+      <a:endParaRPr lang="en-US"/>
+    </a:p>
+  </c:txPr>
+  <c:externalData r:id="rId1">
+    <c:autoUpdate val="0"/>
+  </c:externalData>
+</c:chartSpace>
+</file>
+
+<file path=ppt/charts/chart3.xml><?xml version="1.0" encoding="utf-8"?>
+<c:chartSpace xmlns:c="http://schemas.openxmlformats.org/drawingml/2006/chart" xmlns:a="http://schemas.openxmlformats.org/drawingml/2006/main" xmlns:r="http://schemas.openxmlformats.org/officeDocument/2006/relationships">
+  <c:date1904 val="0"/>
+  <c:chart>
+    <c:autoTitleDeleted val="1"/>
+    <c:plotArea>
+      <c:barChart>
+        <c:barDir val="col"/>
+        <c:grouping val="clustered"/>
+        <c:ser>
+          <c:idx val="0"/>
+          <c:order val="0"/>
+          <c:tx>
+            <c:strRef>
+              <c:f>Sheet1!$B$1</c:f>
+              <c:strCache>
+                <c:ptCount val="1"/>
+                <c:pt idx="0">
+                  <c:v>값</c:v>
+                </c:pt>
+              </c:strCache>
+            </c:strRef>
+          </c:tx>
+          <c:spPr>
+            <a:solidFill>
+              <a:srgbClr val="6C2ED6"/>
+            </a:solidFill>
+          </c:spPr>
+          <c:dPt>
+            <c:idx val="0"/>
+            <c:spPr>
+              <a:solidFill>
+                <a:srgbClr val="6C2ED6"/>
+              </a:solidFill>
+            </c:spPr>
+          </c:dPt>
+          <c:dPt>
+            <c:idx val="1"/>
+            <c:spPr>
+              <a:solidFill>
+                <a:srgbClr val="16A34A"/>
+              </a:solidFill>
+            </c:spPr>
+          </c:dPt>
+          <c:dLbls>
+            <c:dLbl>
+              <c:idx val="0"/>
+              <c:tx>
+                <c:rich>
+                  <a:bodyPr/>
+                  <a:lstStyle/>
+                  <a:p>
+                    <a:pPr>
+                      <a:defRPr sz="1300" b="1">
+                        <a:solidFill>
+                          <a:srgbClr val="1F1F1F"/>
+                        </a:solidFill>
+                        <a:latin typeface="맑은 고딕"/>
+                      </a:defRPr>
+                    </a:pPr>
+                    <a:r>
+                      <a:t>~20 FP/MM</a:t>
+                    </a:r>
+                  </a:p>
+                </c:rich>
+              </c:tx>
+              <c:showLegendKey val="0"/>
+              <c:showVal val="1"/>
+              <c:showCatName val="0"/>
+              <c:showSerName val="0"/>
+              <c:showPercent val="0"/>
+              <c:showBubbleSize val="0"/>
+            </c:dLbl>
+            <c:dLbl>
+              <c:idx val="1"/>
+              <c:tx>
+                <c:rich>
+                  <a:bodyPr/>
+                  <a:lstStyle/>
+                  <a:p>
+                    <a:pPr>
+                      <a:defRPr sz="1300" b="1">
+                        <a:solidFill>
+                          <a:srgbClr val="1F1F1F"/>
+                        </a:solidFill>
+                        <a:latin typeface="맑은 고딕"/>
+                      </a:defRPr>
+                    </a:pPr>
+                    <a:r>
+                      <a:t>~155 FP/MM</a:t>
+                    </a:r>
+                  </a:p>
+                </c:rich>
+              </c:tx>
+              <c:showLegendKey val="0"/>
+              <c:showVal val="1"/>
+              <c:showCatName val="0"/>
+              <c:showSerName val="0"/>
+              <c:showPercent val="0"/>
+              <c:showBubbleSize val="0"/>
+            </c:dLbl>
+            <c:showLegendKey val="0"/>
+            <c:showVal val="0"/>
+            <c:showCatName val="0"/>
+            <c:showSerName val="0"/>
+            <c:showPercent val="0"/>
+            <c:showBubbleSize val="0"/>
+            <c:showLeaderLines val="1"/>
+          </c:dLbls>
+          <c:cat>
+            <c:strRef>
+              <c:f>Sheet1!$A$2:$A$3</c:f>
+              <c:strCache>
+                <c:ptCount val="2"/>
+                <c:pt idx="0">
+                  <c:v>외주 개발</c:v>
+                </c:pt>
+                <c:pt idx="1">
+                  <c:v>1인 + AI</c:v>
+                </c:pt>
+              </c:strCache>
+            </c:strRef>
+          </c:cat>
+          <c:val>
+            <c:numRef>
+              <c:f>Sheet1!$B$2:$B$3</c:f>
+              <c:numCache>
+                <c:formatCode>General</c:formatCode>
+                <c:ptCount val="2"/>
+                <c:pt idx="0">
+                  <c:v>20</c:v>
+                </c:pt>
+                <c:pt idx="1">
+                  <c:v>155</c:v>
+                </c:pt>
+              </c:numCache>
+            </c:numRef>
+          </c:val>
+        </c:ser>
+        <c:dLbls>
+          <c:numFmt formatCode="General" sourceLinked="0"/>
+          <c:txPr>
+            <a:bodyPr/>
+            <a:lstStyle/>
+            <a:p>
+              <a:pPr>
+                <a:defRPr sz="1400" b="1">
+                  <a:latin typeface="맑은 고딕"/>
+                </a:defRPr>
+              </a:pPr>
+            </a:p>
+          </c:txPr>
+          <c:showLegendKey val="0"/>
+          <c:showVal val="1"/>
+          <c:showCatName val="0"/>
+          <c:showSerName val="0"/>
+          <c:showPercent val="0"/>
+          <c:showBubbleSize val="0"/>
+          <c:showLeaderLines val="1"/>
+        </c:dLbls>
+        <c:axId val="-2068027336"/>
+        <c:axId val="-2113994440"/>
+      </c:barChart>
+      <c:catAx>
+        <c:axId val="-2068027336"/>
+        <c:scaling>
+          <c:orientation val="minMax"/>
+        </c:scaling>
+        <c:delete val="0"/>
+        <c:axPos val="b"/>
+        <c:majorTickMark val="out"/>
+        <c:minorTickMark val="none"/>
+        <c:tickLblPos val="nextTo"/>
+        <c:txPr>
+          <a:bodyPr/>
+          <a:lstStyle/>
+          <a:p>
+            <a:pPr>
+              <a:defRPr sz="1300">
+                <a:latin typeface="맑은 고딕"/>
+              </a:defRPr>
+            </a:pPr>
+          </a:p>
+        </c:txPr>
+        <c:crossAx val="-2113994440"/>
+        <c:crosses val="autoZero"/>
+        <c:auto val="1"/>
+        <c:lblAlgn val="ctr"/>
+        <c:lblOffset val="100"/>
+        <c:noMultiLvlLbl val="0"/>
+      </c:catAx>
+      <c:valAx>
+        <c:axId val="-2113994440"/>
+        <c:scaling/>
+        <c:delete val="0"/>
+        <c:axPos val="l"/>
+        <c:majorGridlines/>
+        <c:majorTickMark val="out"/>
+        <c:minorTickMark val="none"/>
+        <c:tickLblPos val="nextTo"/>
+        <c:txPr>
+          <a:bodyPr/>
+          <a:lstStyle/>
+          <a:p>
+            <a:pPr>
+              <a:defRPr sz="1100"/>
+            </a:pPr>
+          </a:p>
+        </c:txPr>
+        <c:crossAx val="-2068027336"/>
+        <c:crosses val="autoZero"/>
+      </c:valAx>
+    </c:plotArea>
+    <c:dispBlanksAs val="gap"/>
+  </c:chart>
+  <c:txPr>
+    <a:bodyPr/>
+    <a:lstStyle/>
+    <a:p>
+      <a:pPr>
+        <a:defRPr sz="1800"/>
+      </a:pPr>
+      <a:endParaRPr lang="en-US"/>
+    </a:p>
+  </c:txPr>
+  <c:externalData r:id="rId1">
+    <c:autoUpdate val="0"/>
+  </c:externalData>
+</c:chartSpace>
+</file>
+
+<file path=ppt/charts/chart4.xml><?xml version="1.0" encoding="utf-8"?>
+<c:chartSpace xmlns:c="http://schemas.openxmlformats.org/drawingml/2006/chart" xmlns:a="http://schemas.openxmlformats.org/drawingml/2006/main" xmlns:r="http://schemas.openxmlformats.org/officeDocument/2006/relationships">
+  <c:date1904 val="0"/>
+  <c:chart>
+    <c:autoTitleDeleted val="1"/>
+    <c:plotArea>
+      <c:barChart>
+        <c:barDir val="col"/>
+        <c:grouping val="clustered"/>
+        <c:ser>
+          <c:idx val="0"/>
+          <c:order val="0"/>
+          <c:tx>
+            <c:strRef>
+              <c:f>Sheet1!$B$1</c:f>
+              <c:strCache>
+                <c:ptCount val="1"/>
+                <c:pt idx="0">
+                  <c:v>값</c:v>
+                </c:pt>
+              </c:strCache>
+            </c:strRef>
+          </c:tx>
+          <c:spPr>
+            <a:solidFill>
+              <a:srgbClr val="6C2ED6"/>
+            </a:solidFill>
+          </c:spPr>
+          <c:dPt>
+            <c:idx val="0"/>
+            <c:spPr>
+              <a:solidFill>
+                <a:srgbClr val="6C2ED6"/>
+              </a:solidFill>
+            </c:spPr>
+          </c:dPt>
+          <c:dPt>
+            <c:idx val="1"/>
+            <c:spPr>
+              <a:solidFill>
+                <a:srgbClr val="6C2ED6"/>
+              </a:solidFill>
+            </c:spPr>
+          </c:dPt>
+          <c:dPt>
+            <c:idx val="2"/>
+            <c:spPr>
+              <a:solidFill>
+                <a:srgbClr val="6C2ED6"/>
+              </a:solidFill>
+            </c:spPr>
+          </c:dPt>
+          <c:dPt>
+            <c:idx val="3"/>
+            <c:spPr>
+              <a:solidFill>
+                <a:srgbClr val="16A34A"/>
+              </a:solidFill>
+            </c:spPr>
+          </c:dPt>
+          <c:dPt>
+            <c:idx val="4"/>
+            <c:spPr>
+              <a:solidFill>
+                <a:srgbClr val="6C2ED6"/>
+              </a:solidFill>
+            </c:spPr>
+          </c:dPt>
+          <c:dLbls>
+            <c:dLbl>
+              <c:idx val="0"/>
+              <c:tx>
+                <c:rich>
+                  <a:bodyPr/>
+                  <a:lstStyle/>
+                  <a:p>
+                    <a:pPr>
+                      <a:defRPr sz="1300" b="1">
+                        <a:solidFill>
+                          <a:srgbClr val="1F1F1F"/>
+                        </a:solidFill>
+                        <a:latin typeface="맑은 고딕"/>
+                      </a:defRPr>
+                    </a:pPr>
+                    <a:r>
+                      <a:t>1</a:t>
+                    </a:r>
+                  </a:p>
+                </c:rich>
+              </c:tx>
+              <c:showLegendKey val="0"/>
+              <c:showVal val="1"/>
+              <c:showCatName val="0"/>
+              <c:showSerName val="0"/>
+              <c:showPercent val="0"/>
+              <c:showBubbleSize val="0"/>
+            </c:dLbl>
+            <c:dLbl>
+              <c:idx val="1"/>
+              <c:tx>
+                <c:rich>
+                  <a:bodyPr/>
+                  <a:lstStyle/>
+                  <a:p>
+                    <a:pPr>
+                      <a:defRPr sz="1300" b="1">
+                        <a:solidFill>
+                          <a:srgbClr val="1F1F1F"/>
+                        </a:solidFill>
+                        <a:latin typeface="맑은 고딕"/>
+                      </a:defRPr>
+                    </a:pPr>
+                    <a:r>
+                      <a:t>102</a:t>
+                    </a:r>
+                  </a:p>
+                </c:rich>
+              </c:tx>
+              <c:showLegendKey val="0"/>
+              <c:showVal val="1"/>
+              <c:showCatName val="0"/>
+              <c:showSerName val="0"/>
+              <c:showPercent val="0"/>
+              <c:showBubbleSize val="0"/>
+            </c:dLbl>
+            <c:dLbl>
+              <c:idx val="2"/>
+              <c:tx>
+                <c:rich>
+                  <a:bodyPr/>
+                  <a:lstStyle/>
+                  <a:p>
+                    <a:pPr>
+                      <a:defRPr sz="1300" b="1">
+                        <a:solidFill>
+                          <a:srgbClr val="1F1F1F"/>
+                        </a:solidFill>
+                        <a:latin typeface="맑은 고딕"/>
+                      </a:defRPr>
+                    </a:pPr>
+                    <a:r>
+                      <a:t>165</a:t>
+                    </a:r>
+                  </a:p>
+                </c:rich>
+              </c:tx>
+              <c:showLegendKey val="0"/>
+              <c:showVal val="1"/>
+              <c:showCatName val="0"/>
+              <c:showSerName val="0"/>
+              <c:showPercent val="0"/>
+              <c:showBubbleSize val="0"/>
+            </c:dLbl>
+            <c:dLbl>
+              <c:idx val="3"/>
+              <c:tx>
+                <c:rich>
+                  <a:bodyPr/>
+                  <a:lstStyle/>
+                  <a:p>
+                    <a:pPr>
+                      <a:defRPr sz="1300" b="1">
+                        <a:solidFill>
+                          <a:srgbClr val="1F1F1F"/>
+                        </a:solidFill>
+                        <a:latin typeface="맑은 고딕"/>
+                      </a:defRPr>
+                    </a:pPr>
+                    <a:r>
+                      <a:t>303</a:t>
+                    </a:r>
+                  </a:p>
+                </c:rich>
+              </c:tx>
+              <c:showLegendKey val="0"/>
+              <c:showVal val="1"/>
+              <c:showCatName val="0"/>
+              <c:showSerName val="0"/>
+              <c:showPercent val="0"/>
+              <c:showBubbleSize val="0"/>
+            </c:dLbl>
+            <c:dLbl>
+              <c:idx val="4"/>
+              <c:tx>
+                <c:rich>
+                  <a:bodyPr/>
+                  <a:lstStyle/>
+                  <a:p>
+                    <a:pPr>
+                      <a:defRPr sz="1300" b="1">
+                        <a:solidFill>
+                          <a:srgbClr val="1F1F1F"/>
+                        </a:solidFill>
+                        <a:latin typeface="맑은 고딕"/>
+                      </a:defRPr>
+                    </a:pPr>
+                    <a:r>
+                      <a:t>18</a:t>
+                    </a:r>
+                  </a:p>
+                </c:rich>
+              </c:tx>
+              <c:showLegendKey val="0"/>
+              <c:showVal val="1"/>
+              <c:showCatName val="0"/>
+              <c:showSerName val="0"/>
+              <c:showPercent val="0"/>
+              <c:showBubbleSize val="0"/>
+            </c:dLbl>
+            <c:showLegendKey val="0"/>
+            <c:showVal val="0"/>
+            <c:showCatName val="0"/>
+            <c:showSerName val="0"/>
+            <c:showPercent val="0"/>
+            <c:showBubbleSize val="0"/>
+            <c:showLeaderLines val="1"/>
+          </c:dLbls>
+          <c:cat>
+            <c:strRef>
+              <c:f>Sheet1!$A$2:$A$6</c:f>
+              <c:strCache>
+                <c:ptCount val="5"/>
+                <c:pt idx="0">
+                  <c:v>2월</c:v>
+                </c:pt>
+                <c:pt idx="1">
+                  <c:v>4월</c:v>
+                </c:pt>
+                <c:pt idx="2">
+                  <c:v>5월</c:v>
+                </c:pt>
+                <c:pt idx="3">
+                  <c:v>6월</c:v>
+                </c:pt>
+                <c:pt idx="4">
+                  <c:v>7월</c:v>
+                </c:pt>
+              </c:strCache>
+            </c:strRef>
+          </c:cat>
+          <c:val>
+            <c:numRef>
+              <c:f>Sheet1!$B$2:$B$6</c:f>
+              <c:numCache>
+                <c:formatCode>General</c:formatCode>
+                <c:ptCount val="5"/>
+                <c:pt idx="0">
+                  <c:v>1</c:v>
+                </c:pt>
+                <c:pt idx="1">
+                  <c:v>102</c:v>
+                </c:pt>
+                <c:pt idx="2">
+                  <c:v>165</c:v>
+                </c:pt>
+                <c:pt idx="3">
+                  <c:v>303</c:v>
+                </c:pt>
+                <c:pt idx="4">
+                  <c:v>18</c:v>
+                </c:pt>
+              </c:numCache>
+            </c:numRef>
+          </c:val>
+        </c:ser>
+        <c:dLbls>
+          <c:numFmt formatCode="General" sourceLinked="0"/>
+          <c:txPr>
+            <a:bodyPr/>
+            <a:lstStyle/>
+            <a:p>
+              <a:pPr>
+                <a:defRPr sz="1400" b="1">
+                  <a:latin typeface="맑은 고딕"/>
+                </a:defRPr>
+              </a:pPr>
+            </a:p>
+          </c:txPr>
+          <c:showLegendKey val="0"/>
+          <c:showVal val="1"/>
+          <c:showCatName val="0"/>
+          <c:showSerName val="0"/>
+          <c:showPercent val="0"/>
+          <c:showBubbleSize val="0"/>
+          <c:showLeaderLines val="1"/>
+        </c:dLbls>
+        <c:axId val="-2068027336"/>
+        <c:axId val="-2113994440"/>
+      </c:barChart>
+      <c:catAx>
+        <c:axId val="-2068027336"/>
+        <c:scaling>
+          <c:orientation val="minMax"/>
+        </c:scaling>
+        <c:delete val="0"/>
+        <c:axPos val="b"/>
+        <c:majorTickMark val="out"/>
+        <c:minorTickMark val="none"/>
+        <c:tickLblPos val="nextTo"/>
+        <c:txPr>
+          <a:bodyPr/>
+          <a:lstStyle/>
+          <a:p>
+            <a:pPr>
+              <a:defRPr sz="1300">
+                <a:latin typeface="맑은 고딕"/>
+              </a:defRPr>
+            </a:pPr>
+          </a:p>
+        </c:txPr>
+        <c:crossAx val="-2113994440"/>
+        <c:crosses val="autoZero"/>
+        <c:auto val="1"/>
+        <c:lblAlgn val="ctr"/>
+        <c:lblOffset val="100"/>
+        <c:noMultiLvlLbl val="0"/>
+      </c:catAx>
+      <c:valAx>
+        <c:axId val="-2113994440"/>
+        <c:scaling/>
+        <c:delete val="0"/>
+        <c:axPos val="l"/>
+        <c:majorGridlines/>
+        <c:majorTickMark val="out"/>
+        <c:minorTickMark val="none"/>
+        <c:tickLblPos val="nextTo"/>
+        <c:txPr>
+          <a:bodyPr/>
+          <a:lstStyle/>
+          <a:p>
+            <a:pPr>
+              <a:defRPr sz="1100"/>
+            </a:pPr>
+          </a:p>
+        </c:txPr>
+        <c:crossAx val="-2068027336"/>
+        <c:crosses val="autoZero"/>
+      </c:valAx>
+    </c:plotArea>
+    <c:dispBlanksAs val="gap"/>
+  </c:chart>
+  <c:txPr>
+    <a:bodyPr/>
+    <a:lstStyle/>
+    <a:p>
+      <a:pPr>
+        <a:defRPr sz="1800"/>
+      </a:pPr>
+      <a:endParaRPr lang="en-US"/>
+    </a:p>
+  </c:txPr>
+  <c:externalData r:id="rId1">
+    <c:autoUpdate val="0"/>
+  </c:externalData>
+</c:chartSpace>
+</file>
+
+<file path=ppt/charts/chart5.xml><?xml version="1.0" encoding="utf-8"?>
+<c:chartSpace xmlns:c="http://schemas.openxmlformats.org/drawingml/2006/chart" xmlns:a="http://schemas.openxmlformats.org/drawingml/2006/main" xmlns:r="http://schemas.openxmlformats.org/officeDocument/2006/relationships">
+  <c:date1904 val="0"/>
+  <c:chart>
+    <c:autoTitleDeleted val="1"/>
+    <c:plotArea>
+      <c:lineChart>
+        <c:grouping val="standard"/>
+        <c:varyColors val="0"/>
+        <c:ser>
+          <c:idx val="0"/>
+          <c:order val="0"/>
+          <c:tx>
+            <c:strRef>
+              <c:f>Sheet1!$B$1</c:f>
+              <c:strCache>
+                <c:ptCount val="1"/>
+                <c:pt idx="0">
+                  <c:v>값</c:v>
+                </c:pt>
+              </c:strCache>
+            </c:strRef>
+          </c:tx>
+          <c:spPr>
+            <a:solidFill>
+              <a:srgbClr val="DC2E2E"/>
+            </a:solidFill>
+          </c:spPr>
+          <c:dPt>
+            <c:idx val="0"/>
+            <c:spPr>
+              <a:solidFill>
+                <a:srgbClr val="DC2E2E"/>
+              </a:solidFill>
+            </c:spPr>
+          </c:dPt>
+          <c:dPt>
+            <c:idx val="1"/>
+            <c:spPr>
+              <a:solidFill>
+                <a:srgbClr val="DC2E2E"/>
+              </a:solidFill>
+            </c:spPr>
+          </c:dPt>
+          <c:dPt>
+            <c:idx val="2"/>
+            <c:spPr>
+              <a:solidFill>
+                <a:srgbClr val="DC2E2E"/>
+              </a:solidFill>
+            </c:spPr>
+          </c:dPt>
+          <c:dPt>
+            <c:idx val="3"/>
+            <c:spPr>
+              <a:solidFill>
+                <a:srgbClr val="DC2E2E"/>
+              </a:solidFill>
+            </c:spPr>
+          </c:dPt>
+          <c:dLbls>
+            <c:dLbl>
+              <c:idx val="0"/>
+              <c:tx>
+                <c:rich>
+                  <a:bodyPr/>
+                  <a:lstStyle/>
+                  <a:p>
+                    <a:pPr>
+                      <a:defRPr sz="1300" b="1">
+                        <a:solidFill>
+                          <a:srgbClr val="1F1F1F"/>
+                        </a:solidFill>
+                        <a:latin typeface="맑은 고딕"/>
+                      </a:defRPr>
+                    </a:pPr>
+                    <a:r>
+                      <a:t>38.2%</a:t>
+                    </a:r>
+                  </a:p>
+                </c:rich>
+              </c:tx>
+              <c:showLegendKey val="0"/>
+              <c:showVal val="1"/>
+              <c:showCatName val="0"/>
+              <c:showSerName val="0"/>
+              <c:showPercent val="0"/>
+              <c:showBubbleSize val="0"/>
+            </c:dLbl>
+            <c:dLbl>
+              <c:idx val="1"/>
+              <c:tx>
+                <c:rich>
+                  <a:bodyPr/>
+                  <a:lstStyle/>
+                  <a:p>
+                    <a:pPr>
+                      <a:defRPr sz="1300" b="1">
+                        <a:solidFill>
+                          <a:srgbClr val="1F1F1F"/>
+                        </a:solidFill>
+                        <a:latin typeface="맑은 고딕"/>
+                      </a:defRPr>
+                    </a:pPr>
+                    <a:r>
+                      <a:t>17.6%</a:t>
+                    </a:r>
+                  </a:p>
+                </c:rich>
+              </c:tx>
+              <c:showLegendKey val="0"/>
+              <c:showVal val="1"/>
+              <c:showCatName val="0"/>
+              <c:showSerName val="0"/>
+              <c:showPercent val="0"/>
+              <c:showBubbleSize val="0"/>
+            </c:dLbl>
+            <c:dLbl>
+              <c:idx val="2"/>
+              <c:tx>
+                <c:rich>
+                  <a:bodyPr/>
+                  <a:lstStyle/>
+                  <a:p>
+                    <a:pPr>
+                      <a:defRPr sz="1300" b="1">
+                        <a:solidFill>
+                          <a:srgbClr val="1F1F1F"/>
+                        </a:solidFill>
+                        <a:latin typeface="맑은 고딕"/>
+                      </a:defRPr>
+                    </a:pPr>
+                    <a:r>
+                      <a:t>21.1%</a:t>
+                    </a:r>
+                  </a:p>
+                </c:rich>
+              </c:tx>
+              <c:showLegendKey val="0"/>
+              <c:showVal val="1"/>
+              <c:showCatName val="0"/>
+              <c:showSerName val="0"/>
+              <c:showPercent val="0"/>
+              <c:showBubbleSize val="0"/>
+            </c:dLbl>
+            <c:dLbl>
+              <c:idx val="3"/>
+              <c:tx>
+                <c:rich>
+                  <a:bodyPr/>
+                  <a:lstStyle/>
+                  <a:p>
+                    <a:pPr>
+                      <a:defRPr sz="1300" b="1">
+                        <a:solidFill>
+                          <a:srgbClr val="1F1F1F"/>
+                        </a:solidFill>
+                        <a:latin typeface="맑은 고딕"/>
+                      </a:defRPr>
+                    </a:pPr>
+                    <a:r>
+                      <a:t>9.1%</a:t>
+                    </a:r>
+                  </a:p>
+                </c:rich>
+              </c:tx>
+              <c:showLegendKey val="0"/>
+              <c:showVal val="1"/>
+              <c:showCatName val="0"/>
+              <c:showSerName val="0"/>
+              <c:showPercent val="0"/>
+              <c:showBubbleSize val="0"/>
+            </c:dLbl>
+            <c:showLegendKey val="0"/>
+            <c:showVal val="0"/>
+            <c:showCatName val="0"/>
+            <c:showSerName val="0"/>
+            <c:showPercent val="0"/>
+            <c:showBubbleSize val="0"/>
+            <c:showLeaderLines val="1"/>
+          </c:dLbls>
+          <c:cat>
+            <c:strRef>
+              <c:f>Sheet1!$A$2:$A$5</c:f>
+              <c:strCache>
+                <c:ptCount val="4"/>
+                <c:pt idx="0">
+                  <c:v>4월</c:v>
+                </c:pt>
+                <c:pt idx="1">
+                  <c:v>5월</c:v>
+                </c:pt>
+                <c:pt idx="2">
+                  <c:v>6월</c:v>
+                </c:pt>
+                <c:pt idx="3">
+                  <c:v>7월</c:v>
+                </c:pt>
+              </c:strCache>
+            </c:strRef>
+          </c:cat>
+          <c:val>
+            <c:numRef>
+              <c:f>Sheet1!$B$2:$B$5</c:f>
+              <c:numCache>
+                <c:formatCode>General</c:formatCode>
+                <c:ptCount val="4"/>
+                <c:pt idx="0">
+                  <c:v>38.2</c:v>
+                </c:pt>
+                <c:pt idx="1">
+                  <c:v>17.6</c:v>
+                </c:pt>
+                <c:pt idx="2">
+                  <c:v>21.1</c:v>
+                </c:pt>
+                <c:pt idx="3">
+                  <c:v>9.1</c:v>
+                </c:pt>
+              </c:numCache>
+            </c:numRef>
+          </c:val>
+          <c:smooth val="0"/>
+        </c:ser>
+        <c:dLbls>
+          <c:numFmt formatCode="General" sourceLinked="0"/>
+          <c:txPr>
+            <a:bodyPr/>
+            <a:lstStyle/>
+            <a:p>
+              <a:pPr>
+                <a:defRPr sz="1400" b="1">
+                  <a:latin typeface="맑은 고딕"/>
+                </a:defRPr>
+              </a:pPr>
+            </a:p>
+          </c:txPr>
+          <c:showLegendKey val="0"/>
+          <c:showVal val="1"/>
+          <c:showCatName val="0"/>
+          <c:showSerName val="0"/>
+          <c:showPercent val="0"/>
+          <c:showBubbleSize val="0"/>
+          <c:showLeaderLines val="1"/>
+        </c:dLbls>
+        <c:marker val="1"/>
+        <c:smooth val="0"/>
+        <c:axId val="2118791784"/>
+        <c:axId val="2140495176"/>
+      </c:lineChart>
+      <c:catAx>
+        <c:axId val="2118791784"/>
+        <c:scaling>
+          <c:orientation val="minMax"/>
+        </c:scaling>
+        <c:delete val="0"/>
+        <c:axPos val="b"/>
+        <c:majorTickMark val="out"/>
+        <c:minorTickMark val="none"/>
+        <c:tickLblPos val="nextTo"/>
+        <c:txPr>
+          <a:bodyPr/>
+          <a:lstStyle/>
+          <a:p>
+            <a:pPr>
+              <a:defRPr sz="1300">
+                <a:latin typeface="맑은 고딕"/>
+              </a:defRPr>
+            </a:pPr>
+          </a:p>
+        </c:txPr>
+        <c:crossAx val="2140495176"/>
+        <c:crosses val="autoZero"/>
+        <c:auto val="1"/>
+        <c:lblAlgn val="ctr"/>
+        <c:lblOffset val="100"/>
+        <c:noMultiLvlLbl val="0"/>
+      </c:catAx>
+      <c:valAx>
+        <c:axId val="2140495176"/>
+        <c:scaling/>
+        <c:delete val="0"/>
+        <c:axPos val="l"/>
+        <c:majorGridlines/>
+        <c:majorTickMark val="out"/>
+        <c:minorTickMark val="none"/>
+        <c:tickLblPos val="nextTo"/>
+        <c:txPr>
+          <a:bodyPr/>
+          <a:lstStyle/>
+          <a:p>
+            <a:pPr>
+              <a:defRPr sz="1100"/>
+            </a:pPr>
+          </a:p>
+        </c:txPr>
+        <c:crossAx val="2118791784"/>
+        <c:crosses val="autoZero"/>
+      </c:valAx>
+    </c:plotArea>
+    <c:plotVisOnly val="1"/>
+    <c:dispBlanksAs val="gap"/>
+    <c:showDLblsOverMax val="0"/>
+  </c:chart>
+  <c:txPr>
+    <a:bodyPr/>
+    <a:lstStyle/>
+    <a:p>
+      <a:pPr>
+        <a:defRPr sz="1800"/>
+      </a:pPr>
+      <a:endParaRPr lang="en-US"/>
+    </a:p>
+  </c:txPr>
+  <c:externalData r:id="rId1">
+    <c:autoUpdate val="0"/>
+  </c:externalData>
+</c:chartSpace>
+</file>
+
+<file path=ppt/charts/chart6.xml><?xml version="1.0" encoding="utf-8"?>
+<c:chartSpace xmlns:c="http://schemas.openxmlformats.org/drawingml/2006/chart" xmlns:a="http://schemas.openxmlformats.org/drawingml/2006/main" xmlns:r="http://schemas.openxmlformats.org/officeDocument/2006/relationships">
+  <c:date1904 val="0"/>
+  <c:roundedCorners val="0"/>
+  <c:chart>
+    <c:autoTitleDeleted val="1"/>
+    <c:plotArea>
+      <c:layout/>
+      <c:doughnutChart>
+        <c:varyColors val="1"/>
+        <c:ser>
+          <c:idx val="0"/>
+          <c:order val="0"/>
+          <c:tx>
+            <c:strRef>
+              <c:f>Sheet1!$B$1</c:f>
+              <c:strCache>
+                <c:ptCount val="1"/>
+                <c:pt idx="0">
+                  <c:v>구성비</c:v>
+                </c:pt>
+              </c:strCache>
+            </c:strRef>
+          </c:tx>
+          <c:dPt>
+            <c:idx val="0"/>
+            <c:spPr>
+              <a:solidFill>
+                <a:srgbClr val="0070C0"/>
+              </a:solidFill>
+            </c:spPr>
+          </c:dPt>
+          <c:dPt>
+            <c:idx val="1"/>
+            <c:spPr>
+              <a:solidFill>
+                <a:srgbClr val="E08A00"/>
+              </a:solidFill>
+            </c:spPr>
+          </c:dPt>
+          <c:dPt>
+            <c:idx val="2"/>
+            <c:spPr>
+              <a:solidFill>
+                <a:srgbClr val="00A585"/>
+              </a:solidFill>
+            </c:spPr>
+          </c:dPt>
+          <c:dPt>
+            <c:idx val="3"/>
+            <c:spPr>
+              <a:solidFill>
+                <a:srgbClr val="8C8C9A"/>
+              </a:solidFill>
+            </c:spPr>
+          </c:dPt>
+          <c:cat>
+            <c:strRef>
+              <c:f>Sheet1!$A$2:$A$5</c:f>
+              <c:strCache>
+                <c:ptCount val="4"/>
+                <c:pt idx="0">
+                  <c:v>기능 추가 (feat/add)</c:v>
+                </c:pt>
+                <c:pt idx="1">
+                  <c:v>수정 (fix)</c:v>
+                </c:pt>
+                <c:pt idx="2">
+                  <c:v>문서 (docs)</c:v>
+                </c:pt>
+                <c:pt idx="3">
+                  <c:v>기타 (chore·refactor·test 등)</c:v>
+                </c:pt>
+              </c:strCache>
+            </c:strRef>
+          </c:cat>
+          <c:val>
+            <c:numRef>
+              <c:f>Sheet1!$B$2:$B$5</c:f>
+              <c:numCache>
+                <c:formatCode>General</c:formatCode>
+                <c:ptCount val="4"/>
+                <c:pt idx="0">
+                  <c:v>256</c:v>
+                </c:pt>
+                <c:pt idx="1">
+                  <c:v>133</c:v>
+                </c:pt>
+                <c:pt idx="2">
+                  <c:v>51</c:v>
+                </c:pt>
+                <c:pt idx="3">
+                  <c:v>146</c:v>
+                </c:pt>
+              </c:numCache>
+            </c:numRef>
+          </c:val>
+        </c:ser>
+        <c:dLbls>
+          <c:numFmt formatCode="0%" sourceLinked="0"/>
+          <c:txPr>
+            <a:bodyPr/>
+            <a:lstStyle/>
+            <a:p>
+              <a:pPr>
+                <a:defRPr sz="1300" b="1">
+                  <a:solidFill>
+                    <a:srgbClr val="FFFFFF"/>
+                  </a:solidFill>
+                  <a:latin typeface="맑은 고딕"/>
+                </a:defRPr>
+              </a:pPr>
+            </a:p>
+          </c:txPr>
+          <c:showLegendKey val="0"/>
+          <c:showVal val="0"/>
+          <c:showCatName val="0"/>
+          <c:showSerName val="0"/>
+          <c:showPercent val="1"/>
+          <c:showBubbleSize val="0"/>
+          <c:showLeaderLines val="1"/>
+        </c:dLbls>
+        <c:firstSliceAng val="0"/>
+        <c:holeSize val="50"/>
+      </c:doughnutChart>
+    </c:plotArea>
+    <c:legend>
+      <c:legendPos/>
+      <c:layout/>
+      <c:overlay val="0"/>
+      <c:txPr>
+        <a:bodyPr/>
+        <a:lstStyle/>
+        <a:p>
+          <a:pPr>
+            <a:defRPr sz="1300">
+              <a:latin typeface="맑은 고딕"/>
+            </a:defRPr>
+          </a:pPr>
+        </a:p>
+      </c:txPr>
+    </c:legend>
+    <c:plotVisOnly val="1"/>
+    <c:dispBlanksAs val="gap"/>
+    <c:showDLblsOverMax val="0"/>
+  </c:chart>
+  <c:txPr>
+    <a:bodyPr/>
+    <a:lstStyle/>
+    <a:p>
+      <a:pPr>
+        <a:defRPr sz="1800"/>
+      </a:pPr>
+      <a:endParaRPr/>
+    </a:p>
+  </c:txPr>
+  <c:externalData r:id="rId1">
+    <c:autoUpdate val="0"/>
+  </c:externalData>
+</c:chartSpace>
 </file>
 
 <file path=ppt/slideLayouts/slideLayout1.xml><?xml version="1.0" encoding="utf-8"?>
@@ -5750,7 +7418,7 @@
               </a:defRPr>
             </a:pPr>
             <a:r>
-              <a:t>기간·비용의 의미 — 세 가지 환산</a:t>
+              <a:t>개발 기간 비교 — 인력 투입 방식별</a:t>
             </a:r>
           </a:p>
         </p:txBody>
@@ -5801,60 +7469,14 @@
       </p:sp>
       <p:sp>
         <p:nvSpPr>
-          <p:cNvPr id="5" name="Rounded Rectangle 4"/>
-          <p:cNvSpPr/>
-          <p:nvPr/>
-        </p:nvSpPr>
-        <p:spPr>
-          <a:xfrm>
-            <a:off x="457200" y="1188720"/>
-            <a:ext cx="11247120" cy="5212080"/>
-          </a:xfrm>
-          <a:prstGeom prst="roundRect">
-            <a:avLst/>
-          </a:prstGeom>
-          <a:solidFill>
-            <a:srgbClr val="F8F9FB"/>
-          </a:solidFill>
-          <a:ln w="12700">
-            <a:solidFill>
-              <a:srgbClr val="E0E0E8"/>
-            </a:solidFill>
-          </a:ln>
-          <a:effectLst/>
-        </p:spPr>
-        <p:style>
-          <a:lnRef idx="1">
-            <a:schemeClr val="accent1"/>
-          </a:lnRef>
-          <a:fillRef idx="3">
-            <a:schemeClr val="accent1"/>
-          </a:fillRef>
-          <a:effectRef idx="2">
-            <a:schemeClr val="accent1"/>
-          </a:effectRef>
-          <a:fontRef idx="minor">
-            <a:schemeClr val="lt1"/>
-          </a:fontRef>
-        </p:style>
-        <p:txBody>
-          <a:bodyPr rtlCol="0" anchor="ctr"/>
-          <a:lstStyle/>
-          <a:p>
-            <a:pPr algn="ctr"/>
-          </a:p>
-        </p:txBody>
-      </p:sp>
-      <p:sp>
-        <p:nvSpPr>
-          <p:cNvPr id="6" name="TextBox 5"/>
+          <p:cNvPr id="5" name="TextBox 4"/>
           <p:cNvSpPr txBox="1"/>
           <p:nvPr/>
         </p:nvSpPr>
         <p:spPr>
           <a:xfrm>
-            <a:off x="822960" y="1371600"/>
-            <a:ext cx="10515600" cy="4846320"/>
+            <a:off x="594360" y="960120"/>
+            <a:ext cx="10972800" cy="365760"/>
           </a:xfrm>
           <a:prstGeom prst="rect">
             <a:avLst/>
@@ -5867,124 +7489,62 @@
           </a:bodyPr>
           <a:lstStyle/>
           <a:p>
-            <a:pPr>
-              <a:lnSpc>
-                <a:spcPct val="140000"/>
-              </a:lnSpc>
-              <a:spcBef>
-                <a:spcPts val="600"/>
-              </a:spcBef>
-              <a:spcAft>
-                <a:spcPts val="200"/>
-              </a:spcAft>
-              <a:defRPr sz="1600">
-                <a:solidFill>
-                  <a:srgbClr val="1F1F1F"/>
-                </a:solidFill>
-                <a:latin typeface="맑은 고딕"/>
-              </a:defRPr>
-            </a:pPr>
-            <a:r>
-              <a:t>가장 강력한 비교: 같은 1명이 AI 없이 개발하면 약 2.5~3년 → AI와 함께 4.5개월</a:t>
-            </a:r>
-          </a:p>
-          <a:p>
-            <a:pPr>
-              <a:lnSpc>
-                <a:spcPct val="140000"/>
-              </a:lnSpc>
-              <a:spcBef>
-                <a:spcPts val="600"/>
-              </a:spcBef>
-              <a:spcAft>
-                <a:spcPts val="200"/>
-              </a:spcAft>
-              <a:defRPr sz="1600">
-                <a:solidFill>
-                  <a:srgbClr val="1F1F1F"/>
-                </a:solidFill>
-                <a:latin typeface="맑은 고딕"/>
-              </a:defRPr>
-            </a:pPr>
-            <a:r>
-              <a:t>팀 환산: 1인+AI의 산출량이 외주 3~4인 팀 수준 — 개발 속도 피크 주 81커밋, 주 평균 약 42커밋 (git 실측)</a:t>
-            </a:r>
-          </a:p>
-          <a:p>
-            <a:pPr>
-              <a:lnSpc>
-                <a:spcPct val="140000"/>
-              </a:lnSpc>
-              <a:spcBef>
-                <a:spcPts val="600"/>
-              </a:spcBef>
-              <a:spcAft>
-                <a:spcPts val="200"/>
-              </a:spcAft>
-              <a:defRPr sz="1600">
-                <a:solidFill>
-                  <a:srgbClr val="1F1F1F"/>
-                </a:solidFill>
-                <a:latin typeface="맑은 고딕"/>
-              </a:defRPr>
-            </a:pPr>
-            <a:r>
-              <a:t>문서까지 포함: 사용자 매뉴얼(805줄)·장애 대응서 20종·발표 PPT 56슬라이드 — 통상 2~4주 분량을 수일 내 생성 (추정)</a:t>
-            </a:r>
-          </a:p>
-          <a:p>
-            <a:pPr>
-              <a:lnSpc>
-                <a:spcPct val="140000"/>
-              </a:lnSpc>
-              <a:spcBef>
-                <a:spcPts val="600"/>
-              </a:spcBef>
-              <a:spcAft>
-                <a:spcPts val="200"/>
-              </a:spcAft>
-              <a:defRPr sz="1600">
-                <a:solidFill>
-                  <a:srgbClr val="1F1F1F"/>
-                </a:solidFill>
-                <a:latin typeface="맑은 고딕"/>
-              </a:defRPr>
-            </a:pPr>
-          </a:p>
-          <a:p>
-            <a:pPr>
-              <a:lnSpc>
-                <a:spcPct val="140000"/>
-              </a:lnSpc>
-              <a:spcBef>
-                <a:spcPts val="600"/>
-              </a:spcBef>
-              <a:spcAft>
-                <a:spcPts val="200"/>
-              </a:spcAft>
-              <a:defRPr sz="1600">
-                <a:solidFill>
-                  <a:srgbClr val="1F1F1F"/>
-                </a:solidFill>
-                <a:latin typeface="맑은 고딕"/>
-              </a:defRPr>
-            </a:pPr>
-            <a:r>
-              <a:t>발표 시 유의 (정직성 원칙):</a:t>
-            </a:r>
-          </a:p>
-          <a:p>
-            <a:pPr lvl="1">
-              <a:lnSpc>
-                <a:spcPct val="140000"/>
-              </a:lnSpc>
-              <a:spcBef>
-                <a:spcPts val="200"/>
-              </a:spcBef>
-              <a:spcAft>
-                <a:spcPts val="200"/>
-              </a:spcAft>
-              <a:defRPr sz="1500">
+            <a:pPr algn="l">
+              <a:defRPr sz="1400" b="0">
+                <a:solidFill>
+                  <a:srgbClr val="5A5A6E"/>
+                </a:solidFill>
+                <a:latin typeface="맑은 고딕"/>
+              </a:defRPr>
+            </a:pPr>
+            <a:r>
+              <a:t>같은 결과물(약 700 FP)을 만드는 데 걸리는 기간. 인원이 줄수록 겸업으로 기간↑ — 그런데 1명+AI가 팀보다 빠름</a:t>
+            </a:r>
+          </a:p>
+        </p:txBody>
+      </p:sp>
+      <p:graphicFrame>
+        <p:nvGraphicFramePr>
+          <p:cNvPr id="6" name="Chart 5"/>
+          <p:cNvGraphicFramePr>
+            <a:graphicFrameLocks noGrp="1"/>
+          </p:cNvGraphicFramePr>
+          <p:nvPr/>
+        </p:nvGraphicFramePr>
+        <p:xfrm>
+          <a:off x="640080" y="1417320"/>
+          <a:ext cx="10881360" cy="4754880"/>
+        </p:xfrm>
+        <a:graphic>
+          <a:graphicData uri="http://schemas.openxmlformats.org/drawingml/2006/chart">
+            <c:chart xmlns:c="http://schemas.openxmlformats.org/drawingml/2006/chart" r:id="rId2"/>
+          </a:graphicData>
+        </a:graphic>
+      </p:graphicFrame>
+      <p:sp>
+        <p:nvSpPr>
+          <p:cNvPr id="7" name="TextBox 6"/>
+          <p:cNvSpPr txBox="1"/>
+          <p:nvPr/>
+        </p:nvSpPr>
+        <p:spPr>
+          <a:xfrm>
+            <a:off x="594360" y="6355080"/>
+            <a:ext cx="10972800" cy="365760"/>
+          </a:xfrm>
+          <a:prstGeom prst="rect">
+            <a:avLst/>
+          </a:prstGeom>
+          <a:noFill/>
+        </p:spPr>
+        <p:txBody>
+          <a:bodyPr wrap="square">
+            <a:spAutoFit/>
+          </a:bodyPr>
+          <a:lstStyle/>
+          <a:p>
+            <a:pPr algn="l">
+              <a:defRPr sz="1000" b="0">
                 <a:solidFill>
                   <a:srgbClr val="8C8C9A"/>
                 </a:solidFill>
@@ -5992,36 +7552,14 @@
               </a:defRPr>
             </a:pPr>
             <a:r>
-              <a:t>실측(커밋·코드·기능 수)과 추정(FP·비용·기간)을 구분해 표기</a:t>
-            </a:r>
-          </a:p>
-          <a:p>
-            <a:pPr lvl="1">
-              <a:lnSpc>
-                <a:spcPct val="140000"/>
-              </a:lnSpc>
-              <a:spcBef>
-                <a:spcPts val="200"/>
-              </a:spcBef>
-              <a:spcAft>
-                <a:spcPts val="200"/>
-              </a:spcAft>
-              <a:defRPr sz="1500">
-                <a:solidFill>
-                  <a:srgbClr val="8C8C9A"/>
-                </a:solidFill>
-                <a:latin typeface="맑은 고딕"/>
-              </a:defRPr>
-            </a:pPr>
-            <a:r>
-              <a:t>“AI가 99% 작성” ≠ 자동 — 요건 정의·도메인 판단·실환경 검증은 사람의 몫 (역량 있는 운전자 전제)</a:t>
-            </a:r>
-          </a:p>
-        </p:txBody>
-      </p:sp>
-      <p:sp>
-        <p:nvSpPr>
-          <p:cNvPr id="7" name="TextBox 6"/>
+              <a:t>※ 외주 맨먼스(약 28MM) 기준 인원별 환산. 1명(AI 없이)은 순수 1인 환산치(≈2.5~3년). 개략 추정.</a:t>
+            </a:r>
+          </a:p>
+        </p:txBody>
+      </p:sp>
+      <p:sp>
+        <p:nvSpPr>
+          <p:cNvPr id="8" name="TextBox 7"/>
           <p:cNvSpPr txBox="1"/>
           <p:nvPr/>
         </p:nvSpPr>
@@ -6090,13 +7628,13 @@
         <p:spPr>
           <a:xfrm>
             <a:off x="0" y="0"/>
-            <a:ext cx="109728" cy="6858000"/>
+            <a:ext cx="12191695" cy="45720"/>
           </a:xfrm>
           <a:prstGeom prst="rect">
             <a:avLst/>
           </a:prstGeom>
           <a:solidFill>
-            <a:srgbClr val="E08A00"/>
+            <a:srgbClr val="6C2ED6"/>
           </a:solidFill>
           <a:ln>
             <a:noFill/>
@@ -6127,20 +7665,56 @@
       </p:sp>
       <p:sp>
         <p:nvSpPr>
-          <p:cNvPr id="3" name="Oval 2"/>
+          <p:cNvPr id="3" name="TextBox 2"/>
+          <p:cNvSpPr txBox="1"/>
+          <p:nvPr/>
+        </p:nvSpPr>
+        <p:spPr>
+          <a:xfrm>
+            <a:off x="548640" y="274320"/>
+            <a:ext cx="10972800" cy="640080"/>
+          </a:xfrm>
+          <a:prstGeom prst="rect">
+            <a:avLst/>
+          </a:prstGeom>
+          <a:noFill/>
+        </p:spPr>
+        <p:txBody>
+          <a:bodyPr wrap="square">
+            <a:spAutoFit/>
+          </a:bodyPr>
+          <a:lstStyle/>
+          <a:p>
+            <a:pPr algn="l">
+              <a:defRPr sz="2600" b="1">
+                <a:solidFill>
+                  <a:srgbClr val="1F1F1F"/>
+                </a:solidFill>
+                <a:latin typeface="맑은 고딕"/>
+              </a:defRPr>
+            </a:pPr>
+            <a:r>
+              <a:t>총 비용 비교 — 외주(팀) vs 1인+AI</a:t>
+            </a:r>
+          </a:p>
+        </p:txBody>
+      </p:sp>
+      <p:sp>
+        <p:nvSpPr>
+          <p:cNvPr id="4" name="Rectangle 3"/>
           <p:cNvSpPr/>
           <p:nvPr/>
         </p:nvSpPr>
         <p:spPr>
           <a:xfrm>
-            <a:off x="1371600" y="2011680"/>
-            <a:ext cx="1097280" cy="1097280"/>
-          </a:xfrm>
-          <a:prstGeom prst="ellipse">
+            <a:off x="548640" y="914400"/>
+            <a:ext cx="1828800" cy="32004"/>
+          </a:xfrm>
+          <a:prstGeom prst="rect">
             <a:avLst/>
           </a:prstGeom>
           <a:solidFill>
-            <a:srgbClr val="E08A00"/>
+            <a:srgbClr val="6C2ED6"/>
           </a:solidFill>
           <a:ln>
             <a:noFill/>
@@ -6165,33 +7739,20 @@
           <a:bodyPr rtlCol="0" anchor="ctr"/>
           <a:lstStyle/>
           <a:p>
-            <a:pPr algn="ctr">
-              <a:spcBef>
-                <a:spcPts val="1200"/>
-              </a:spcBef>
-              <a:defRPr sz="3600" b="1">
-                <a:solidFill>
-                  <a:srgbClr val="FFFFFF"/>
-                </a:solidFill>
-                <a:latin typeface="맑은 고딕"/>
-              </a:defRPr>
-            </a:pPr>
-            <a:r>
-              <a:t>4</a:t>
-            </a:r>
-          </a:p>
-        </p:txBody>
-      </p:sp>
-      <p:sp>
-        <p:nvSpPr>
-          <p:cNvPr id="4" name="TextBox 3"/>
+            <a:pPr algn="ctr"/>
+          </a:p>
+        </p:txBody>
+      </p:sp>
+      <p:sp>
+        <p:nvSpPr>
+          <p:cNvPr id="5" name="TextBox 4"/>
           <p:cNvSpPr txBox="1"/>
           <p:nvPr/>
         </p:nvSpPr>
         <p:spPr>
           <a:xfrm>
-            <a:off x="2926080" y="1828800"/>
-            <a:ext cx="8229600" cy="914400"/>
+            <a:off x="594360" y="960120"/>
+            <a:ext cx="10972800" cy="365760"/>
           </a:xfrm>
           <a:prstGeom prst="rect">
             <a:avLst/>
@@ -6205,29 +7766,47 @@
           <a:lstStyle/>
           <a:p>
             <a:pPr algn="l">
-              <a:defRPr sz="4000" b="1">
-                <a:solidFill>
-                  <a:srgbClr val="1F1F1F"/>
-                </a:solidFill>
-                <a:latin typeface="맑은 고딕"/>
-              </a:defRPr>
-            </a:pPr>
-            <a:r>
-              <a:t>업무 자동화·생산성 향상</a:t>
-            </a:r>
-          </a:p>
-        </p:txBody>
-      </p:sp>
-      <p:sp>
-        <p:nvSpPr>
-          <p:cNvPr id="5" name="TextBox 4"/>
+              <a:defRPr sz="1400" b="0">
+                <a:solidFill>
+                  <a:srgbClr val="5A5A6E"/>
+                </a:solidFill>
+                <a:latin typeface="맑은 고딕"/>
+              </a:defRPr>
+            </a:pPr>
+            <a:r>
+              <a:t>단위: 만원 · 약 8~11배 절감</a:t>
+            </a:r>
+          </a:p>
+        </p:txBody>
+      </p:sp>
+      <p:graphicFrame>
+        <p:nvGraphicFramePr>
+          <p:cNvPr id="6" name="Chart 5"/>
+          <p:cNvGraphicFramePr>
+            <a:graphicFrameLocks noGrp="1"/>
+          </p:cNvGraphicFramePr>
+          <p:nvPr/>
+        </p:nvGraphicFramePr>
+        <p:xfrm>
+          <a:off x="640080" y="1417320"/>
+          <a:ext cx="10881360" cy="4754880"/>
+        </p:xfrm>
+        <a:graphic>
+          <a:graphicData uri="http://schemas.openxmlformats.org/drawingml/2006/chart">
+            <c:chart xmlns:c="http://schemas.openxmlformats.org/drawingml/2006/chart" r:id="rId2"/>
+          </a:graphicData>
+        </a:graphic>
+      </p:graphicFrame>
+      <p:sp>
+        <p:nvSpPr>
+          <p:cNvPr id="7" name="TextBox 6"/>
           <p:cNvSpPr txBox="1"/>
           <p:nvPr/>
         </p:nvSpPr>
         <p:spPr>
           <a:xfrm>
-            <a:off x="2926080" y="2926080"/>
-            <a:ext cx="8229600" cy="548640"/>
+            <a:off x="594360" y="6355080"/>
+            <a:ext cx="10972800" cy="365760"/>
           </a:xfrm>
           <a:prstGeom prst="rect">
             <a:avLst/>
@@ -6241,104 +7820,52 @@
           <a:lstStyle/>
           <a:p>
             <a:pPr algn="l">
-              <a:defRPr sz="1800" b="0">
-                <a:solidFill>
-                  <a:srgbClr val="5A5A6E"/>
-                </a:solidFill>
-                <a:latin typeface="맑은 고딕"/>
-              </a:defRPr>
-            </a:pPr>
-            <a:r>
-              <a:t>사람이 하던 일 → 시스템이 하는 일</a:t>
-            </a:r>
-          </a:p>
-        </p:txBody>
-      </p:sp>
-      <p:sp>
-        <p:nvSpPr>
-          <p:cNvPr id="6" name="Rectangle 5"/>
-          <p:cNvSpPr/>
-          <p:nvPr/>
-        </p:nvSpPr>
-        <p:spPr>
-          <a:xfrm>
-            <a:off x="2926080" y="3657600"/>
-            <a:ext cx="3657600" cy="36576"/>
+              <a:defRPr sz="1000" b="0">
+                <a:solidFill>
+                  <a:srgbClr val="8C8C9A"/>
+                </a:solidFill>
+                <a:latin typeface="맑은 고딕"/>
+              </a:defRPr>
+            </a:pPr>
+            <a:r>
+              <a:t>※ 외주는 SW사업 대가/맨먼스 기준 추정, QA·문서·하자보수 포함. 1인+AI는 내부 인건비+AI 구독. 동일 조건 비교 아님.</a:t>
+            </a:r>
+          </a:p>
+        </p:txBody>
+      </p:sp>
+      <p:sp>
+        <p:nvSpPr>
+          <p:cNvPr id="8" name="TextBox 7"/>
+          <p:cNvSpPr txBox="1"/>
+          <p:nvPr/>
+        </p:nvSpPr>
+        <p:spPr>
+          <a:xfrm>
+            <a:off x="10972800" y="6492240"/>
+            <a:ext cx="914400" cy="274320"/>
           </a:xfrm>
           <a:prstGeom prst="rect">
             <a:avLst/>
           </a:prstGeom>
-          <a:solidFill>
-            <a:srgbClr val="E08A00"/>
-          </a:solidFill>
-          <a:ln>
-            <a:noFill/>
-          </a:ln>
-          <a:effectLst/>
-        </p:spPr>
-        <p:style>
-          <a:lnRef idx="1">
-            <a:schemeClr val="accent1"/>
-          </a:lnRef>
-          <a:fillRef idx="3">
-            <a:schemeClr val="accent1"/>
-          </a:fillRef>
-          <a:effectRef idx="2">
-            <a:schemeClr val="accent1"/>
-          </a:effectRef>
-          <a:fontRef idx="minor">
-            <a:schemeClr val="lt1"/>
-          </a:fontRef>
-        </p:style>
-        <p:txBody>
-          <a:bodyPr rtlCol="0" anchor="ctr"/>
-          <a:lstStyle/>
-          <a:p>
-            <a:pPr algn="ctr"/>
-          </a:p>
-        </p:txBody>
-      </p:sp>
-      <p:sp>
-        <p:nvSpPr>
-          <p:cNvPr id="7" name="Rectangle 6"/>
-          <p:cNvSpPr/>
-          <p:nvPr/>
-        </p:nvSpPr>
-        <p:spPr>
-          <a:xfrm>
-            <a:off x="0" y="6748272"/>
-            <a:ext cx="12191695" cy="54864"/>
-          </a:xfrm>
-          <a:prstGeom prst="rect">
-            <a:avLst/>
-          </a:prstGeom>
-          <a:solidFill>
-            <a:srgbClr val="E08A00"/>
-          </a:solidFill>
-          <a:ln>
-            <a:noFill/>
-          </a:ln>
-          <a:effectLst/>
-        </p:spPr>
-        <p:style>
-          <a:lnRef idx="1">
-            <a:schemeClr val="accent1"/>
-          </a:lnRef>
-          <a:fillRef idx="3">
-            <a:schemeClr val="accent1"/>
-          </a:fillRef>
-          <a:effectRef idx="2">
-            <a:schemeClr val="accent1"/>
-          </a:effectRef>
-          <a:fontRef idx="minor">
-            <a:schemeClr val="lt1"/>
-          </a:fontRef>
-        </p:style>
-        <p:txBody>
-          <a:bodyPr rtlCol="0" anchor="ctr"/>
-          <a:lstStyle/>
-          <a:p>
-            <a:pPr algn="ctr"/>
+          <a:noFill/>
+        </p:spPr>
+        <p:txBody>
+          <a:bodyPr wrap="square">
+            <a:spAutoFit/>
+          </a:bodyPr>
+          <a:lstStyle/>
+          <a:p>
+            <a:pPr algn="r">
+              <a:defRPr sz="1000" b="0">
+                <a:solidFill>
+                  <a:srgbClr val="8C8C9A"/>
+                </a:solidFill>
+                <a:latin typeface="맑은 고딕"/>
+              </a:defRPr>
+            </a:pPr>
+            <a:r>
+              <a:t>15</a:t>
+            </a:r>
           </a:p>
         </p:txBody>
       </p:sp>
@@ -6351,6 +7878,1682 @@
 </file>
 
 <file path=ppt/slides/slide16.xml><?xml version="1.0" encoding="utf-8"?>
+<p:sld xmlns:a="http://schemas.openxmlformats.org/drawingml/2006/main" xmlns:p="http://schemas.openxmlformats.org/presentationml/2006/main" xmlns:r="http://schemas.openxmlformats.org/officeDocument/2006/relationships">
+  <p:cSld>
+    <p:bg>
+      <p:bgPr>
+        <a:solidFill>
+          <a:srgbClr val="FFFFFF"/>
+        </a:solidFill>
+        <a:effectLst/>
+      </p:bgPr>
+    </p:bg>
+    <p:spTree>
+      <p:nvGrpSpPr>
+        <p:cNvPr id="1" name=""/>
+        <p:cNvGrpSpPr/>
+        <p:nvPr/>
+      </p:nvGrpSpPr>
+      <p:grpSpPr/>
+      <p:sp>
+        <p:nvSpPr>
+          <p:cNvPr id="2" name="Rectangle 1"/>
+          <p:cNvSpPr/>
+          <p:nvPr/>
+        </p:nvSpPr>
+        <p:spPr>
+          <a:xfrm>
+            <a:off x="0" y="0"/>
+            <a:ext cx="12191695" cy="45720"/>
+          </a:xfrm>
+          <a:prstGeom prst="rect">
+            <a:avLst/>
+          </a:prstGeom>
+          <a:solidFill>
+            <a:srgbClr val="6C2ED6"/>
+          </a:solidFill>
+          <a:ln>
+            <a:noFill/>
+          </a:ln>
+          <a:effectLst/>
+        </p:spPr>
+        <p:style>
+          <a:lnRef idx="1">
+            <a:schemeClr val="accent1"/>
+          </a:lnRef>
+          <a:fillRef idx="3">
+            <a:schemeClr val="accent1"/>
+          </a:fillRef>
+          <a:effectRef idx="2">
+            <a:schemeClr val="accent1"/>
+          </a:effectRef>
+          <a:fontRef idx="minor">
+            <a:schemeClr val="lt1"/>
+          </a:fontRef>
+        </p:style>
+        <p:txBody>
+          <a:bodyPr rtlCol="0" anchor="ctr"/>
+          <a:lstStyle/>
+          <a:p>
+            <a:pPr algn="ctr"/>
+          </a:p>
+        </p:txBody>
+      </p:sp>
+      <p:sp>
+        <p:nvSpPr>
+          <p:cNvPr id="3" name="TextBox 2"/>
+          <p:cNvSpPr txBox="1"/>
+          <p:nvPr/>
+        </p:nvSpPr>
+        <p:spPr>
+          <a:xfrm>
+            <a:off x="548640" y="274320"/>
+            <a:ext cx="10972800" cy="640080"/>
+          </a:xfrm>
+          <a:prstGeom prst="rect">
+            <a:avLst/>
+          </a:prstGeom>
+          <a:noFill/>
+        </p:spPr>
+        <p:txBody>
+          <a:bodyPr wrap="square">
+            <a:spAutoFit/>
+          </a:bodyPr>
+          <a:lstStyle/>
+          <a:p>
+            <a:pPr algn="l">
+              <a:defRPr sz="2600" b="1">
+                <a:solidFill>
+                  <a:srgbClr val="1F1F1F"/>
+                </a:solidFill>
+                <a:latin typeface="맑은 고딕"/>
+              </a:defRPr>
+            </a:pPr>
+            <a:r>
+              <a:t>인당 생산성 — 외주 vs 1인+AI</a:t>
+            </a:r>
+          </a:p>
+        </p:txBody>
+      </p:sp>
+      <p:sp>
+        <p:nvSpPr>
+          <p:cNvPr id="4" name="Rectangle 3"/>
+          <p:cNvSpPr/>
+          <p:nvPr/>
+        </p:nvSpPr>
+        <p:spPr>
+          <a:xfrm>
+            <a:off x="548640" y="914400"/>
+            <a:ext cx="1828800" cy="32004"/>
+          </a:xfrm>
+          <a:prstGeom prst="rect">
+            <a:avLst/>
+          </a:prstGeom>
+          <a:solidFill>
+            <a:srgbClr val="6C2ED6"/>
+          </a:solidFill>
+          <a:ln>
+            <a:noFill/>
+          </a:ln>
+          <a:effectLst/>
+        </p:spPr>
+        <p:style>
+          <a:lnRef idx="1">
+            <a:schemeClr val="accent1"/>
+          </a:lnRef>
+          <a:fillRef idx="3">
+            <a:schemeClr val="accent1"/>
+          </a:fillRef>
+          <a:effectRef idx="2">
+            <a:schemeClr val="accent1"/>
+          </a:effectRef>
+          <a:fontRef idx="minor">
+            <a:schemeClr val="lt1"/>
+          </a:fontRef>
+        </p:style>
+        <p:txBody>
+          <a:bodyPr rtlCol="0" anchor="ctr"/>
+          <a:lstStyle/>
+          <a:p>
+            <a:pPr algn="ctr"/>
+          </a:p>
+        </p:txBody>
+      </p:sp>
+      <p:sp>
+        <p:nvSpPr>
+          <p:cNvPr id="5" name="TextBox 4"/>
+          <p:cNvSpPr txBox="1"/>
+          <p:nvPr/>
+        </p:nvSpPr>
+        <p:spPr>
+          <a:xfrm>
+            <a:off x="594360" y="960120"/>
+            <a:ext cx="10972800" cy="365760"/>
+          </a:xfrm>
+          <a:prstGeom prst="rect">
+            <a:avLst/>
+          </a:prstGeom>
+          <a:noFill/>
+        </p:spPr>
+        <p:txBody>
+          <a:bodyPr wrap="square">
+            <a:spAutoFit/>
+          </a:bodyPr>
+          <a:lstStyle/>
+          <a:p>
+            <a:pPr algn="l">
+              <a:defRPr sz="1400" b="0">
+                <a:solidFill>
+                  <a:srgbClr val="5A5A6E"/>
+                </a:solidFill>
+                <a:latin typeface="맑은 고딕"/>
+              </a:defRPr>
+            </a:pPr>
+            <a:r>
+              <a:t>맨먼스당 기능점수(FP/MM) · 약 7~8배</a:t>
+            </a:r>
+          </a:p>
+        </p:txBody>
+      </p:sp>
+      <p:graphicFrame>
+        <p:nvGraphicFramePr>
+          <p:cNvPr id="6" name="Chart 5"/>
+          <p:cNvGraphicFramePr>
+            <a:graphicFrameLocks noGrp="1"/>
+          </p:cNvGraphicFramePr>
+          <p:nvPr/>
+        </p:nvGraphicFramePr>
+        <p:xfrm>
+          <a:off x="640080" y="1417320"/>
+          <a:ext cx="10881360" cy="4754880"/>
+        </p:xfrm>
+        <a:graphic>
+          <a:graphicData uri="http://schemas.openxmlformats.org/drawingml/2006/chart">
+            <c:chart xmlns:c="http://schemas.openxmlformats.org/drawingml/2006/chart" r:id="rId2"/>
+          </a:graphicData>
+        </a:graphic>
+      </p:graphicFrame>
+      <p:sp>
+        <p:nvSpPr>
+          <p:cNvPr id="7" name="TextBox 6"/>
+          <p:cNvSpPr txBox="1"/>
+          <p:nvPr/>
+        </p:nvSpPr>
+        <p:spPr>
+          <a:xfrm>
+            <a:off x="594360" y="6355080"/>
+            <a:ext cx="10972800" cy="365760"/>
+          </a:xfrm>
+          <a:prstGeom prst="rect">
+            <a:avLst/>
+          </a:prstGeom>
+          <a:noFill/>
+        </p:spPr>
+        <p:txBody>
+          <a:bodyPr wrap="square">
+            <a:spAutoFit/>
+          </a:bodyPr>
+          <a:lstStyle/>
+          <a:p>
+            <a:pPr algn="l">
+              <a:defRPr sz="1000" b="0">
+                <a:solidFill>
+                  <a:srgbClr val="8C8C9A"/>
+                </a:solidFill>
+                <a:latin typeface="맑은 고딕"/>
+              </a:defRPr>
+            </a:pPr>
+            <a:r>
+              <a:t>※ FP는 구조 기반 개략 추정. '역량 있는 개발자 + AI' 전제(AI ≠ 완전 자동).</a:t>
+            </a:r>
+          </a:p>
+        </p:txBody>
+      </p:sp>
+      <p:sp>
+        <p:nvSpPr>
+          <p:cNvPr id="8" name="TextBox 7"/>
+          <p:cNvSpPr txBox="1"/>
+          <p:nvPr/>
+        </p:nvSpPr>
+        <p:spPr>
+          <a:xfrm>
+            <a:off x="10972800" y="6492240"/>
+            <a:ext cx="914400" cy="274320"/>
+          </a:xfrm>
+          <a:prstGeom prst="rect">
+            <a:avLst/>
+          </a:prstGeom>
+          <a:noFill/>
+        </p:spPr>
+        <p:txBody>
+          <a:bodyPr wrap="square">
+            <a:spAutoFit/>
+          </a:bodyPr>
+          <a:lstStyle/>
+          <a:p>
+            <a:pPr algn="r">
+              <a:defRPr sz="1000" b="0">
+                <a:solidFill>
+                  <a:srgbClr val="8C8C9A"/>
+                </a:solidFill>
+                <a:latin typeface="맑은 고딕"/>
+              </a:defRPr>
+            </a:pPr>
+            <a:r>
+              <a:t>16</a:t>
+            </a:r>
+          </a:p>
+        </p:txBody>
+      </p:sp>
+    </p:spTree>
+  </p:cSld>
+  <p:clrMapOvr>
+    <a:masterClrMapping/>
+  </p:clrMapOvr>
+</p:sld>
+</file>
+
+<file path=ppt/slides/slide17.xml><?xml version="1.0" encoding="utf-8"?>
+<p:sld xmlns:a="http://schemas.openxmlformats.org/drawingml/2006/main" xmlns:p="http://schemas.openxmlformats.org/presentationml/2006/main" xmlns:r="http://schemas.openxmlformats.org/officeDocument/2006/relationships">
+  <p:cSld>
+    <p:bg>
+      <p:bgPr>
+        <a:solidFill>
+          <a:srgbClr val="FFFFFF"/>
+        </a:solidFill>
+        <a:effectLst/>
+      </p:bgPr>
+    </p:bg>
+    <p:spTree>
+      <p:nvGrpSpPr>
+        <p:cNvPr id="1" name=""/>
+        <p:cNvGrpSpPr/>
+        <p:nvPr/>
+      </p:nvGrpSpPr>
+      <p:grpSpPr/>
+      <p:sp>
+        <p:nvSpPr>
+          <p:cNvPr id="2" name="Rectangle 1"/>
+          <p:cNvSpPr/>
+          <p:nvPr/>
+        </p:nvSpPr>
+        <p:spPr>
+          <a:xfrm>
+            <a:off x="0" y="0"/>
+            <a:ext cx="12191695" cy="45720"/>
+          </a:xfrm>
+          <a:prstGeom prst="rect">
+            <a:avLst/>
+          </a:prstGeom>
+          <a:solidFill>
+            <a:srgbClr val="6C2ED6"/>
+          </a:solidFill>
+          <a:ln>
+            <a:noFill/>
+          </a:ln>
+          <a:effectLst/>
+        </p:spPr>
+        <p:style>
+          <a:lnRef idx="1">
+            <a:schemeClr val="accent1"/>
+          </a:lnRef>
+          <a:fillRef idx="3">
+            <a:schemeClr val="accent1"/>
+          </a:fillRef>
+          <a:effectRef idx="2">
+            <a:schemeClr val="accent1"/>
+          </a:effectRef>
+          <a:fontRef idx="minor">
+            <a:schemeClr val="lt1"/>
+          </a:fontRef>
+        </p:style>
+        <p:txBody>
+          <a:bodyPr rtlCol="0" anchor="ctr"/>
+          <a:lstStyle/>
+          <a:p>
+            <a:pPr algn="ctr"/>
+          </a:p>
+        </p:txBody>
+      </p:sp>
+      <p:sp>
+        <p:nvSpPr>
+          <p:cNvPr id="3" name="TextBox 2"/>
+          <p:cNvSpPr txBox="1"/>
+          <p:nvPr/>
+        </p:nvSpPr>
+        <p:spPr>
+          <a:xfrm>
+            <a:off x="548640" y="274320"/>
+            <a:ext cx="10972800" cy="640080"/>
+          </a:xfrm>
+          <a:prstGeom prst="rect">
+            <a:avLst/>
+          </a:prstGeom>
+          <a:noFill/>
+        </p:spPr>
+        <p:txBody>
+          <a:bodyPr wrap="square">
+            <a:spAutoFit/>
+          </a:bodyPr>
+          <a:lstStyle/>
+          <a:p>
+            <a:pPr algn="l">
+              <a:defRPr sz="2600" b="1">
+                <a:solidFill>
+                  <a:srgbClr val="1F1F1F"/>
+                </a:solidFill>
+                <a:latin typeface="맑은 고딕"/>
+              </a:defRPr>
+            </a:pPr>
+            <a:r>
+              <a:t>개발 속도 — 월별 커밋 수 (git 실측)</a:t>
+            </a:r>
+          </a:p>
+        </p:txBody>
+      </p:sp>
+      <p:sp>
+        <p:nvSpPr>
+          <p:cNvPr id="4" name="Rectangle 3"/>
+          <p:cNvSpPr/>
+          <p:nvPr/>
+        </p:nvSpPr>
+        <p:spPr>
+          <a:xfrm>
+            <a:off x="548640" y="914400"/>
+            <a:ext cx="1828800" cy="32004"/>
+          </a:xfrm>
+          <a:prstGeom prst="rect">
+            <a:avLst/>
+          </a:prstGeom>
+          <a:solidFill>
+            <a:srgbClr val="6C2ED6"/>
+          </a:solidFill>
+          <a:ln>
+            <a:noFill/>
+          </a:ln>
+          <a:effectLst/>
+        </p:spPr>
+        <p:style>
+          <a:lnRef idx="1">
+            <a:schemeClr val="accent1"/>
+          </a:lnRef>
+          <a:fillRef idx="3">
+            <a:schemeClr val="accent1"/>
+          </a:fillRef>
+          <a:effectRef idx="2">
+            <a:schemeClr val="accent1"/>
+          </a:effectRef>
+          <a:fontRef idx="minor">
+            <a:schemeClr val="lt1"/>
+          </a:fontRef>
+        </p:style>
+        <p:txBody>
+          <a:bodyPr rtlCol="0" anchor="ctr"/>
+          <a:lstStyle/>
+          <a:p>
+            <a:pPr algn="ctr"/>
+          </a:p>
+        </p:txBody>
+      </p:sp>
+      <p:sp>
+        <p:nvSpPr>
+          <p:cNvPr id="5" name="TextBox 4"/>
+          <p:cNvSpPr txBox="1"/>
+          <p:nvPr/>
+        </p:nvSpPr>
+        <p:spPr>
+          <a:xfrm>
+            <a:off x="594360" y="960120"/>
+            <a:ext cx="10972800" cy="365760"/>
+          </a:xfrm>
+          <a:prstGeom prst="rect">
+            <a:avLst/>
+          </a:prstGeom>
+          <a:noFill/>
+        </p:spPr>
+        <p:txBody>
+          <a:bodyPr wrap="square">
+            <a:spAutoFit/>
+          </a:bodyPr>
+          <a:lstStyle/>
+          <a:p>
+            <a:pPr algn="l">
+              <a:defRPr sz="1400" b="0">
+                <a:solidFill>
+                  <a:srgbClr val="5A5A6E"/>
+                </a:solidFill>
+                <a:latin typeface="맑은 고딕"/>
+              </a:defRPr>
+            </a:pPr>
+            <a:r>
+              <a:t>스캐폴딩(2월) → 기능 폭발기(4~6월 가속) → 릴리즈 후 안정화(7월). 커밋의 99%+를 AI가 작성</a:t>
+            </a:r>
+          </a:p>
+        </p:txBody>
+      </p:sp>
+      <p:graphicFrame>
+        <p:nvGraphicFramePr>
+          <p:cNvPr id="6" name="Chart 5"/>
+          <p:cNvGraphicFramePr>
+            <a:graphicFrameLocks noGrp="1"/>
+          </p:cNvGraphicFramePr>
+          <p:nvPr/>
+        </p:nvGraphicFramePr>
+        <p:xfrm>
+          <a:off x="640080" y="1417320"/>
+          <a:ext cx="10881360" cy="4754880"/>
+        </p:xfrm>
+        <a:graphic>
+          <a:graphicData uri="http://schemas.openxmlformats.org/drawingml/2006/chart">
+            <c:chart xmlns:c="http://schemas.openxmlformats.org/drawingml/2006/chart" r:id="rId2"/>
+          </a:graphicData>
+        </a:graphic>
+      </p:graphicFrame>
+      <p:sp>
+        <p:nvSpPr>
+          <p:cNvPr id="7" name="TextBox 6"/>
+          <p:cNvSpPr txBox="1"/>
+          <p:nvPr/>
+        </p:nvSpPr>
+        <p:spPr>
+          <a:xfrm>
+            <a:off x="594360" y="6355080"/>
+            <a:ext cx="10972800" cy="365760"/>
+          </a:xfrm>
+          <a:prstGeom prst="rect">
+            <a:avLst/>
+          </a:prstGeom>
+          <a:noFill/>
+        </p:spPr>
+        <p:txBody>
+          <a:bodyPr wrap="square">
+            <a:spAutoFit/>
+          </a:bodyPr>
+          <a:lstStyle/>
+          <a:p>
+            <a:pPr algn="l">
+              <a:defRPr sz="1000" b="0">
+                <a:solidFill>
+                  <a:srgbClr val="8C8C9A"/>
+                </a:solidFill>
+                <a:latin typeface="맑은 고딕"/>
+              </a:defRPr>
+            </a:pPr>
+            <a:r>
+              <a:t>※ 3월은 커밋 없음(공백). 7월은 v0.9 릴리즈 후 안정화·문서 정비 기간이라 감소.</a:t>
+            </a:r>
+          </a:p>
+        </p:txBody>
+      </p:sp>
+      <p:sp>
+        <p:nvSpPr>
+          <p:cNvPr id="8" name="TextBox 7"/>
+          <p:cNvSpPr txBox="1"/>
+          <p:nvPr/>
+        </p:nvSpPr>
+        <p:spPr>
+          <a:xfrm>
+            <a:off x="10972800" y="6492240"/>
+            <a:ext cx="914400" cy="274320"/>
+          </a:xfrm>
+          <a:prstGeom prst="rect">
+            <a:avLst/>
+          </a:prstGeom>
+          <a:noFill/>
+        </p:spPr>
+        <p:txBody>
+          <a:bodyPr wrap="square">
+            <a:spAutoFit/>
+          </a:bodyPr>
+          <a:lstStyle/>
+          <a:p>
+            <a:pPr algn="r">
+              <a:defRPr sz="1000" b="0">
+                <a:solidFill>
+                  <a:srgbClr val="8C8C9A"/>
+                </a:solidFill>
+                <a:latin typeface="맑은 고딕"/>
+              </a:defRPr>
+            </a:pPr>
+            <a:r>
+              <a:t>17</a:t>
+            </a:r>
+          </a:p>
+        </p:txBody>
+      </p:sp>
+    </p:spTree>
+  </p:cSld>
+  <p:clrMapOvr>
+    <a:masterClrMapping/>
+  </p:clrMapOvr>
+</p:sld>
+</file>
+
+<file path=ppt/slides/slide18.xml><?xml version="1.0" encoding="utf-8"?>
+<p:sld xmlns:a="http://schemas.openxmlformats.org/drawingml/2006/main" xmlns:p="http://schemas.openxmlformats.org/presentationml/2006/main" xmlns:r="http://schemas.openxmlformats.org/officeDocument/2006/relationships">
+  <p:cSld>
+    <p:bg>
+      <p:bgPr>
+        <a:solidFill>
+          <a:srgbClr val="FFFFFF"/>
+        </a:solidFill>
+        <a:effectLst/>
+      </p:bgPr>
+    </p:bg>
+    <p:spTree>
+      <p:nvGrpSpPr>
+        <p:cNvPr id="1" name=""/>
+        <p:cNvGrpSpPr/>
+        <p:nvPr/>
+      </p:nvGrpSpPr>
+      <p:grpSpPr/>
+      <p:sp>
+        <p:nvSpPr>
+          <p:cNvPr id="2" name="Rectangle 1"/>
+          <p:cNvSpPr/>
+          <p:nvPr/>
+        </p:nvSpPr>
+        <p:spPr>
+          <a:xfrm>
+            <a:off x="0" y="0"/>
+            <a:ext cx="12191695" cy="45720"/>
+          </a:xfrm>
+          <a:prstGeom prst="rect">
+            <a:avLst/>
+          </a:prstGeom>
+          <a:solidFill>
+            <a:srgbClr val="6C2ED6"/>
+          </a:solidFill>
+          <a:ln>
+            <a:noFill/>
+          </a:ln>
+          <a:effectLst/>
+        </p:spPr>
+        <p:style>
+          <a:lnRef idx="1">
+            <a:schemeClr val="accent1"/>
+          </a:lnRef>
+          <a:fillRef idx="3">
+            <a:schemeClr val="accent1"/>
+          </a:fillRef>
+          <a:effectRef idx="2">
+            <a:schemeClr val="accent1"/>
+          </a:effectRef>
+          <a:fontRef idx="minor">
+            <a:schemeClr val="lt1"/>
+          </a:fontRef>
+        </p:style>
+        <p:txBody>
+          <a:bodyPr rtlCol="0" anchor="ctr"/>
+          <a:lstStyle/>
+          <a:p>
+            <a:pPr algn="ctr"/>
+          </a:p>
+        </p:txBody>
+      </p:sp>
+      <p:sp>
+        <p:nvSpPr>
+          <p:cNvPr id="3" name="TextBox 2"/>
+          <p:cNvSpPr txBox="1"/>
+          <p:nvPr/>
+        </p:nvSpPr>
+        <p:spPr>
+          <a:xfrm>
+            <a:off x="548640" y="274320"/>
+            <a:ext cx="10972800" cy="640080"/>
+          </a:xfrm>
+          <a:prstGeom prst="rect">
+            <a:avLst/>
+          </a:prstGeom>
+          <a:noFill/>
+        </p:spPr>
+        <p:txBody>
+          <a:bodyPr wrap="square">
+            <a:spAutoFit/>
+          </a:bodyPr>
+          <a:lstStyle/>
+          <a:p>
+            <a:pPr algn="l">
+              <a:defRPr sz="2600" b="1">
+                <a:solidFill>
+                  <a:srgbClr val="1F1F1F"/>
+                </a:solidFill>
+                <a:latin typeface="맑은 고딕"/>
+              </a:defRPr>
+            </a:pPr>
+            <a:r>
+              <a:t>기간·비용의 의미 — 세 가지 환산</a:t>
+            </a:r>
+          </a:p>
+        </p:txBody>
+      </p:sp>
+      <p:sp>
+        <p:nvSpPr>
+          <p:cNvPr id="4" name="Rectangle 3"/>
+          <p:cNvSpPr/>
+          <p:nvPr/>
+        </p:nvSpPr>
+        <p:spPr>
+          <a:xfrm>
+            <a:off x="548640" y="914400"/>
+            <a:ext cx="1828800" cy="32004"/>
+          </a:xfrm>
+          <a:prstGeom prst="rect">
+            <a:avLst/>
+          </a:prstGeom>
+          <a:solidFill>
+            <a:srgbClr val="6C2ED6"/>
+          </a:solidFill>
+          <a:ln>
+            <a:noFill/>
+          </a:ln>
+          <a:effectLst/>
+        </p:spPr>
+        <p:style>
+          <a:lnRef idx="1">
+            <a:schemeClr val="accent1"/>
+          </a:lnRef>
+          <a:fillRef idx="3">
+            <a:schemeClr val="accent1"/>
+          </a:fillRef>
+          <a:effectRef idx="2">
+            <a:schemeClr val="accent1"/>
+          </a:effectRef>
+          <a:fontRef idx="minor">
+            <a:schemeClr val="lt1"/>
+          </a:fontRef>
+        </p:style>
+        <p:txBody>
+          <a:bodyPr rtlCol="0" anchor="ctr"/>
+          <a:lstStyle/>
+          <a:p>
+            <a:pPr algn="ctr"/>
+          </a:p>
+        </p:txBody>
+      </p:sp>
+      <p:sp>
+        <p:nvSpPr>
+          <p:cNvPr id="5" name="Rounded Rectangle 4"/>
+          <p:cNvSpPr/>
+          <p:nvPr/>
+        </p:nvSpPr>
+        <p:spPr>
+          <a:xfrm>
+            <a:off x="457200" y="1188720"/>
+            <a:ext cx="11247120" cy="5212080"/>
+          </a:xfrm>
+          <a:prstGeom prst="roundRect">
+            <a:avLst/>
+          </a:prstGeom>
+          <a:solidFill>
+            <a:srgbClr val="F8F9FB"/>
+          </a:solidFill>
+          <a:ln w="12700">
+            <a:solidFill>
+              <a:srgbClr val="E0E0E8"/>
+            </a:solidFill>
+          </a:ln>
+          <a:effectLst/>
+        </p:spPr>
+        <p:style>
+          <a:lnRef idx="1">
+            <a:schemeClr val="accent1"/>
+          </a:lnRef>
+          <a:fillRef idx="3">
+            <a:schemeClr val="accent1"/>
+          </a:fillRef>
+          <a:effectRef idx="2">
+            <a:schemeClr val="accent1"/>
+          </a:effectRef>
+          <a:fontRef idx="minor">
+            <a:schemeClr val="lt1"/>
+          </a:fontRef>
+        </p:style>
+        <p:txBody>
+          <a:bodyPr rtlCol="0" anchor="ctr"/>
+          <a:lstStyle/>
+          <a:p>
+            <a:pPr algn="ctr"/>
+          </a:p>
+        </p:txBody>
+      </p:sp>
+      <p:sp>
+        <p:nvSpPr>
+          <p:cNvPr id="6" name="TextBox 5"/>
+          <p:cNvSpPr txBox="1"/>
+          <p:nvPr/>
+        </p:nvSpPr>
+        <p:spPr>
+          <a:xfrm>
+            <a:off x="822960" y="1371600"/>
+            <a:ext cx="10515600" cy="4846320"/>
+          </a:xfrm>
+          <a:prstGeom prst="rect">
+            <a:avLst/>
+          </a:prstGeom>
+          <a:noFill/>
+        </p:spPr>
+        <p:txBody>
+          <a:bodyPr wrap="square">
+            <a:spAutoFit/>
+          </a:bodyPr>
+          <a:lstStyle/>
+          <a:p>
+            <a:pPr>
+              <a:lnSpc>
+                <a:spcPct val="140000"/>
+              </a:lnSpc>
+              <a:spcBef>
+                <a:spcPts val="600"/>
+              </a:spcBef>
+              <a:spcAft>
+                <a:spcPts val="200"/>
+              </a:spcAft>
+              <a:defRPr sz="1600">
+                <a:solidFill>
+                  <a:srgbClr val="1F1F1F"/>
+                </a:solidFill>
+                <a:latin typeface="맑은 고딕"/>
+              </a:defRPr>
+            </a:pPr>
+            <a:r>
+              <a:t>가장 강력한 비교: 같은 1명이 AI 없이 개발하면 약 2.5~3년 → AI와 함께 4.5개월</a:t>
+            </a:r>
+          </a:p>
+          <a:p>
+            <a:pPr>
+              <a:lnSpc>
+                <a:spcPct val="140000"/>
+              </a:lnSpc>
+              <a:spcBef>
+                <a:spcPts val="600"/>
+              </a:spcBef>
+              <a:spcAft>
+                <a:spcPts val="200"/>
+              </a:spcAft>
+              <a:defRPr sz="1600">
+                <a:solidFill>
+                  <a:srgbClr val="1F1F1F"/>
+                </a:solidFill>
+                <a:latin typeface="맑은 고딕"/>
+              </a:defRPr>
+            </a:pPr>
+            <a:r>
+              <a:t>팀 환산: 1인+AI의 산출량이 외주 3~4인 팀 수준 — 개발 속도 피크 주 81커밋, 주 평균 약 42커밋 (git 실측)</a:t>
+            </a:r>
+          </a:p>
+          <a:p>
+            <a:pPr>
+              <a:lnSpc>
+                <a:spcPct val="140000"/>
+              </a:lnSpc>
+              <a:spcBef>
+                <a:spcPts val="600"/>
+              </a:spcBef>
+              <a:spcAft>
+                <a:spcPts val="200"/>
+              </a:spcAft>
+              <a:defRPr sz="1600">
+                <a:solidFill>
+                  <a:srgbClr val="1F1F1F"/>
+                </a:solidFill>
+                <a:latin typeface="맑은 고딕"/>
+              </a:defRPr>
+            </a:pPr>
+            <a:r>
+              <a:t>문서까지 포함: 사용자 매뉴얼(805줄)·장애 대응서 20종·발표 PPT 56슬라이드 — 통상 2~4주 분량을 수일 내 생성 (추정)</a:t>
+            </a:r>
+          </a:p>
+          <a:p>
+            <a:pPr>
+              <a:lnSpc>
+                <a:spcPct val="140000"/>
+              </a:lnSpc>
+              <a:spcBef>
+                <a:spcPts val="600"/>
+              </a:spcBef>
+              <a:spcAft>
+                <a:spcPts val="200"/>
+              </a:spcAft>
+              <a:defRPr sz="1600">
+                <a:solidFill>
+                  <a:srgbClr val="1F1F1F"/>
+                </a:solidFill>
+                <a:latin typeface="맑은 고딕"/>
+              </a:defRPr>
+            </a:pPr>
+          </a:p>
+          <a:p>
+            <a:pPr>
+              <a:lnSpc>
+                <a:spcPct val="140000"/>
+              </a:lnSpc>
+              <a:spcBef>
+                <a:spcPts val="600"/>
+              </a:spcBef>
+              <a:spcAft>
+                <a:spcPts val="200"/>
+              </a:spcAft>
+              <a:defRPr sz="1600">
+                <a:solidFill>
+                  <a:srgbClr val="1F1F1F"/>
+                </a:solidFill>
+                <a:latin typeface="맑은 고딕"/>
+              </a:defRPr>
+            </a:pPr>
+            <a:r>
+              <a:t>발표 시 유의 (정직성 원칙):</a:t>
+            </a:r>
+          </a:p>
+          <a:p>
+            <a:pPr lvl="1">
+              <a:lnSpc>
+                <a:spcPct val="140000"/>
+              </a:lnSpc>
+              <a:spcBef>
+                <a:spcPts val="200"/>
+              </a:spcBef>
+              <a:spcAft>
+                <a:spcPts val="200"/>
+              </a:spcAft>
+              <a:defRPr sz="1500">
+                <a:solidFill>
+                  <a:srgbClr val="8C8C9A"/>
+                </a:solidFill>
+                <a:latin typeface="맑은 고딕"/>
+              </a:defRPr>
+            </a:pPr>
+            <a:r>
+              <a:t>실측(커밋·코드·기능 수)과 추정(FP·비용·기간)을 구분해 표기</a:t>
+            </a:r>
+          </a:p>
+          <a:p>
+            <a:pPr lvl="1">
+              <a:lnSpc>
+                <a:spcPct val="140000"/>
+              </a:lnSpc>
+              <a:spcBef>
+                <a:spcPts val="200"/>
+              </a:spcBef>
+              <a:spcAft>
+                <a:spcPts val="200"/>
+              </a:spcAft>
+              <a:defRPr sz="1500">
+                <a:solidFill>
+                  <a:srgbClr val="8C8C9A"/>
+                </a:solidFill>
+                <a:latin typeface="맑은 고딕"/>
+              </a:defRPr>
+            </a:pPr>
+            <a:r>
+              <a:t>“AI가 99% 작성” ≠ 자동 — 요건 정의·도메인 판단·실환경 검증은 사람의 몫 (역량 있는 운전자 전제)</a:t>
+            </a:r>
+          </a:p>
+        </p:txBody>
+      </p:sp>
+      <p:sp>
+        <p:nvSpPr>
+          <p:cNvPr id="7" name="TextBox 6"/>
+          <p:cNvSpPr txBox="1"/>
+          <p:nvPr/>
+        </p:nvSpPr>
+        <p:spPr>
+          <a:xfrm>
+            <a:off x="10972800" y="6492240"/>
+            <a:ext cx="914400" cy="274320"/>
+          </a:xfrm>
+          <a:prstGeom prst="rect">
+            <a:avLst/>
+          </a:prstGeom>
+          <a:noFill/>
+        </p:spPr>
+        <p:txBody>
+          <a:bodyPr wrap="square">
+            <a:spAutoFit/>
+          </a:bodyPr>
+          <a:lstStyle/>
+          <a:p>
+            <a:pPr algn="r">
+              <a:defRPr sz="1000" b="0">
+                <a:solidFill>
+                  <a:srgbClr val="8C8C9A"/>
+                </a:solidFill>
+                <a:latin typeface="맑은 고딕"/>
+              </a:defRPr>
+            </a:pPr>
+            <a:r>
+              <a:t>18</a:t>
+            </a:r>
+          </a:p>
+        </p:txBody>
+      </p:sp>
+    </p:spTree>
+  </p:cSld>
+  <p:clrMapOvr>
+    <a:masterClrMapping/>
+  </p:clrMapOvr>
+</p:sld>
+</file>
+
+<file path=ppt/slides/slide19.xml><?xml version="1.0" encoding="utf-8"?>
+<p:sld xmlns:a="http://schemas.openxmlformats.org/drawingml/2006/main" xmlns:p="http://schemas.openxmlformats.org/presentationml/2006/main" xmlns:r="http://schemas.openxmlformats.org/officeDocument/2006/relationships">
+  <p:cSld>
+    <p:bg>
+      <p:bgPr>
+        <a:solidFill>
+          <a:srgbClr val="FFFFFF"/>
+        </a:solidFill>
+        <a:effectLst/>
+      </p:bgPr>
+    </p:bg>
+    <p:spTree>
+      <p:nvGrpSpPr>
+        <p:cNvPr id="1" name=""/>
+        <p:cNvGrpSpPr/>
+        <p:nvPr/>
+      </p:nvGrpSpPr>
+      <p:grpSpPr/>
+      <p:sp>
+        <p:nvSpPr>
+          <p:cNvPr id="2" name="Rectangle 1"/>
+          <p:cNvSpPr/>
+          <p:nvPr/>
+        </p:nvSpPr>
+        <p:spPr>
+          <a:xfrm>
+            <a:off x="0" y="0"/>
+            <a:ext cx="109728" cy="6858000"/>
+          </a:xfrm>
+          <a:prstGeom prst="rect">
+            <a:avLst/>
+          </a:prstGeom>
+          <a:solidFill>
+            <a:srgbClr val="E08A00"/>
+          </a:solidFill>
+          <a:ln>
+            <a:noFill/>
+          </a:ln>
+          <a:effectLst/>
+        </p:spPr>
+        <p:style>
+          <a:lnRef idx="1">
+            <a:schemeClr val="accent1"/>
+          </a:lnRef>
+          <a:fillRef idx="3">
+            <a:schemeClr val="accent1"/>
+          </a:fillRef>
+          <a:effectRef idx="2">
+            <a:schemeClr val="accent1"/>
+          </a:effectRef>
+          <a:fontRef idx="minor">
+            <a:schemeClr val="lt1"/>
+          </a:fontRef>
+        </p:style>
+        <p:txBody>
+          <a:bodyPr rtlCol="0" anchor="ctr"/>
+          <a:lstStyle/>
+          <a:p>
+            <a:pPr algn="ctr"/>
+          </a:p>
+        </p:txBody>
+      </p:sp>
+      <p:sp>
+        <p:nvSpPr>
+          <p:cNvPr id="3" name="Oval 2"/>
+          <p:cNvSpPr/>
+          <p:nvPr/>
+        </p:nvSpPr>
+        <p:spPr>
+          <a:xfrm>
+            <a:off x="1371600" y="2011680"/>
+            <a:ext cx="1097280" cy="1097280"/>
+          </a:xfrm>
+          <a:prstGeom prst="ellipse">
+            <a:avLst/>
+          </a:prstGeom>
+          <a:solidFill>
+            <a:srgbClr val="E08A00"/>
+          </a:solidFill>
+          <a:ln>
+            <a:noFill/>
+          </a:ln>
+          <a:effectLst/>
+        </p:spPr>
+        <p:style>
+          <a:lnRef idx="1">
+            <a:schemeClr val="accent1"/>
+          </a:lnRef>
+          <a:fillRef idx="3">
+            <a:schemeClr val="accent1"/>
+          </a:fillRef>
+          <a:effectRef idx="2">
+            <a:schemeClr val="accent1"/>
+          </a:effectRef>
+          <a:fontRef idx="minor">
+            <a:schemeClr val="lt1"/>
+          </a:fontRef>
+        </p:style>
+        <p:txBody>
+          <a:bodyPr rtlCol="0" anchor="ctr"/>
+          <a:lstStyle/>
+          <a:p>
+            <a:pPr algn="ctr">
+              <a:spcBef>
+                <a:spcPts val="1200"/>
+              </a:spcBef>
+              <a:defRPr sz="3600" b="1">
+                <a:solidFill>
+                  <a:srgbClr val="FFFFFF"/>
+                </a:solidFill>
+                <a:latin typeface="맑은 고딕"/>
+              </a:defRPr>
+            </a:pPr>
+            <a:r>
+              <a:t>4</a:t>
+            </a:r>
+          </a:p>
+        </p:txBody>
+      </p:sp>
+      <p:sp>
+        <p:nvSpPr>
+          <p:cNvPr id="4" name="TextBox 3"/>
+          <p:cNvSpPr txBox="1"/>
+          <p:nvPr/>
+        </p:nvSpPr>
+        <p:spPr>
+          <a:xfrm>
+            <a:off x="2926080" y="1828800"/>
+            <a:ext cx="8229600" cy="914400"/>
+          </a:xfrm>
+          <a:prstGeom prst="rect">
+            <a:avLst/>
+          </a:prstGeom>
+          <a:noFill/>
+        </p:spPr>
+        <p:txBody>
+          <a:bodyPr wrap="square">
+            <a:spAutoFit/>
+          </a:bodyPr>
+          <a:lstStyle/>
+          <a:p>
+            <a:pPr algn="l">
+              <a:defRPr sz="4000" b="1">
+                <a:solidFill>
+                  <a:srgbClr val="1F1F1F"/>
+                </a:solidFill>
+                <a:latin typeface="맑은 고딕"/>
+              </a:defRPr>
+            </a:pPr>
+            <a:r>
+              <a:t>업무 자동화·생산성 향상</a:t>
+            </a:r>
+          </a:p>
+        </p:txBody>
+      </p:sp>
+      <p:sp>
+        <p:nvSpPr>
+          <p:cNvPr id="5" name="TextBox 4"/>
+          <p:cNvSpPr txBox="1"/>
+          <p:nvPr/>
+        </p:nvSpPr>
+        <p:spPr>
+          <a:xfrm>
+            <a:off x="2926080" y="2926080"/>
+            <a:ext cx="8229600" cy="548640"/>
+          </a:xfrm>
+          <a:prstGeom prst="rect">
+            <a:avLst/>
+          </a:prstGeom>
+          <a:noFill/>
+        </p:spPr>
+        <p:txBody>
+          <a:bodyPr wrap="square">
+            <a:spAutoFit/>
+          </a:bodyPr>
+          <a:lstStyle/>
+          <a:p>
+            <a:pPr algn="l">
+              <a:defRPr sz="1800" b="0">
+                <a:solidFill>
+                  <a:srgbClr val="5A5A6E"/>
+                </a:solidFill>
+                <a:latin typeface="맑은 고딕"/>
+              </a:defRPr>
+            </a:pPr>
+            <a:r>
+              <a:t>사람이 하던 일 → 시스템이 하는 일</a:t>
+            </a:r>
+          </a:p>
+        </p:txBody>
+      </p:sp>
+      <p:sp>
+        <p:nvSpPr>
+          <p:cNvPr id="6" name="Rectangle 5"/>
+          <p:cNvSpPr/>
+          <p:nvPr/>
+        </p:nvSpPr>
+        <p:spPr>
+          <a:xfrm>
+            <a:off x="2926080" y="3657600"/>
+            <a:ext cx="3657600" cy="36576"/>
+          </a:xfrm>
+          <a:prstGeom prst="rect">
+            <a:avLst/>
+          </a:prstGeom>
+          <a:solidFill>
+            <a:srgbClr val="E08A00"/>
+          </a:solidFill>
+          <a:ln>
+            <a:noFill/>
+          </a:ln>
+          <a:effectLst/>
+        </p:spPr>
+        <p:style>
+          <a:lnRef idx="1">
+            <a:schemeClr val="accent1"/>
+          </a:lnRef>
+          <a:fillRef idx="3">
+            <a:schemeClr val="accent1"/>
+          </a:fillRef>
+          <a:effectRef idx="2">
+            <a:schemeClr val="accent1"/>
+          </a:effectRef>
+          <a:fontRef idx="minor">
+            <a:schemeClr val="lt1"/>
+          </a:fontRef>
+        </p:style>
+        <p:txBody>
+          <a:bodyPr rtlCol="0" anchor="ctr"/>
+          <a:lstStyle/>
+          <a:p>
+            <a:pPr algn="ctr"/>
+          </a:p>
+        </p:txBody>
+      </p:sp>
+      <p:sp>
+        <p:nvSpPr>
+          <p:cNvPr id="7" name="Rectangle 6"/>
+          <p:cNvSpPr/>
+          <p:nvPr/>
+        </p:nvSpPr>
+        <p:spPr>
+          <a:xfrm>
+            <a:off x="0" y="6748272"/>
+            <a:ext cx="12191695" cy="54864"/>
+          </a:xfrm>
+          <a:prstGeom prst="rect">
+            <a:avLst/>
+          </a:prstGeom>
+          <a:solidFill>
+            <a:srgbClr val="E08A00"/>
+          </a:solidFill>
+          <a:ln>
+            <a:noFill/>
+          </a:ln>
+          <a:effectLst/>
+        </p:spPr>
+        <p:style>
+          <a:lnRef idx="1">
+            <a:schemeClr val="accent1"/>
+          </a:lnRef>
+          <a:fillRef idx="3">
+            <a:schemeClr val="accent1"/>
+          </a:fillRef>
+          <a:effectRef idx="2">
+            <a:schemeClr val="accent1"/>
+          </a:effectRef>
+          <a:fontRef idx="minor">
+            <a:schemeClr val="lt1"/>
+          </a:fontRef>
+        </p:style>
+        <p:txBody>
+          <a:bodyPr rtlCol="0" anchor="ctr"/>
+          <a:lstStyle/>
+          <a:p>
+            <a:pPr algn="ctr"/>
+          </a:p>
+        </p:txBody>
+      </p:sp>
+    </p:spTree>
+  </p:cSld>
+  <p:clrMapOvr>
+    <a:masterClrMapping/>
+  </p:clrMapOvr>
+</p:sld>
+</file>
+
+<file path=ppt/slides/slide2.xml><?xml version="1.0" encoding="utf-8"?>
+<p:sld xmlns:a="http://schemas.openxmlformats.org/drawingml/2006/main" xmlns:p="http://schemas.openxmlformats.org/presentationml/2006/main" xmlns:r="http://schemas.openxmlformats.org/officeDocument/2006/relationships">
+  <p:cSld>
+    <p:bg>
+      <p:bgPr>
+        <a:solidFill>
+          <a:srgbClr val="FFFFFF"/>
+        </a:solidFill>
+        <a:effectLst/>
+      </p:bgPr>
+    </p:bg>
+    <p:spTree>
+      <p:nvGrpSpPr>
+        <p:cNvPr id="1" name=""/>
+        <p:cNvGrpSpPr/>
+        <p:nvPr/>
+      </p:nvGrpSpPr>
+      <p:grpSpPr/>
+      <p:sp>
+        <p:nvSpPr>
+          <p:cNvPr id="2" name="Rectangle 1"/>
+          <p:cNvSpPr/>
+          <p:nvPr/>
+        </p:nvSpPr>
+        <p:spPr>
+          <a:xfrm>
+            <a:off x="0" y="0"/>
+            <a:ext cx="12191695" cy="45720"/>
+          </a:xfrm>
+          <a:prstGeom prst="rect">
+            <a:avLst/>
+          </a:prstGeom>
+          <a:solidFill>
+            <a:srgbClr val="0070C0"/>
+          </a:solidFill>
+          <a:ln>
+            <a:noFill/>
+          </a:ln>
+          <a:effectLst/>
+        </p:spPr>
+        <p:style>
+          <a:lnRef idx="1">
+            <a:schemeClr val="accent1"/>
+          </a:lnRef>
+          <a:fillRef idx="3">
+            <a:schemeClr val="accent1"/>
+          </a:fillRef>
+          <a:effectRef idx="2">
+            <a:schemeClr val="accent1"/>
+          </a:effectRef>
+          <a:fontRef idx="minor">
+            <a:schemeClr val="lt1"/>
+          </a:fontRef>
+        </p:style>
+        <p:txBody>
+          <a:bodyPr rtlCol="0" anchor="ctr"/>
+          <a:lstStyle/>
+          <a:p>
+            <a:pPr algn="ctr"/>
+          </a:p>
+        </p:txBody>
+      </p:sp>
+      <p:sp>
+        <p:nvSpPr>
+          <p:cNvPr id="3" name="TextBox 2"/>
+          <p:cNvSpPr txBox="1"/>
+          <p:nvPr/>
+        </p:nvSpPr>
+        <p:spPr>
+          <a:xfrm>
+            <a:off x="548640" y="274320"/>
+            <a:ext cx="10972800" cy="640080"/>
+          </a:xfrm>
+          <a:prstGeom prst="rect">
+            <a:avLst/>
+          </a:prstGeom>
+          <a:noFill/>
+        </p:spPr>
+        <p:txBody>
+          <a:bodyPr wrap="square">
+            <a:spAutoFit/>
+          </a:bodyPr>
+          <a:lstStyle/>
+          <a:p>
+            <a:pPr algn="l">
+              <a:defRPr sz="2600" b="1">
+                <a:solidFill>
+                  <a:srgbClr val="1F1F1F"/>
+                </a:solidFill>
+                <a:latin typeface="맑은 고딕"/>
+              </a:defRPr>
+            </a:pPr>
+            <a:r>
+              <a:t>한 장 요약 (Executive Summary)</a:t>
+            </a:r>
+          </a:p>
+        </p:txBody>
+      </p:sp>
+      <p:sp>
+        <p:nvSpPr>
+          <p:cNvPr id="4" name="Rectangle 3"/>
+          <p:cNvSpPr/>
+          <p:nvPr/>
+        </p:nvSpPr>
+        <p:spPr>
+          <a:xfrm>
+            <a:off x="548640" y="914400"/>
+            <a:ext cx="1828800" cy="32004"/>
+          </a:xfrm>
+          <a:prstGeom prst="rect">
+            <a:avLst/>
+          </a:prstGeom>
+          <a:solidFill>
+            <a:srgbClr val="0070C0"/>
+          </a:solidFill>
+          <a:ln>
+            <a:noFill/>
+          </a:ln>
+          <a:effectLst/>
+        </p:spPr>
+        <p:style>
+          <a:lnRef idx="1">
+            <a:schemeClr val="accent1"/>
+          </a:lnRef>
+          <a:fillRef idx="3">
+            <a:schemeClr val="accent1"/>
+          </a:fillRef>
+          <a:effectRef idx="2">
+            <a:schemeClr val="accent1"/>
+          </a:effectRef>
+          <a:fontRef idx="minor">
+            <a:schemeClr val="lt1"/>
+          </a:fontRef>
+        </p:style>
+        <p:txBody>
+          <a:bodyPr rtlCol="0" anchor="ctr"/>
+          <a:lstStyle/>
+          <a:p>
+            <a:pPr algn="ctr"/>
+          </a:p>
+        </p:txBody>
+      </p:sp>
+      <p:sp>
+        <p:nvSpPr>
+          <p:cNvPr id="5" name="Rounded Rectangle 4"/>
+          <p:cNvSpPr/>
+          <p:nvPr/>
+        </p:nvSpPr>
+        <p:spPr>
+          <a:xfrm>
+            <a:off x="457200" y="1188720"/>
+            <a:ext cx="11247120" cy="5212080"/>
+          </a:xfrm>
+          <a:prstGeom prst="roundRect">
+            <a:avLst/>
+          </a:prstGeom>
+          <a:solidFill>
+            <a:srgbClr val="F8F9FB"/>
+          </a:solidFill>
+          <a:ln w="12700">
+            <a:solidFill>
+              <a:srgbClr val="E0E0E8"/>
+            </a:solidFill>
+          </a:ln>
+          <a:effectLst/>
+        </p:spPr>
+        <p:style>
+          <a:lnRef idx="1">
+            <a:schemeClr val="accent1"/>
+          </a:lnRef>
+          <a:fillRef idx="3">
+            <a:schemeClr val="accent1"/>
+          </a:fillRef>
+          <a:effectRef idx="2">
+            <a:schemeClr val="accent1"/>
+          </a:effectRef>
+          <a:fontRef idx="minor">
+            <a:schemeClr val="lt1"/>
+          </a:fontRef>
+        </p:style>
+        <p:txBody>
+          <a:bodyPr rtlCol="0" anchor="ctr"/>
+          <a:lstStyle/>
+          <a:p>
+            <a:pPr algn="ctr"/>
+          </a:p>
+        </p:txBody>
+      </p:sp>
+      <p:sp>
+        <p:nvSpPr>
+          <p:cNvPr id="6" name="TextBox 5"/>
+          <p:cNvSpPr txBox="1"/>
+          <p:nvPr/>
+        </p:nvSpPr>
+        <p:spPr>
+          <a:xfrm>
+            <a:off x="822960" y="1371600"/>
+            <a:ext cx="10515600" cy="4846320"/>
+          </a:xfrm>
+          <a:prstGeom prst="rect">
+            <a:avLst/>
+          </a:prstGeom>
+          <a:noFill/>
+        </p:spPr>
+        <p:txBody>
+          <a:bodyPr wrap="square">
+            <a:spAutoFit/>
+          </a:bodyPr>
+          <a:lstStyle/>
+          <a:p>
+            <a:pPr>
+              <a:lnSpc>
+                <a:spcPct val="140000"/>
+              </a:lnSpc>
+              <a:spcBef>
+                <a:spcPts val="600"/>
+              </a:spcBef>
+              <a:spcAft>
+                <a:spcPts val="200"/>
+              </a:spcAft>
+              <a:defRPr sz="1600">
+                <a:solidFill>
+                  <a:srgbClr val="1F1F1F"/>
+                </a:solidFill>
+                <a:latin typeface="맑은 고딕"/>
+              </a:defRPr>
+            </a:pPr>
+            <a:r>
+              <a:t>무엇을: Grafana 10개+ 대시보드·엑셀·수기 배치도로 흩어진 데이터센터 운영을 통합 DCIM 웹 시스템으로 구축</a:t>
+            </a:r>
+          </a:p>
+          <a:p>
+            <a:pPr lvl="1">
+              <a:lnSpc>
+                <a:spcPct val="140000"/>
+              </a:lnSpc>
+              <a:spcBef>
+                <a:spcPts val="200"/>
+              </a:spcBef>
+              <a:spcAft>
+                <a:spcPts val="200"/>
+              </a:spcAft>
+              <a:defRPr sz="1500">
+                <a:solidFill>
+                  <a:srgbClr val="8C8C9A"/>
+                </a:solidFill>
+                <a:latin typeface="맑은 고딕"/>
+              </a:defRPr>
+            </a:pPr>
+            <a:r>
+              <a:t>39개 화면 · 74개 API · 135개 기능 · 44,211줄 — 인프라 엔지니어 1명 + AI, 4.5개월 (커밋의 99%+를 AI가 작성)</a:t>
+            </a:r>
+          </a:p>
+          <a:p>
+            <a:pPr>
+              <a:lnSpc>
+                <a:spcPct val="140000"/>
+              </a:lnSpc>
+              <a:spcBef>
+                <a:spcPts val="600"/>
+              </a:spcBef>
+              <a:spcAft>
+                <a:spcPts val="200"/>
+              </a:spcAft>
+              <a:defRPr sz="1600">
+                <a:solidFill>
+                  <a:srgbClr val="1F1F1F"/>
+                </a:solidFill>
+                <a:latin typeface="맑은 고딕"/>
+              </a:defRPr>
+            </a:pPr>
+            <a:r>
+              <a:t>어떻게: AI를 '코드 생성기'가 아니라 구현·감사·문서화·운영을 함께 하는 협업 체계로 운용</a:t>
+            </a:r>
+          </a:p>
+          <a:p>
+            <a:pPr lvl="1">
+              <a:lnSpc>
+                <a:spcPct val="140000"/>
+              </a:lnSpc>
+              <a:spcBef>
+                <a:spcPts val="200"/>
+              </a:spcBef>
+              <a:spcAft>
+                <a:spcPts val="200"/>
+              </a:spcAft>
+              <a:defRPr sz="1500">
+                <a:solidFill>
+                  <a:srgbClr val="8C8C9A"/>
+                </a:solidFill>
+                <a:latin typeface="맑은 고딕"/>
+              </a:defRPr>
+            </a:pPr>
+            <a:r>
+              <a:t>프롬프트 → 규칙(CLAUDE.md) → 도구(에이전트·스킬·훅) 3단계 진화</a:t>
+            </a:r>
+          </a:p>
+          <a:p>
+            <a:pPr>
+              <a:lnSpc>
+                <a:spcPct val="140000"/>
+              </a:lnSpc>
+              <a:spcBef>
+                <a:spcPts val="600"/>
+              </a:spcBef>
+              <a:spcAft>
+                <a:spcPts val="200"/>
+              </a:spcAft>
+              <a:defRPr sz="1600">
+                <a:solidFill>
+                  <a:srgbClr val="1F1F1F"/>
+                </a:solidFill>
+                <a:latin typeface="맑은 고딕"/>
+              </a:defRPr>
+            </a:pPr>
+            <a:r>
+              <a:t>효과 ①비용: 외주 환산 3.5~5.5억 원 → 약 4,500만 원 (~8~11배 절감, 추정)</a:t>
+            </a:r>
+          </a:p>
+          <a:p>
+            <a:pPr>
+              <a:lnSpc>
+                <a:spcPct val="140000"/>
+              </a:lnSpc>
+              <a:spcBef>
+                <a:spcPts val="600"/>
+              </a:spcBef>
+              <a:spcAft>
+                <a:spcPts val="200"/>
+              </a:spcAft>
+              <a:defRPr sz="1600">
+                <a:solidFill>
+                  <a:srgbClr val="1F1F1F"/>
+                </a:solidFill>
+                <a:latin typeface="맑은 고딕"/>
+              </a:defRPr>
+            </a:pPr>
+            <a:r>
+              <a:t>효과 ②자동화: 반복 운영업무 주 8~10시간 절감 추정 (연 400시간+) + 24×7 무인 감시</a:t>
+            </a:r>
+          </a:p>
+          <a:p>
+            <a:pPr>
+              <a:lnSpc>
+                <a:spcPct val="140000"/>
+              </a:lnSpc>
+              <a:spcBef>
+                <a:spcPts val="600"/>
+              </a:spcBef>
+              <a:spcAft>
+                <a:spcPts val="200"/>
+              </a:spcAft>
+              <a:defRPr sz="1600">
+                <a:solidFill>
+                  <a:srgbClr val="1F1F1F"/>
+                </a:solidFill>
+                <a:latin typeface="맑은 고딕"/>
+              </a:defRPr>
+            </a:pPr>
+            <a:r>
+              <a:t>효과 ③품질: 릴리즈 전 AI 다중 감사로 이슈 65건+ 선제 발견 (보안·권한 우회 7건 수정)</a:t>
+            </a:r>
+          </a:p>
+          <a:p>
+            <a:pPr>
+              <a:lnSpc>
+                <a:spcPct val="140000"/>
+              </a:lnSpc>
+              <a:spcBef>
+                <a:spcPts val="600"/>
+              </a:spcBef>
+              <a:spcAft>
+                <a:spcPts val="200"/>
+              </a:spcAft>
+              <a:defRPr sz="1600">
+                <a:solidFill>
+                  <a:srgbClr val="1F1F1F"/>
+                </a:solidFill>
+                <a:latin typeface="맑은 고딕"/>
+              </a:defRPr>
+            </a:pPr>
+            <a:r>
+              <a:t>방향성: 이 사례의 규칙·도구를 템플릿화하여 타 업무로 확산 — '프롬프트 엔지니어링'에서 '워크플로 엔지니어링'으로</a:t>
+            </a:r>
+          </a:p>
+        </p:txBody>
+      </p:sp>
+      <p:sp>
+        <p:nvSpPr>
+          <p:cNvPr id="7" name="TextBox 6"/>
+          <p:cNvSpPr txBox="1"/>
+          <p:nvPr/>
+        </p:nvSpPr>
+        <p:spPr>
+          <a:xfrm>
+            <a:off x="10972800" y="6492240"/>
+            <a:ext cx="914400" cy="274320"/>
+          </a:xfrm>
+          <a:prstGeom prst="rect">
+            <a:avLst/>
+          </a:prstGeom>
+          <a:noFill/>
+        </p:spPr>
+        <p:txBody>
+          <a:bodyPr wrap="square">
+            <a:spAutoFit/>
+          </a:bodyPr>
+          <a:lstStyle/>
+          <a:p>
+            <a:pPr algn="r">
+              <a:defRPr sz="1000" b="0">
+                <a:solidFill>
+                  <a:srgbClr val="8C8C9A"/>
+                </a:solidFill>
+                <a:latin typeface="맑은 고딕"/>
+              </a:defRPr>
+            </a:pPr>
+            <a:r>
+              <a:t>2</a:t>
+            </a:r>
+          </a:p>
+        </p:txBody>
+      </p:sp>
+    </p:spTree>
+  </p:cSld>
+  <p:clrMapOvr>
+    <a:masterClrMapping/>
+  </p:clrMapOvr>
+</p:sld>
+</file>
+
+<file path=ppt/slides/slide20.xml><?xml version="1.0" encoding="utf-8"?>
 <p:sld xmlns:a="http://schemas.openxmlformats.org/drawingml/2006/main" xmlns:p="http://schemas.openxmlformats.org/presentationml/2006/main" xmlns:r="http://schemas.openxmlformats.org/officeDocument/2006/relationships">
   <p:cSld>
     <p:bg>
@@ -7567,7 +10770,7 @@
               </a:defRPr>
             </a:pPr>
             <a:r>
-              <a:t>16</a:t>
+              <a:t>20</a:t>
             </a:r>
           </a:p>
         </p:txBody>
@@ -7580,7 +10783,7 @@
 </p:sld>
 </file>
 
-<file path=ppt/slides/slide17.xml><?xml version="1.0" encoding="utf-8"?>
+<file path=ppt/slides/slide21.xml><?xml version="1.0" encoding="utf-8"?>
 <p:sld xmlns:a="http://schemas.openxmlformats.org/drawingml/2006/main" xmlns:p="http://schemas.openxmlformats.org/presentationml/2006/main" xmlns:r="http://schemas.openxmlformats.org/officeDocument/2006/relationships">
   <p:cSld>
     <p:bg>
@@ -8014,7 +11217,7 @@
               </a:defRPr>
             </a:pPr>
             <a:r>
-              <a:t>17</a:t>
+              <a:t>21</a:t>
             </a:r>
           </a:p>
         </p:txBody>
@@ -8027,7 +11230,7 @@
 </p:sld>
 </file>
 
-<file path=ppt/slides/slide18.xml><?xml version="1.0" encoding="utf-8"?>
+<file path=ppt/slides/slide22.xml><?xml version="1.0" encoding="utf-8"?>
 <p:sld xmlns:a="http://schemas.openxmlformats.org/drawingml/2006/main" xmlns:p="http://schemas.openxmlformats.org/presentationml/2006/main" xmlns:r="http://schemas.openxmlformats.org/officeDocument/2006/relationships">
   <p:cSld>
     <p:bg>
@@ -8314,7 +11517,7 @@
 </p:sld>
 </file>
 
-<file path=ppt/slides/slide19.xml><?xml version="1.0" encoding="utf-8"?>
+<file path=ppt/slides/slide23.xml><?xml version="1.0" encoding="utf-8"?>
 <p:sld xmlns:a="http://schemas.openxmlformats.org/drawingml/2006/main" xmlns:p="http://schemas.openxmlformats.org/presentationml/2006/main" xmlns:r="http://schemas.openxmlformats.org/officeDocument/2006/relationships">
   <p:cSld>
     <p:bg>
@@ -8729,7 +11932,7 @@
               </a:defRPr>
             </a:pPr>
             <a:r>
-              <a:t>19</a:t>
+              <a:t>23</a:t>
             </a:r>
           </a:p>
         </p:txBody>
@@ -8742,7 +11945,7 @@
 </p:sld>
 </file>
 
-<file path=ppt/slides/slide2.xml><?xml version="1.0" encoding="utf-8"?>
+<file path=ppt/slides/slide24.xml><?xml version="1.0" encoding="utf-8"?>
 <p:sld xmlns:a="http://schemas.openxmlformats.org/drawingml/2006/main" xmlns:p="http://schemas.openxmlformats.org/presentationml/2006/main" xmlns:r="http://schemas.openxmlformats.org/officeDocument/2006/relationships">
   <p:cSld>
     <p:bg>
@@ -8775,7 +11978,7 @@
             <a:avLst/>
           </a:prstGeom>
           <a:solidFill>
-            <a:srgbClr val="0070C0"/>
+            <a:srgbClr val="DC2E2E"/>
           </a:solidFill>
           <a:ln>
             <a:noFill/>
@@ -8835,7 +12038,7 @@
               </a:defRPr>
             </a:pPr>
             <a:r>
-              <a:t>한 장 요약 (Executive Summary)</a:t>
+              <a:t>실증 ① — 릴리즈 전에 잡은 결함 65건+</a:t>
             </a:r>
           </a:p>
         </p:txBody>
@@ -8855,7 +12058,7 @@
             <a:avLst/>
           </a:prstGeom>
           <a:solidFill>
-            <a:srgbClr val="0070C0"/>
+            <a:srgbClr val="DC2E2E"/>
           </a:solidFill>
           <a:ln>
             <a:noFill/>
@@ -8970,7 +12173,51 @@
               </a:defRPr>
             </a:pPr>
             <a:r>
-              <a:t>무엇을: Grafana 10개+ 대시보드·엑셀·수기 배치도로 흩어진 데이터센터 운영을 통합 DCIM 웹 시스템으로 구축</a:t>
+              <a:t>8-에이전트 사전 코드리뷰: 서버 실행 전 버그 6건 일괄 발견 — 단독 리뷰였으면 1~2건 수준</a:t>
+            </a:r>
+          </a:p>
+          <a:p>
+            <a:pPr>
+              <a:lnSpc>
+                <a:spcPct val="140000"/>
+              </a:lnSpc>
+              <a:spcBef>
+                <a:spcPts val="600"/>
+              </a:spcBef>
+              <a:spcAft>
+                <a:spcPts val="200"/>
+              </a:spcAft>
+              <a:defRPr sz="1600">
+                <a:solidFill>
+                  <a:srgbClr val="1F1F1F"/>
+                </a:solidFill>
+                <a:latin typeface="맑은 고딕"/>
+              </a:defRPr>
+            </a:pPr>
+            <a:r>
+              <a:t>8-에이전트 종합 감사: 40여 이슈 — 최고 심각도는 권한 우회(비소속 운영자가 서버 전원 리셋·메모리 정보 변조 가능) → 전 라우트 정책 통일</a:t>
+            </a:r>
+          </a:p>
+          <a:p>
+            <a:pPr>
+              <a:lnSpc>
+                <a:spcPct val="140000"/>
+              </a:lnSpc>
+              <a:spcBef>
+                <a:spcPts val="600"/>
+              </a:spcBef>
+              <a:spcAft>
+                <a:spcPts val="200"/>
+              </a:spcAft>
+              <a:defRPr sz="1600">
+                <a:solidFill>
+                  <a:srgbClr val="1F1F1F"/>
+                </a:solidFill>
+                <a:latin typeface="맑은 고딕"/>
+              </a:defRPr>
+            </a:pPr>
+            <a:r>
+              <a:t>UML 설계 추적 감사: 다이어그램을 그리려 코드를 역추적하는 과정 자체가 설계 허점 19건을 드러냄 → 보안 5건 당일 수정</a:t>
             </a:r>
           </a:p>
           <a:p>
@@ -8992,7 +12239,7 @@
               </a:defRPr>
             </a:pPr>
             <a:r>
-              <a:t>39개 화면 · 74개 API · 135개 기능 · 44,211줄 — 인프라 엔지니어 1명 + AI, 4.5개월 (커밋의 99%+를 AI가 작성)</a:t>
+              <a:t>“UML은 그림이 아니라 감사 도구였다”</a:t>
             </a:r>
           </a:p>
           <a:p>
@@ -9014,29 +12261,7 @@
               </a:defRPr>
             </a:pPr>
             <a:r>
-              <a:t>어떻게: AI를 '코드 생성기'가 아니라 구현·감사·문서화·운영을 함께 하는 협업 체계로 운용</a:t>
-            </a:r>
-          </a:p>
-          <a:p>
-            <a:pPr lvl="1">
-              <a:lnSpc>
-                <a:spcPct val="140000"/>
-              </a:lnSpc>
-              <a:spcBef>
-                <a:spcPts val="200"/>
-              </a:spcBef>
-              <a:spcAft>
-                <a:spcPts val="200"/>
-              </a:spcAft>
-              <a:defRPr sz="1500">
-                <a:solidFill>
-                  <a:srgbClr val="8C8C9A"/>
-                </a:solidFill>
-                <a:latin typeface="맑은 고딕"/>
-              </a:defRPr>
-            </a:pPr>
-            <a:r>
-              <a:t>프롬프트 → 규칙(CLAUDE.md) → 도구(에이전트·스킬·훅) 3단계 진화</a:t>
+              <a:t>합계: 이슈 65건+ 선제 발견, 그중 보안·권한 우회 7건 수정 — 전부 파일:라인 근거와 함께 문서화 (검증 가능한 기록)</a:t>
             </a:r>
           </a:p>
           <a:p>
@@ -9057,9 +12282,6 @@
                 <a:latin typeface="맑은 고딕"/>
               </a:defRPr>
             </a:pPr>
-            <a:r>
-              <a:t>효과 ①비용: 외주 환산 3.5~5.5억 원 → 약 4,500만 원 (~8~11배 절감, 추정)</a:t>
-            </a:r>
           </a:p>
           <a:p>
             <a:pPr>
@@ -9080,51 +12302,7 @@
               </a:defRPr>
             </a:pPr>
             <a:r>
-              <a:t>효과 ②자동화: 반복 운영업무 주 8~10시간 절감 추정 (연 400시간+) + 24×7 무인 감시</a:t>
-            </a:r>
-          </a:p>
-          <a:p>
-            <a:pPr>
-              <a:lnSpc>
-                <a:spcPct val="140000"/>
-              </a:lnSpc>
-              <a:spcBef>
-                <a:spcPts val="600"/>
-              </a:spcBef>
-              <a:spcAft>
-                <a:spcPts val="200"/>
-              </a:spcAft>
-              <a:defRPr sz="1600">
-                <a:solidFill>
-                  <a:srgbClr val="1F1F1F"/>
-                </a:solidFill>
-                <a:latin typeface="맑은 고딕"/>
-              </a:defRPr>
-            </a:pPr>
-            <a:r>
-              <a:t>효과 ③품질: 릴리즈 전 AI 다중 감사로 이슈 65건+ 선제 발견 (보안·권한 우회 7건 수정)</a:t>
-            </a:r>
-          </a:p>
-          <a:p>
-            <a:pPr>
-              <a:lnSpc>
-                <a:spcPct val="140000"/>
-              </a:lnSpc>
-              <a:spcBef>
-                <a:spcPts val="600"/>
-              </a:spcBef>
-              <a:spcAft>
-                <a:spcPts val="200"/>
-              </a:spcAft>
-              <a:defRPr sz="1600">
-                <a:solidFill>
-                  <a:srgbClr val="1F1F1F"/>
-                </a:solidFill>
-                <a:latin typeface="맑은 고딕"/>
-              </a:defRPr>
-            </a:pPr>
-            <a:r>
-              <a:t>방향성: 이 사례의 규칙·도구를 템플릿화하여 타 업무로 확산 — '프롬프트 엔지니어링'에서 '워크플로 엔지니어링'으로</a:t>
+              <a:t>운영 장애 대응: 운영 DB 중단 사고 → 8-에이전트 진단으로 데이터 손실 0 복구 + 재발 방지 명문화</a:t>
             </a:r>
           </a:p>
         </p:txBody>
@@ -9160,7 +12338,7 @@
               </a:defRPr>
             </a:pPr>
             <a:r>
-              <a:t>2</a:t>
+              <a:t>24</a:t>
             </a:r>
           </a:p>
         </p:txBody>
@@ -9173,413 +12351,7 @@
 </p:sld>
 </file>
 
-<file path=ppt/slides/slide20.xml><?xml version="1.0" encoding="utf-8"?>
-<p:sld xmlns:a="http://schemas.openxmlformats.org/drawingml/2006/main" xmlns:p="http://schemas.openxmlformats.org/presentationml/2006/main" xmlns:r="http://schemas.openxmlformats.org/officeDocument/2006/relationships">
-  <p:cSld>
-    <p:bg>
-      <p:bgPr>
-        <a:solidFill>
-          <a:srgbClr val="FFFFFF"/>
-        </a:solidFill>
-        <a:effectLst/>
-      </p:bgPr>
-    </p:bg>
-    <p:spTree>
-      <p:nvGrpSpPr>
-        <p:cNvPr id="1" name=""/>
-        <p:cNvGrpSpPr/>
-        <p:nvPr/>
-      </p:nvGrpSpPr>
-      <p:grpSpPr/>
-      <p:sp>
-        <p:nvSpPr>
-          <p:cNvPr id="2" name="Rectangle 1"/>
-          <p:cNvSpPr/>
-          <p:nvPr/>
-        </p:nvSpPr>
-        <p:spPr>
-          <a:xfrm>
-            <a:off x="0" y="0"/>
-            <a:ext cx="12191695" cy="45720"/>
-          </a:xfrm>
-          <a:prstGeom prst="rect">
-            <a:avLst/>
-          </a:prstGeom>
-          <a:solidFill>
-            <a:srgbClr val="DC2E2E"/>
-          </a:solidFill>
-          <a:ln>
-            <a:noFill/>
-          </a:ln>
-          <a:effectLst/>
-        </p:spPr>
-        <p:style>
-          <a:lnRef idx="1">
-            <a:schemeClr val="accent1"/>
-          </a:lnRef>
-          <a:fillRef idx="3">
-            <a:schemeClr val="accent1"/>
-          </a:fillRef>
-          <a:effectRef idx="2">
-            <a:schemeClr val="accent1"/>
-          </a:effectRef>
-          <a:fontRef idx="minor">
-            <a:schemeClr val="lt1"/>
-          </a:fontRef>
-        </p:style>
-        <p:txBody>
-          <a:bodyPr rtlCol="0" anchor="ctr"/>
-          <a:lstStyle/>
-          <a:p>
-            <a:pPr algn="ctr"/>
-          </a:p>
-        </p:txBody>
-      </p:sp>
-      <p:sp>
-        <p:nvSpPr>
-          <p:cNvPr id="3" name="TextBox 2"/>
-          <p:cNvSpPr txBox="1"/>
-          <p:nvPr/>
-        </p:nvSpPr>
-        <p:spPr>
-          <a:xfrm>
-            <a:off x="548640" y="274320"/>
-            <a:ext cx="10972800" cy="640080"/>
-          </a:xfrm>
-          <a:prstGeom prst="rect">
-            <a:avLst/>
-          </a:prstGeom>
-          <a:noFill/>
-        </p:spPr>
-        <p:txBody>
-          <a:bodyPr wrap="square">
-            <a:spAutoFit/>
-          </a:bodyPr>
-          <a:lstStyle/>
-          <a:p>
-            <a:pPr algn="l">
-              <a:defRPr sz="2600" b="1">
-                <a:solidFill>
-                  <a:srgbClr val="1F1F1F"/>
-                </a:solidFill>
-                <a:latin typeface="맑은 고딕"/>
-              </a:defRPr>
-            </a:pPr>
-            <a:r>
-              <a:t>실증 ① — 릴리즈 전에 잡은 결함 65건+</a:t>
-            </a:r>
-          </a:p>
-        </p:txBody>
-      </p:sp>
-      <p:sp>
-        <p:nvSpPr>
-          <p:cNvPr id="4" name="Rectangle 3"/>
-          <p:cNvSpPr/>
-          <p:nvPr/>
-        </p:nvSpPr>
-        <p:spPr>
-          <a:xfrm>
-            <a:off x="548640" y="914400"/>
-            <a:ext cx="1828800" cy="32004"/>
-          </a:xfrm>
-          <a:prstGeom prst="rect">
-            <a:avLst/>
-          </a:prstGeom>
-          <a:solidFill>
-            <a:srgbClr val="DC2E2E"/>
-          </a:solidFill>
-          <a:ln>
-            <a:noFill/>
-          </a:ln>
-          <a:effectLst/>
-        </p:spPr>
-        <p:style>
-          <a:lnRef idx="1">
-            <a:schemeClr val="accent1"/>
-          </a:lnRef>
-          <a:fillRef idx="3">
-            <a:schemeClr val="accent1"/>
-          </a:fillRef>
-          <a:effectRef idx="2">
-            <a:schemeClr val="accent1"/>
-          </a:effectRef>
-          <a:fontRef idx="minor">
-            <a:schemeClr val="lt1"/>
-          </a:fontRef>
-        </p:style>
-        <p:txBody>
-          <a:bodyPr rtlCol="0" anchor="ctr"/>
-          <a:lstStyle/>
-          <a:p>
-            <a:pPr algn="ctr"/>
-          </a:p>
-        </p:txBody>
-      </p:sp>
-      <p:sp>
-        <p:nvSpPr>
-          <p:cNvPr id="5" name="Rounded Rectangle 4"/>
-          <p:cNvSpPr/>
-          <p:nvPr/>
-        </p:nvSpPr>
-        <p:spPr>
-          <a:xfrm>
-            <a:off x="457200" y="1188720"/>
-            <a:ext cx="11247120" cy="5212080"/>
-          </a:xfrm>
-          <a:prstGeom prst="roundRect">
-            <a:avLst/>
-          </a:prstGeom>
-          <a:solidFill>
-            <a:srgbClr val="F8F9FB"/>
-          </a:solidFill>
-          <a:ln w="12700">
-            <a:solidFill>
-              <a:srgbClr val="E0E0E8"/>
-            </a:solidFill>
-          </a:ln>
-          <a:effectLst/>
-        </p:spPr>
-        <p:style>
-          <a:lnRef idx="1">
-            <a:schemeClr val="accent1"/>
-          </a:lnRef>
-          <a:fillRef idx="3">
-            <a:schemeClr val="accent1"/>
-          </a:fillRef>
-          <a:effectRef idx="2">
-            <a:schemeClr val="accent1"/>
-          </a:effectRef>
-          <a:fontRef idx="minor">
-            <a:schemeClr val="lt1"/>
-          </a:fontRef>
-        </p:style>
-        <p:txBody>
-          <a:bodyPr rtlCol="0" anchor="ctr"/>
-          <a:lstStyle/>
-          <a:p>
-            <a:pPr algn="ctr"/>
-          </a:p>
-        </p:txBody>
-      </p:sp>
-      <p:sp>
-        <p:nvSpPr>
-          <p:cNvPr id="6" name="TextBox 5"/>
-          <p:cNvSpPr txBox="1"/>
-          <p:nvPr/>
-        </p:nvSpPr>
-        <p:spPr>
-          <a:xfrm>
-            <a:off x="822960" y="1371600"/>
-            <a:ext cx="10515600" cy="4846320"/>
-          </a:xfrm>
-          <a:prstGeom prst="rect">
-            <a:avLst/>
-          </a:prstGeom>
-          <a:noFill/>
-        </p:spPr>
-        <p:txBody>
-          <a:bodyPr wrap="square">
-            <a:spAutoFit/>
-          </a:bodyPr>
-          <a:lstStyle/>
-          <a:p>
-            <a:pPr>
-              <a:lnSpc>
-                <a:spcPct val="140000"/>
-              </a:lnSpc>
-              <a:spcBef>
-                <a:spcPts val="600"/>
-              </a:spcBef>
-              <a:spcAft>
-                <a:spcPts val="200"/>
-              </a:spcAft>
-              <a:defRPr sz="1600">
-                <a:solidFill>
-                  <a:srgbClr val="1F1F1F"/>
-                </a:solidFill>
-                <a:latin typeface="맑은 고딕"/>
-              </a:defRPr>
-            </a:pPr>
-            <a:r>
-              <a:t>8-에이전트 사전 코드리뷰: 서버 실행 전 버그 6건 일괄 발견 — 단독 리뷰였으면 1~2건 수준</a:t>
-            </a:r>
-          </a:p>
-          <a:p>
-            <a:pPr>
-              <a:lnSpc>
-                <a:spcPct val="140000"/>
-              </a:lnSpc>
-              <a:spcBef>
-                <a:spcPts val="600"/>
-              </a:spcBef>
-              <a:spcAft>
-                <a:spcPts val="200"/>
-              </a:spcAft>
-              <a:defRPr sz="1600">
-                <a:solidFill>
-                  <a:srgbClr val="1F1F1F"/>
-                </a:solidFill>
-                <a:latin typeface="맑은 고딕"/>
-              </a:defRPr>
-            </a:pPr>
-            <a:r>
-              <a:t>8-에이전트 종합 감사: 40여 이슈 — 최고 심각도는 권한 우회(비소속 운영자가 서버 전원 리셋·메모리 정보 변조 가능) → 전 라우트 정책 통일</a:t>
-            </a:r>
-          </a:p>
-          <a:p>
-            <a:pPr>
-              <a:lnSpc>
-                <a:spcPct val="140000"/>
-              </a:lnSpc>
-              <a:spcBef>
-                <a:spcPts val="600"/>
-              </a:spcBef>
-              <a:spcAft>
-                <a:spcPts val="200"/>
-              </a:spcAft>
-              <a:defRPr sz="1600">
-                <a:solidFill>
-                  <a:srgbClr val="1F1F1F"/>
-                </a:solidFill>
-                <a:latin typeface="맑은 고딕"/>
-              </a:defRPr>
-            </a:pPr>
-            <a:r>
-              <a:t>UML 설계 추적 감사: 다이어그램을 그리려 코드를 역추적하는 과정 자체가 설계 허점 19건을 드러냄 → 보안 5건 당일 수정</a:t>
-            </a:r>
-          </a:p>
-          <a:p>
-            <a:pPr lvl="1">
-              <a:lnSpc>
-                <a:spcPct val="140000"/>
-              </a:lnSpc>
-              <a:spcBef>
-                <a:spcPts val="200"/>
-              </a:spcBef>
-              <a:spcAft>
-                <a:spcPts val="200"/>
-              </a:spcAft>
-              <a:defRPr sz="1500">
-                <a:solidFill>
-                  <a:srgbClr val="8C8C9A"/>
-                </a:solidFill>
-                <a:latin typeface="맑은 고딕"/>
-              </a:defRPr>
-            </a:pPr>
-            <a:r>
-              <a:t>“UML은 그림이 아니라 감사 도구였다”</a:t>
-            </a:r>
-          </a:p>
-          <a:p>
-            <a:pPr>
-              <a:lnSpc>
-                <a:spcPct val="140000"/>
-              </a:lnSpc>
-              <a:spcBef>
-                <a:spcPts val="600"/>
-              </a:spcBef>
-              <a:spcAft>
-                <a:spcPts val="200"/>
-              </a:spcAft>
-              <a:defRPr sz="1600">
-                <a:solidFill>
-                  <a:srgbClr val="1F1F1F"/>
-                </a:solidFill>
-                <a:latin typeface="맑은 고딕"/>
-              </a:defRPr>
-            </a:pPr>
-            <a:r>
-              <a:t>합계: 이슈 65건+ 선제 발견, 그중 보안·권한 우회 7건 수정 — 전부 파일:라인 근거와 함께 문서화 (검증 가능한 기록)</a:t>
-            </a:r>
-          </a:p>
-          <a:p>
-            <a:pPr>
-              <a:lnSpc>
-                <a:spcPct val="140000"/>
-              </a:lnSpc>
-              <a:spcBef>
-                <a:spcPts val="600"/>
-              </a:spcBef>
-              <a:spcAft>
-                <a:spcPts val="200"/>
-              </a:spcAft>
-              <a:defRPr sz="1600">
-                <a:solidFill>
-                  <a:srgbClr val="1F1F1F"/>
-                </a:solidFill>
-                <a:latin typeface="맑은 고딕"/>
-              </a:defRPr>
-            </a:pPr>
-          </a:p>
-          <a:p>
-            <a:pPr>
-              <a:lnSpc>
-                <a:spcPct val="140000"/>
-              </a:lnSpc>
-              <a:spcBef>
-                <a:spcPts val="600"/>
-              </a:spcBef>
-              <a:spcAft>
-                <a:spcPts val="200"/>
-              </a:spcAft>
-              <a:defRPr sz="1600">
-                <a:solidFill>
-                  <a:srgbClr val="1F1F1F"/>
-                </a:solidFill>
-                <a:latin typeface="맑은 고딕"/>
-              </a:defRPr>
-            </a:pPr>
-            <a:r>
-              <a:t>운영 장애 대응: 운영 DB 중단 사고 → 8-에이전트 진단으로 데이터 손실 0 복구 + 재발 방지 명문화</a:t>
-            </a:r>
-          </a:p>
-        </p:txBody>
-      </p:sp>
-      <p:sp>
-        <p:nvSpPr>
-          <p:cNvPr id="7" name="TextBox 6"/>
-          <p:cNvSpPr txBox="1"/>
-          <p:nvPr/>
-        </p:nvSpPr>
-        <p:spPr>
-          <a:xfrm>
-            <a:off x="10972800" y="6492240"/>
-            <a:ext cx="914400" cy="274320"/>
-          </a:xfrm>
-          <a:prstGeom prst="rect">
-            <a:avLst/>
-          </a:prstGeom>
-          <a:noFill/>
-        </p:spPr>
-        <p:txBody>
-          <a:bodyPr wrap="square">
-            <a:spAutoFit/>
-          </a:bodyPr>
-          <a:lstStyle/>
-          <a:p>
-            <a:pPr algn="r">
-              <a:defRPr sz="1000" b="0">
-                <a:solidFill>
-                  <a:srgbClr val="8C8C9A"/>
-                </a:solidFill>
-                <a:latin typeface="맑은 고딕"/>
-              </a:defRPr>
-            </a:pPr>
-            <a:r>
-              <a:t>20</a:t>
-            </a:r>
-          </a:p>
-        </p:txBody>
-      </p:sp>
-    </p:spTree>
-  </p:cSld>
-  <p:clrMapOvr>
-    <a:masterClrMapping/>
-  </p:clrMapOvr>
-</p:sld>
-</file>
-
-<file path=ppt/slides/slide21.xml><?xml version="1.0" encoding="utf-8"?>
+<file path=ppt/slides/slide25.xml><?xml version="1.0" encoding="utf-8"?>
 <p:sld xmlns:a="http://schemas.openxmlformats.org/drawingml/2006/main" xmlns:p="http://schemas.openxmlformats.org/presentationml/2006/main" xmlns:r="http://schemas.openxmlformats.org/officeDocument/2006/relationships">
   <p:cSld>
     <p:bg>
@@ -10427,7 +13199,7 @@
               </a:defRPr>
             </a:pPr>
             <a:r>
-              <a:t>21</a:t>
+              <a:t>25</a:t>
             </a:r>
           </a:p>
         </p:txBody>
@@ -10440,7 +13212,7 @@
 </p:sld>
 </file>
 
-<file path=ppt/slides/slide22.xml><?xml version="1.0" encoding="utf-8"?>
+<file path=ppt/slides/slide26.xml><?xml version="1.0" encoding="utf-8"?>
 <p:sld xmlns:a="http://schemas.openxmlformats.org/drawingml/2006/main" xmlns:p="http://schemas.openxmlformats.org/presentationml/2006/main" xmlns:r="http://schemas.openxmlformats.org/officeDocument/2006/relationships">
   <p:cSld>
     <p:bg>
@@ -10533,7 +13305,7 @@
               </a:defRPr>
             </a:pPr>
             <a:r>
-              <a:t>정직한 한계와 다음 투자</a:t>
+              <a:t>월별 수정(fix) 커밋 비율 추이</a:t>
             </a:r>
           </a:p>
         </p:txBody>
@@ -10584,60 +13356,14 @@
       </p:sp>
       <p:sp>
         <p:nvSpPr>
-          <p:cNvPr id="5" name="Rounded Rectangle 4"/>
-          <p:cNvSpPr/>
-          <p:nvPr/>
-        </p:nvSpPr>
-        <p:spPr>
-          <a:xfrm>
-            <a:off x="457200" y="1188720"/>
-            <a:ext cx="5394960" cy="5212080"/>
-          </a:xfrm>
-          <a:prstGeom prst="roundRect">
-            <a:avLst/>
-          </a:prstGeom>
-          <a:solidFill>
-            <a:srgbClr val="F8F9FB"/>
-          </a:solidFill>
-          <a:ln w="12700">
-            <a:solidFill>
-              <a:srgbClr val="E0E0E8"/>
-            </a:solidFill>
-          </a:ln>
-          <a:effectLst/>
-        </p:spPr>
-        <p:style>
-          <a:lnRef idx="1">
-            <a:schemeClr val="accent1"/>
-          </a:lnRef>
-          <a:fillRef idx="3">
-            <a:schemeClr val="accent1"/>
-          </a:fillRef>
-          <a:effectRef idx="2">
-            <a:schemeClr val="accent1"/>
-          </a:effectRef>
-          <a:fontRef idx="minor">
-            <a:schemeClr val="lt1"/>
-          </a:fontRef>
-        </p:style>
-        <p:txBody>
-          <a:bodyPr rtlCol="0" anchor="ctr"/>
-          <a:lstStyle/>
-          <a:p>
-            <a:pPr algn="ctr"/>
-          </a:p>
-        </p:txBody>
-      </p:sp>
-      <p:sp>
-        <p:nvSpPr>
-          <p:cNvPr id="6" name="TextBox 5"/>
+          <p:cNvPr id="5" name="TextBox 4"/>
           <p:cNvSpPr txBox="1"/>
           <p:nvPr/>
         </p:nvSpPr>
         <p:spPr>
           <a:xfrm>
-            <a:off x="731520" y="1280160"/>
-            <a:ext cx="4846320" cy="457200"/>
+            <a:off x="594360" y="960120"/>
+            <a:ext cx="10972800" cy="365760"/>
           </a:xfrm>
           <a:prstGeom prst="rect">
             <a:avLst/>
@@ -10651,19 +13377,37 @@
           <a:lstStyle/>
           <a:p>
             <a:pPr algn="l">
-              <a:defRPr sz="1600" b="1">
-                <a:solidFill>
-                  <a:srgbClr val="DC2E2E"/>
-                </a:solidFill>
-                <a:latin typeface="맑은 고딕"/>
-              </a:defRPr>
-            </a:pPr>
-            <a:r>
-              <a:t>한계 (스스로 계량해 공개)</a:t>
-            </a:r>
-          </a:p>
-        </p:txBody>
-      </p:sp>
+              <a:defRPr sz="1400" b="0">
+                <a:solidFill>
+                  <a:srgbClr val="5A5A6E"/>
+                </a:solidFill>
+                <a:latin typeface="맑은 고딕"/>
+              </a:defRPr>
+            </a:pPr>
+            <a:r>
+              <a:t>Data-First 규칙 도입 후 반토막(4→5월). 6월 반등은 릴리즈 전 '의도된 버그 사냥'. 단위: %</a:t>
+            </a:r>
+          </a:p>
+        </p:txBody>
+      </p:sp>
+      <p:graphicFrame>
+        <p:nvGraphicFramePr>
+          <p:cNvPr id="6" name="Chart 5"/>
+          <p:cNvGraphicFramePr>
+            <a:graphicFrameLocks noGrp="1"/>
+          </p:cNvGraphicFramePr>
+          <p:nvPr/>
+        </p:nvGraphicFramePr>
+        <p:xfrm>
+          <a:off x="640080" y="1417320"/>
+          <a:ext cx="10881360" cy="4754880"/>
+        </p:xfrm>
+        <a:graphic>
+          <a:graphicData uri="http://schemas.openxmlformats.org/drawingml/2006/chart">
+            <c:chart xmlns:c="http://schemas.openxmlformats.org/drawingml/2006/chart" r:id="rId2"/>
+          </a:graphicData>
+        </a:graphic>
+      </p:graphicFrame>
       <p:sp>
         <p:nvSpPr>
           <p:cNvPr id="7" name="TextBox 6"/>
@@ -10672,8 +13416,8 @@
         </p:nvSpPr>
         <p:spPr>
           <a:xfrm>
-            <a:off x="731520" y="1737360"/>
-            <a:ext cx="4846320" cy="4480560"/>
+            <a:off x="594360" y="6355080"/>
+            <a:ext cx="10972800" cy="365760"/>
           </a:xfrm>
           <a:prstGeom prst="rect">
             <a:avLst/>
@@ -10686,173 +13430,30 @@
           </a:bodyPr>
           <a:lstStyle/>
           <a:p>
-            <a:pPr>
-              <a:lnSpc>
-                <a:spcPct val="135000"/>
-              </a:lnSpc>
-              <a:spcBef>
-                <a:spcPts val="600"/>
-              </a:spcBef>
-              <a:spcAft>
-                <a:spcPts val="200"/>
-              </a:spcAft>
-              <a:defRPr sz="1400">
-                <a:solidFill>
-                  <a:srgbClr val="1F1F1F"/>
-                </a:solidFill>
-                <a:latin typeface="맑은 고딕"/>
-              </a:defRPr>
-            </a:pPr>
-            <a:r>
-              <a:t>API 라우트 74개 중 테스트 1개 (1.4%)</a:t>
-            </a:r>
-          </a:p>
-          <a:p>
-            <a:pPr>
-              <a:lnSpc>
-                <a:spcPct val="135000"/>
-              </a:lnSpc>
-              <a:spcBef>
-                <a:spcPts val="600"/>
-              </a:spcBef>
-              <a:spcAft>
-                <a:spcPts val="200"/>
-              </a:spcAft>
-              <a:defRPr sz="1400">
-                <a:solidFill>
-                  <a:srgbClr val="1F1F1F"/>
-                </a:solidFill>
-                <a:latin typeface="맑은 고딕"/>
-              </a:defRPr>
-            </a:pPr>
-            <a:r>
-              <a:t>화면 렌더링 테스트 0개, E2E 1스펙</a:t>
-            </a:r>
-          </a:p>
-          <a:p>
-            <a:pPr>
-              <a:lnSpc>
-                <a:spcPct val="135000"/>
-              </a:lnSpc>
-              <a:spcBef>
-                <a:spcPts val="600"/>
-              </a:spcBef>
-              <a:spcAft>
-                <a:spcPts val="200"/>
-              </a:spcAft>
-              <a:defRPr sz="1400">
-                <a:solidFill>
-                  <a:srgbClr val="1F1F1F"/>
-                </a:solidFill>
-                <a:latin typeface="맑은 고딕"/>
-              </a:defRPr>
-            </a:pPr>
-            <a:r>
-              <a:t>권한 우회 결함도 이 무테스트 공백에서 발생</a:t>
-            </a:r>
-          </a:p>
-          <a:p>
-            <a:pPr>
-              <a:lnSpc>
-                <a:spcPct val="135000"/>
-              </a:lnSpc>
-              <a:spcBef>
-                <a:spcPts val="600"/>
-              </a:spcBef>
-              <a:spcAft>
-                <a:spcPts val="200"/>
-              </a:spcAft>
-              <a:defRPr sz="1400">
-                <a:solidFill>
-                  <a:srgbClr val="1F1F1F"/>
-                </a:solidFill>
-                <a:latin typeface="맑은 고딕"/>
-              </a:defRPr>
-            </a:pPr>
-            <a:r>
-              <a:t>리팩터링 3건 — 기능 속도 우선의 대가</a:t>
-            </a:r>
-          </a:p>
-          <a:p>
-            <a:pPr>
-              <a:lnSpc>
-                <a:spcPct val="135000"/>
-              </a:lnSpc>
-              <a:spcBef>
-                <a:spcPts val="600"/>
-              </a:spcBef>
-              <a:spcAft>
-                <a:spcPts val="200"/>
-              </a:spcAft>
-              <a:defRPr sz="1400">
-                <a:solidFill>
-                  <a:srgbClr val="1F1F1F"/>
-                </a:solidFill>
-                <a:latin typeface="맑은 고딕"/>
-              </a:defRPr>
-            </a:pPr>
-            <a:r>
-              <a:t>발표 팁: 한계를 먼저 말하면 질의응답에서 방어할 필요가 없다</a:t>
-            </a:r>
-          </a:p>
-        </p:txBody>
-      </p:sp>
-      <p:sp>
-        <p:nvSpPr>
-          <p:cNvPr id="8" name="Rounded Rectangle 7"/>
-          <p:cNvSpPr/>
-          <p:nvPr/>
-        </p:nvSpPr>
-        <p:spPr>
-          <a:xfrm>
-            <a:off x="6309360" y="1188720"/>
-            <a:ext cx="5394960" cy="5212080"/>
-          </a:xfrm>
-          <a:prstGeom prst="roundRect">
-            <a:avLst/>
-          </a:prstGeom>
-          <a:solidFill>
-            <a:srgbClr val="F8F9FB"/>
-          </a:solidFill>
-          <a:ln w="12700">
-            <a:solidFill>
-              <a:srgbClr val="E0E0E8"/>
-            </a:solidFill>
-          </a:ln>
-          <a:effectLst/>
-        </p:spPr>
-        <p:style>
-          <a:lnRef idx="1">
-            <a:schemeClr val="accent1"/>
-          </a:lnRef>
-          <a:fillRef idx="3">
-            <a:schemeClr val="accent1"/>
-          </a:fillRef>
-          <a:effectRef idx="2">
-            <a:schemeClr val="accent1"/>
-          </a:effectRef>
-          <a:fontRef idx="minor">
-            <a:schemeClr val="lt1"/>
-          </a:fontRef>
-        </p:style>
-        <p:txBody>
-          <a:bodyPr rtlCol="0" anchor="ctr"/>
-          <a:lstStyle/>
-          <a:p>
-            <a:pPr algn="ctr"/>
-          </a:p>
-        </p:txBody>
-      </p:sp>
-      <p:sp>
-        <p:nvSpPr>
-          <p:cNvPr id="9" name="TextBox 8"/>
+            <a:pPr algn="l">
+              <a:defRPr sz="1000" b="0">
+                <a:solidFill>
+                  <a:srgbClr val="8C8C9A"/>
+                </a:solidFill>
+                <a:latin typeface="맑은 고딕"/>
+              </a:defRPr>
+            </a:pPr>
+            <a:r>
+              <a:t>※ git 실측(전체 586커밋 중 fix 133건=약 23%). 6월 반등분 상당수는 사용자 신고가 아닌 자체 감사가 선제 발견·수정한 것.</a:t>
+            </a:r>
+          </a:p>
+        </p:txBody>
+      </p:sp>
+      <p:sp>
+        <p:nvSpPr>
+          <p:cNvPr id="8" name="TextBox 7"/>
           <p:cNvSpPr txBox="1"/>
           <p:nvPr/>
         </p:nvSpPr>
         <p:spPr>
           <a:xfrm>
-            <a:off x="6583680" y="1280160"/>
-            <a:ext cx="4846320" cy="457200"/>
+            <a:off x="10972800" y="6492240"/>
+            <a:ext cx="914400" cy="274320"/>
           </a:xfrm>
           <a:prstGeom prst="rect">
             <a:avLst/>
@@ -10865,175 +13466,6 @@
           </a:bodyPr>
           <a:lstStyle/>
           <a:p>
-            <a:pPr algn="l">
-              <a:defRPr sz="1600" b="1">
-                <a:solidFill>
-                  <a:srgbClr val="DC2E2E"/>
-                </a:solidFill>
-                <a:latin typeface="맑은 고딕"/>
-              </a:defRPr>
-            </a:pPr>
-            <a:r>
-              <a:t>v1.0 투자 계획 (위험도순)</a:t>
-            </a:r>
-          </a:p>
-        </p:txBody>
-      </p:sp>
-      <p:sp>
-        <p:nvSpPr>
-          <p:cNvPr id="10" name="TextBox 9"/>
-          <p:cNvSpPr txBox="1"/>
-          <p:nvPr/>
-        </p:nvSpPr>
-        <p:spPr>
-          <a:xfrm>
-            <a:off x="6583680" y="1737360"/>
-            <a:ext cx="4846320" cy="4480560"/>
-          </a:xfrm>
-          <a:prstGeom prst="rect">
-            <a:avLst/>
-          </a:prstGeom>
-          <a:noFill/>
-        </p:spPr>
-        <p:txBody>
-          <a:bodyPr wrap="square">
-            <a:spAutoFit/>
-          </a:bodyPr>
-          <a:lstStyle/>
-          <a:p>
-            <a:pPr>
-              <a:lnSpc>
-                <a:spcPct val="135000"/>
-              </a:lnSpc>
-              <a:spcBef>
-                <a:spcPts val="600"/>
-              </a:spcBef>
-              <a:spcAft>
-                <a:spcPts val="200"/>
-              </a:spcAft>
-              <a:defRPr sz="1400">
-                <a:solidFill>
-                  <a:srgbClr val="1F1F1F"/>
-                </a:solidFill>
-                <a:latin typeface="맑은 고딕"/>
-              </a:defRPr>
-            </a:pPr>
-            <a:r>
-              <a:t>① RBAC 권한 게이트 테스트 (보안 직결)</a:t>
-            </a:r>
-          </a:p>
-          <a:p>
-            <a:pPr>
-              <a:lnSpc>
-                <a:spcPct val="135000"/>
-              </a:lnSpc>
-              <a:spcBef>
-                <a:spcPts val="600"/>
-              </a:spcBef>
-              <a:spcAft>
-                <a:spcPts val="200"/>
-              </a:spcAft>
-              <a:defRPr sz="1400">
-                <a:solidFill>
-                  <a:srgbClr val="1F1F1F"/>
-                </a:solidFill>
-                <a:latin typeface="맑은 고딕"/>
-              </a:defRPr>
-            </a:pPr>
-            <a:r>
-              <a:t>② 알림 엔진 상태 전이 테스트</a:t>
-            </a:r>
-          </a:p>
-          <a:p>
-            <a:pPr>
-              <a:lnSpc>
-                <a:spcPct val="135000"/>
-              </a:lnSpc>
-              <a:spcBef>
-                <a:spcPts val="600"/>
-              </a:spcBef>
-              <a:spcAft>
-                <a:spcPts val="200"/>
-              </a:spcAft>
-              <a:defRPr sz="1400">
-                <a:solidFill>
-                  <a:srgbClr val="1F1F1F"/>
-                </a:solidFill>
-                <a:latin typeface="맑은 고딕"/>
-              </a:defRPr>
-            </a:pPr>
-            <a:r>
-              <a:t>③ 전원 제어 흐름 테스트 (장비 오정지 방지)</a:t>
-            </a:r>
-          </a:p>
-          <a:p>
-            <a:pPr>
-              <a:lnSpc>
-                <a:spcPct val="135000"/>
-              </a:lnSpc>
-              <a:spcBef>
-                <a:spcPts val="600"/>
-              </a:spcBef>
-              <a:spcAft>
-                <a:spcPts val="200"/>
-              </a:spcAft>
-              <a:defRPr sz="1400">
-                <a:solidFill>
-                  <a:srgbClr val="1F1F1F"/>
-                </a:solidFill>
-                <a:latin typeface="맑은 고딕"/>
-              </a:defRPr>
-            </a:pPr>
-            <a:r>
-              <a:t>이월 보안 항목: 알림 조직 필터(S3) 등 — 사유까지 문서화 완료</a:t>
-            </a:r>
-          </a:p>
-          <a:p>
-            <a:pPr>
-              <a:lnSpc>
-                <a:spcPct val="135000"/>
-              </a:lnSpc>
-              <a:spcBef>
-                <a:spcPts val="600"/>
-              </a:spcBef>
-              <a:spcAft>
-                <a:spcPts val="200"/>
-              </a:spcAft>
-              <a:defRPr sz="1400">
-                <a:solidFill>
-                  <a:srgbClr val="1F1F1F"/>
-                </a:solidFill>
-                <a:latin typeface="맑은 고딕"/>
-              </a:defRPr>
-            </a:pPr>
-            <a:r>
-              <a:t>실패→규칙→도구 선순환 지속 (예: DB 사고 → 위험 명령 차단 훅)</a:t>
-            </a:r>
-          </a:p>
-        </p:txBody>
-      </p:sp>
-      <p:sp>
-        <p:nvSpPr>
-          <p:cNvPr id="11" name="TextBox 10"/>
-          <p:cNvSpPr txBox="1"/>
-          <p:nvPr/>
-        </p:nvSpPr>
-        <p:spPr>
-          <a:xfrm>
-            <a:off x="10972800" y="6492240"/>
-            <a:ext cx="914400" cy="274320"/>
-          </a:xfrm>
-          <a:prstGeom prst="rect">
-            <a:avLst/>
-          </a:prstGeom>
-          <a:noFill/>
-        </p:spPr>
-        <p:txBody>
-          <a:bodyPr wrap="square">
-            <a:spAutoFit/>
-          </a:bodyPr>
-          <a:lstStyle/>
-          <a:p>
             <a:pPr algn="r">
               <a:defRPr sz="1000" b="0">
                 <a:solidFill>
@@ -11043,7 +13475,7 @@
               </a:defRPr>
             </a:pPr>
             <a:r>
-              <a:t>22</a:t>
+              <a:t>26</a:t>
             </a:r>
           </a:p>
         </p:txBody>
@@ -11056,7 +13488,7 @@
 </p:sld>
 </file>
 
-<file path=ppt/slides/slide23.xml><?xml version="1.0" encoding="utf-8"?>
+<file path=ppt/slides/slide27.xml><?xml version="1.0" encoding="utf-8"?>
 <p:sld xmlns:a="http://schemas.openxmlformats.org/drawingml/2006/main" xmlns:p="http://schemas.openxmlformats.org/presentationml/2006/main" xmlns:r="http://schemas.openxmlformats.org/officeDocument/2006/relationships">
   <p:cSld>
     <p:bg>
@@ -11083,13 +13515,13 @@
         <p:spPr>
           <a:xfrm>
             <a:off x="0" y="0"/>
-            <a:ext cx="109728" cy="6858000"/>
+            <a:ext cx="12191695" cy="45720"/>
           </a:xfrm>
           <a:prstGeom prst="rect">
             <a:avLst/>
           </a:prstGeom>
           <a:solidFill>
-            <a:srgbClr val="16A34A"/>
+            <a:srgbClr val="DC2E2E"/>
           </a:solidFill>
           <a:ln>
             <a:noFill/>
@@ -11120,20 +13552,56 @@
       </p:sp>
       <p:sp>
         <p:nvSpPr>
-          <p:cNvPr id="3" name="Oval 2"/>
+          <p:cNvPr id="3" name="TextBox 2"/>
+          <p:cNvSpPr txBox="1"/>
+          <p:nvPr/>
+        </p:nvSpPr>
+        <p:spPr>
+          <a:xfrm>
+            <a:off x="548640" y="274320"/>
+            <a:ext cx="10972800" cy="640080"/>
+          </a:xfrm>
+          <a:prstGeom prst="rect">
+            <a:avLst/>
+          </a:prstGeom>
+          <a:noFill/>
+        </p:spPr>
+        <p:txBody>
+          <a:bodyPr wrap="square">
+            <a:spAutoFit/>
+          </a:bodyPr>
+          <a:lstStyle/>
+          <a:p>
+            <a:pPr algn="l">
+              <a:defRPr sz="2600" b="1">
+                <a:solidFill>
+                  <a:srgbClr val="1F1F1F"/>
+                </a:solidFill>
+                <a:latin typeface="맑은 고딕"/>
+              </a:defRPr>
+            </a:pPr>
+            <a:r>
+              <a:t>커밋 유형 구성비 — '만들고 → 고치는' 리듬 (git 실측)</a:t>
+            </a:r>
+          </a:p>
+        </p:txBody>
+      </p:sp>
+      <p:sp>
+        <p:nvSpPr>
+          <p:cNvPr id="4" name="Rectangle 3"/>
           <p:cNvSpPr/>
           <p:nvPr/>
         </p:nvSpPr>
         <p:spPr>
           <a:xfrm>
-            <a:off x="1371600" y="2011680"/>
-            <a:ext cx="1097280" cy="1097280"/>
-          </a:xfrm>
-          <a:prstGeom prst="ellipse">
+            <a:off x="548640" y="914400"/>
+            <a:ext cx="1828800" cy="32004"/>
+          </a:xfrm>
+          <a:prstGeom prst="rect">
             <a:avLst/>
           </a:prstGeom>
           <a:solidFill>
-            <a:srgbClr val="16A34A"/>
+            <a:srgbClr val="DC2E2E"/>
           </a:solidFill>
           <a:ln>
             <a:noFill/>
@@ -11158,33 +13626,20 @@
           <a:bodyPr rtlCol="0" anchor="ctr"/>
           <a:lstStyle/>
           <a:p>
-            <a:pPr algn="ctr">
-              <a:spcBef>
-                <a:spcPts val="1200"/>
-              </a:spcBef>
-              <a:defRPr sz="3600" b="1">
-                <a:solidFill>
-                  <a:srgbClr val="FFFFFF"/>
-                </a:solidFill>
-                <a:latin typeface="맑은 고딕"/>
-              </a:defRPr>
-            </a:pPr>
-            <a:r>
-              <a:t>6</a:t>
-            </a:r>
-          </a:p>
-        </p:txBody>
-      </p:sp>
-      <p:sp>
-        <p:nvSpPr>
-          <p:cNvPr id="4" name="TextBox 3"/>
+            <a:pPr algn="ctr"/>
+          </a:p>
+        </p:txBody>
+      </p:sp>
+      <p:sp>
+        <p:nvSpPr>
+          <p:cNvPr id="5" name="TextBox 4"/>
           <p:cNvSpPr txBox="1"/>
           <p:nvPr/>
         </p:nvSpPr>
         <p:spPr>
           <a:xfrm>
-            <a:off x="2926080" y="1828800"/>
-            <a:ext cx="8229600" cy="914400"/>
+            <a:off x="594360" y="960120"/>
+            <a:ext cx="10972800" cy="365760"/>
           </a:xfrm>
           <a:prstGeom prst="rect">
             <a:avLst/>
@@ -11198,29 +13653,47 @@
           <a:lstStyle/>
           <a:p>
             <a:pPr algn="l">
-              <a:defRPr sz="4000" b="1">
-                <a:solidFill>
-                  <a:srgbClr val="1F1F1F"/>
-                </a:solidFill>
-                <a:latin typeface="맑은 고딕"/>
-              </a:defRPr>
-            </a:pPr>
-            <a:r>
-              <a:t>향후 운영 계획</a:t>
-            </a:r>
-          </a:p>
-        </p:txBody>
-      </p:sp>
-      <p:sp>
-        <p:nvSpPr>
-          <p:cNvPr id="5" name="TextBox 4"/>
+              <a:defRPr sz="1400" b="0">
+                <a:solidFill>
+                  <a:srgbClr val="5A5A6E"/>
+                </a:solidFill>
+                <a:latin typeface="맑은 고딕"/>
+              </a:defRPr>
+            </a:pPr>
+            <a:r>
+              <a:t>fix가 약 23% — '빠르게 만들고 실환경에서 고친다'는 바이브 코딩의 정직한 현실. 숨기지 않고 공개</a:t>
+            </a:r>
+          </a:p>
+        </p:txBody>
+      </p:sp>
+      <p:graphicFrame>
+        <p:nvGraphicFramePr>
+          <p:cNvPr id="6" name="Chart 5"/>
+          <p:cNvGraphicFramePr>
+            <a:graphicFrameLocks noGrp="1"/>
+          </p:cNvGraphicFramePr>
+          <p:nvPr/>
+        </p:nvGraphicFramePr>
+        <p:xfrm>
+          <a:off x="2377440" y="1463040"/>
+          <a:ext cx="7406640" cy="4754880"/>
+        </p:xfrm>
+        <a:graphic>
+          <a:graphicData uri="http://schemas.openxmlformats.org/drawingml/2006/chart">
+            <c:chart xmlns:c="http://schemas.openxmlformats.org/drawingml/2006/chart" r:id="rId2"/>
+          </a:graphicData>
+        </a:graphic>
+      </p:graphicFrame>
+      <p:sp>
+        <p:nvSpPr>
+          <p:cNvPr id="7" name="TextBox 6"/>
           <p:cNvSpPr txBox="1"/>
           <p:nvPr/>
         </p:nvSpPr>
         <p:spPr>
           <a:xfrm>
-            <a:off x="2926080" y="2926080"/>
-            <a:ext cx="8229600" cy="548640"/>
+            <a:off x="594360" y="6355080"/>
+            <a:ext cx="10972800" cy="365760"/>
           </a:xfrm>
           <a:prstGeom prst="rect">
             <a:avLst/>
@@ -11234,104 +13707,52 @@
           <a:lstStyle/>
           <a:p>
             <a:pPr algn="l">
-              <a:defRPr sz="1800" b="0">
-                <a:solidFill>
-                  <a:srgbClr val="5A5A6E"/>
-                </a:solidFill>
-                <a:latin typeface="맑은 고딕"/>
-              </a:defRPr>
-            </a:pPr>
-            <a:r>
-              <a:t>이미 갖춰진 체계 + 신규 과제 7건</a:t>
-            </a:r>
-          </a:p>
-        </p:txBody>
-      </p:sp>
-      <p:sp>
-        <p:nvSpPr>
-          <p:cNvPr id="6" name="Rectangle 5"/>
-          <p:cNvSpPr/>
-          <p:nvPr/>
-        </p:nvSpPr>
-        <p:spPr>
-          <a:xfrm>
-            <a:off x="2926080" y="3657600"/>
-            <a:ext cx="3657600" cy="36576"/>
+              <a:defRPr sz="1000" b="0">
+                <a:solidFill>
+                  <a:srgbClr val="8C8C9A"/>
+                </a:solidFill>
+                <a:latin typeface="맑은 고딕"/>
+              </a:defRPr>
+            </a:pPr>
+            <a:r>
+              <a:t>※ 커밋 제목 접두사 기준 분류. 리팩터링(refactor)은 3건뿐 → 향후 테스트·리팩터링 투자 필요(정직한 한계).</a:t>
+            </a:r>
+          </a:p>
+        </p:txBody>
+      </p:sp>
+      <p:sp>
+        <p:nvSpPr>
+          <p:cNvPr id="8" name="TextBox 7"/>
+          <p:cNvSpPr txBox="1"/>
+          <p:nvPr/>
+        </p:nvSpPr>
+        <p:spPr>
+          <a:xfrm>
+            <a:off x="10972800" y="6492240"/>
+            <a:ext cx="914400" cy="274320"/>
           </a:xfrm>
           <a:prstGeom prst="rect">
             <a:avLst/>
           </a:prstGeom>
-          <a:solidFill>
-            <a:srgbClr val="16A34A"/>
-          </a:solidFill>
-          <a:ln>
-            <a:noFill/>
-          </a:ln>
-          <a:effectLst/>
-        </p:spPr>
-        <p:style>
-          <a:lnRef idx="1">
-            <a:schemeClr val="accent1"/>
-          </a:lnRef>
-          <a:fillRef idx="3">
-            <a:schemeClr val="accent1"/>
-          </a:fillRef>
-          <a:effectRef idx="2">
-            <a:schemeClr val="accent1"/>
-          </a:effectRef>
-          <a:fontRef idx="minor">
-            <a:schemeClr val="lt1"/>
-          </a:fontRef>
-        </p:style>
-        <p:txBody>
-          <a:bodyPr rtlCol="0" anchor="ctr"/>
-          <a:lstStyle/>
-          <a:p>
-            <a:pPr algn="ctr"/>
-          </a:p>
-        </p:txBody>
-      </p:sp>
-      <p:sp>
-        <p:nvSpPr>
-          <p:cNvPr id="7" name="Rectangle 6"/>
-          <p:cNvSpPr/>
-          <p:nvPr/>
-        </p:nvSpPr>
-        <p:spPr>
-          <a:xfrm>
-            <a:off x="0" y="6748272"/>
-            <a:ext cx="12191695" cy="54864"/>
-          </a:xfrm>
-          <a:prstGeom prst="rect">
-            <a:avLst/>
-          </a:prstGeom>
-          <a:solidFill>
-            <a:srgbClr val="16A34A"/>
-          </a:solidFill>
-          <a:ln>
-            <a:noFill/>
-          </a:ln>
-          <a:effectLst/>
-        </p:spPr>
-        <p:style>
-          <a:lnRef idx="1">
-            <a:schemeClr val="accent1"/>
-          </a:lnRef>
-          <a:fillRef idx="3">
-            <a:schemeClr val="accent1"/>
-          </a:fillRef>
-          <a:effectRef idx="2">
-            <a:schemeClr val="accent1"/>
-          </a:effectRef>
-          <a:fontRef idx="minor">
-            <a:schemeClr val="lt1"/>
-          </a:fontRef>
-        </p:style>
-        <p:txBody>
-          <a:bodyPr rtlCol="0" anchor="ctr"/>
-          <a:lstStyle/>
-          <a:p>
-            <a:pPr algn="ctr"/>
+          <a:noFill/>
+        </p:spPr>
+        <p:txBody>
+          <a:bodyPr wrap="square">
+            <a:spAutoFit/>
+          </a:bodyPr>
+          <a:lstStyle/>
+          <a:p>
+            <a:pPr algn="r">
+              <a:defRPr sz="1000" b="0">
+                <a:solidFill>
+                  <a:srgbClr val="8C8C9A"/>
+                </a:solidFill>
+                <a:latin typeface="맑은 고딕"/>
+              </a:defRPr>
+            </a:pPr>
+            <a:r>
+              <a:t>27</a:t>
+            </a:r>
           </a:p>
         </p:txBody>
       </p:sp>
@@ -11343,7 +13764,1319 @@
 </p:sld>
 </file>
 
-<file path=ppt/slides/slide24.xml><?xml version="1.0" encoding="utf-8"?>
+<file path=ppt/slides/slide28.xml><?xml version="1.0" encoding="utf-8"?>
+<p:sld xmlns:a="http://schemas.openxmlformats.org/drawingml/2006/main" xmlns:p="http://schemas.openxmlformats.org/presentationml/2006/main" xmlns:r="http://schemas.openxmlformats.org/officeDocument/2006/relationships">
+  <p:cSld>
+    <p:bg>
+      <p:bgPr>
+        <a:solidFill>
+          <a:srgbClr val="FFFFFF"/>
+        </a:solidFill>
+        <a:effectLst/>
+      </p:bgPr>
+    </p:bg>
+    <p:spTree>
+      <p:nvGrpSpPr>
+        <p:cNvPr id="1" name=""/>
+        <p:cNvGrpSpPr/>
+        <p:nvPr/>
+      </p:nvGrpSpPr>
+      <p:grpSpPr/>
+      <p:sp>
+        <p:nvSpPr>
+          <p:cNvPr id="2" name="Rectangle 1"/>
+          <p:cNvSpPr/>
+          <p:nvPr/>
+        </p:nvSpPr>
+        <p:spPr>
+          <a:xfrm>
+            <a:off x="0" y="0"/>
+            <a:ext cx="12191695" cy="45720"/>
+          </a:xfrm>
+          <a:prstGeom prst="rect">
+            <a:avLst/>
+          </a:prstGeom>
+          <a:solidFill>
+            <a:srgbClr val="DC2E2E"/>
+          </a:solidFill>
+          <a:ln>
+            <a:noFill/>
+          </a:ln>
+          <a:effectLst/>
+        </p:spPr>
+        <p:style>
+          <a:lnRef idx="1">
+            <a:schemeClr val="accent1"/>
+          </a:lnRef>
+          <a:fillRef idx="3">
+            <a:schemeClr val="accent1"/>
+          </a:fillRef>
+          <a:effectRef idx="2">
+            <a:schemeClr val="accent1"/>
+          </a:effectRef>
+          <a:fontRef idx="minor">
+            <a:schemeClr val="lt1"/>
+          </a:fontRef>
+        </p:style>
+        <p:txBody>
+          <a:bodyPr rtlCol="0" anchor="ctr"/>
+          <a:lstStyle/>
+          <a:p>
+            <a:pPr algn="ctr"/>
+          </a:p>
+        </p:txBody>
+      </p:sp>
+      <p:sp>
+        <p:nvSpPr>
+          <p:cNvPr id="3" name="TextBox 2"/>
+          <p:cNvSpPr txBox="1"/>
+          <p:nvPr/>
+        </p:nvSpPr>
+        <p:spPr>
+          <a:xfrm>
+            <a:off x="548640" y="274320"/>
+            <a:ext cx="10972800" cy="640080"/>
+          </a:xfrm>
+          <a:prstGeom prst="rect">
+            <a:avLst/>
+          </a:prstGeom>
+          <a:noFill/>
+        </p:spPr>
+        <p:txBody>
+          <a:bodyPr wrap="square">
+            <a:spAutoFit/>
+          </a:bodyPr>
+          <a:lstStyle/>
+          <a:p>
+            <a:pPr algn="l">
+              <a:defRPr sz="2600" b="1">
+                <a:solidFill>
+                  <a:srgbClr val="1F1F1F"/>
+                </a:solidFill>
+                <a:latin typeface="맑은 고딕"/>
+              </a:defRPr>
+            </a:pPr>
+            <a:r>
+              <a:t>정직한 한계와 다음 투자</a:t>
+            </a:r>
+          </a:p>
+        </p:txBody>
+      </p:sp>
+      <p:sp>
+        <p:nvSpPr>
+          <p:cNvPr id="4" name="Rectangle 3"/>
+          <p:cNvSpPr/>
+          <p:nvPr/>
+        </p:nvSpPr>
+        <p:spPr>
+          <a:xfrm>
+            <a:off x="548640" y="914400"/>
+            <a:ext cx="1828800" cy="32004"/>
+          </a:xfrm>
+          <a:prstGeom prst="rect">
+            <a:avLst/>
+          </a:prstGeom>
+          <a:solidFill>
+            <a:srgbClr val="DC2E2E"/>
+          </a:solidFill>
+          <a:ln>
+            <a:noFill/>
+          </a:ln>
+          <a:effectLst/>
+        </p:spPr>
+        <p:style>
+          <a:lnRef idx="1">
+            <a:schemeClr val="accent1"/>
+          </a:lnRef>
+          <a:fillRef idx="3">
+            <a:schemeClr val="accent1"/>
+          </a:fillRef>
+          <a:effectRef idx="2">
+            <a:schemeClr val="accent1"/>
+          </a:effectRef>
+          <a:fontRef idx="minor">
+            <a:schemeClr val="lt1"/>
+          </a:fontRef>
+        </p:style>
+        <p:txBody>
+          <a:bodyPr rtlCol="0" anchor="ctr"/>
+          <a:lstStyle/>
+          <a:p>
+            <a:pPr algn="ctr"/>
+          </a:p>
+        </p:txBody>
+      </p:sp>
+      <p:sp>
+        <p:nvSpPr>
+          <p:cNvPr id="5" name="Rounded Rectangle 4"/>
+          <p:cNvSpPr/>
+          <p:nvPr/>
+        </p:nvSpPr>
+        <p:spPr>
+          <a:xfrm>
+            <a:off x="457200" y="1188720"/>
+            <a:ext cx="5394960" cy="5212080"/>
+          </a:xfrm>
+          <a:prstGeom prst="roundRect">
+            <a:avLst/>
+          </a:prstGeom>
+          <a:solidFill>
+            <a:srgbClr val="F8F9FB"/>
+          </a:solidFill>
+          <a:ln w="12700">
+            <a:solidFill>
+              <a:srgbClr val="E0E0E8"/>
+            </a:solidFill>
+          </a:ln>
+          <a:effectLst/>
+        </p:spPr>
+        <p:style>
+          <a:lnRef idx="1">
+            <a:schemeClr val="accent1"/>
+          </a:lnRef>
+          <a:fillRef idx="3">
+            <a:schemeClr val="accent1"/>
+          </a:fillRef>
+          <a:effectRef idx="2">
+            <a:schemeClr val="accent1"/>
+          </a:effectRef>
+          <a:fontRef idx="minor">
+            <a:schemeClr val="lt1"/>
+          </a:fontRef>
+        </p:style>
+        <p:txBody>
+          <a:bodyPr rtlCol="0" anchor="ctr"/>
+          <a:lstStyle/>
+          <a:p>
+            <a:pPr algn="ctr"/>
+          </a:p>
+        </p:txBody>
+      </p:sp>
+      <p:sp>
+        <p:nvSpPr>
+          <p:cNvPr id="6" name="TextBox 5"/>
+          <p:cNvSpPr txBox="1"/>
+          <p:nvPr/>
+        </p:nvSpPr>
+        <p:spPr>
+          <a:xfrm>
+            <a:off x="731520" y="1280160"/>
+            <a:ext cx="4846320" cy="457200"/>
+          </a:xfrm>
+          <a:prstGeom prst="rect">
+            <a:avLst/>
+          </a:prstGeom>
+          <a:noFill/>
+        </p:spPr>
+        <p:txBody>
+          <a:bodyPr wrap="square">
+            <a:spAutoFit/>
+          </a:bodyPr>
+          <a:lstStyle/>
+          <a:p>
+            <a:pPr algn="l">
+              <a:defRPr sz="1600" b="1">
+                <a:solidFill>
+                  <a:srgbClr val="DC2E2E"/>
+                </a:solidFill>
+                <a:latin typeface="맑은 고딕"/>
+              </a:defRPr>
+            </a:pPr>
+            <a:r>
+              <a:t>한계 (스스로 계량해 공개)</a:t>
+            </a:r>
+          </a:p>
+        </p:txBody>
+      </p:sp>
+      <p:sp>
+        <p:nvSpPr>
+          <p:cNvPr id="7" name="TextBox 6"/>
+          <p:cNvSpPr txBox="1"/>
+          <p:nvPr/>
+        </p:nvSpPr>
+        <p:spPr>
+          <a:xfrm>
+            <a:off x="731520" y="1737360"/>
+            <a:ext cx="4846320" cy="4480560"/>
+          </a:xfrm>
+          <a:prstGeom prst="rect">
+            <a:avLst/>
+          </a:prstGeom>
+          <a:noFill/>
+        </p:spPr>
+        <p:txBody>
+          <a:bodyPr wrap="square">
+            <a:spAutoFit/>
+          </a:bodyPr>
+          <a:lstStyle/>
+          <a:p>
+            <a:pPr>
+              <a:lnSpc>
+                <a:spcPct val="135000"/>
+              </a:lnSpc>
+              <a:spcBef>
+                <a:spcPts val="600"/>
+              </a:spcBef>
+              <a:spcAft>
+                <a:spcPts val="200"/>
+              </a:spcAft>
+              <a:defRPr sz="1400">
+                <a:solidFill>
+                  <a:srgbClr val="1F1F1F"/>
+                </a:solidFill>
+                <a:latin typeface="맑은 고딕"/>
+              </a:defRPr>
+            </a:pPr>
+            <a:r>
+              <a:t>API 라우트 74개 중 테스트 1개 (1.4%)</a:t>
+            </a:r>
+          </a:p>
+          <a:p>
+            <a:pPr>
+              <a:lnSpc>
+                <a:spcPct val="135000"/>
+              </a:lnSpc>
+              <a:spcBef>
+                <a:spcPts val="600"/>
+              </a:spcBef>
+              <a:spcAft>
+                <a:spcPts val="200"/>
+              </a:spcAft>
+              <a:defRPr sz="1400">
+                <a:solidFill>
+                  <a:srgbClr val="1F1F1F"/>
+                </a:solidFill>
+                <a:latin typeface="맑은 고딕"/>
+              </a:defRPr>
+            </a:pPr>
+            <a:r>
+              <a:t>화면 렌더링 테스트 0개, E2E 1스펙</a:t>
+            </a:r>
+          </a:p>
+          <a:p>
+            <a:pPr>
+              <a:lnSpc>
+                <a:spcPct val="135000"/>
+              </a:lnSpc>
+              <a:spcBef>
+                <a:spcPts val="600"/>
+              </a:spcBef>
+              <a:spcAft>
+                <a:spcPts val="200"/>
+              </a:spcAft>
+              <a:defRPr sz="1400">
+                <a:solidFill>
+                  <a:srgbClr val="1F1F1F"/>
+                </a:solidFill>
+                <a:latin typeface="맑은 고딕"/>
+              </a:defRPr>
+            </a:pPr>
+            <a:r>
+              <a:t>권한 우회 결함도 이 무테스트 공백에서 발생</a:t>
+            </a:r>
+          </a:p>
+          <a:p>
+            <a:pPr>
+              <a:lnSpc>
+                <a:spcPct val="135000"/>
+              </a:lnSpc>
+              <a:spcBef>
+                <a:spcPts val="600"/>
+              </a:spcBef>
+              <a:spcAft>
+                <a:spcPts val="200"/>
+              </a:spcAft>
+              <a:defRPr sz="1400">
+                <a:solidFill>
+                  <a:srgbClr val="1F1F1F"/>
+                </a:solidFill>
+                <a:latin typeface="맑은 고딕"/>
+              </a:defRPr>
+            </a:pPr>
+            <a:r>
+              <a:t>리팩터링 3건 — 기능 속도 우선의 대가</a:t>
+            </a:r>
+          </a:p>
+          <a:p>
+            <a:pPr>
+              <a:lnSpc>
+                <a:spcPct val="135000"/>
+              </a:lnSpc>
+              <a:spcBef>
+                <a:spcPts val="600"/>
+              </a:spcBef>
+              <a:spcAft>
+                <a:spcPts val="200"/>
+              </a:spcAft>
+              <a:defRPr sz="1400">
+                <a:solidFill>
+                  <a:srgbClr val="1F1F1F"/>
+                </a:solidFill>
+                <a:latin typeface="맑은 고딕"/>
+              </a:defRPr>
+            </a:pPr>
+            <a:r>
+              <a:t>발표 팁: 한계를 먼저 말하면 질의응답에서 방어할 필요가 없다</a:t>
+            </a:r>
+          </a:p>
+        </p:txBody>
+      </p:sp>
+      <p:sp>
+        <p:nvSpPr>
+          <p:cNvPr id="8" name="Rounded Rectangle 7"/>
+          <p:cNvSpPr/>
+          <p:nvPr/>
+        </p:nvSpPr>
+        <p:spPr>
+          <a:xfrm>
+            <a:off x="6309360" y="1188720"/>
+            <a:ext cx="5394960" cy="5212080"/>
+          </a:xfrm>
+          <a:prstGeom prst="roundRect">
+            <a:avLst/>
+          </a:prstGeom>
+          <a:solidFill>
+            <a:srgbClr val="F8F9FB"/>
+          </a:solidFill>
+          <a:ln w="12700">
+            <a:solidFill>
+              <a:srgbClr val="E0E0E8"/>
+            </a:solidFill>
+          </a:ln>
+          <a:effectLst/>
+        </p:spPr>
+        <p:style>
+          <a:lnRef idx="1">
+            <a:schemeClr val="accent1"/>
+          </a:lnRef>
+          <a:fillRef idx="3">
+            <a:schemeClr val="accent1"/>
+          </a:fillRef>
+          <a:effectRef idx="2">
+            <a:schemeClr val="accent1"/>
+          </a:effectRef>
+          <a:fontRef idx="minor">
+            <a:schemeClr val="lt1"/>
+          </a:fontRef>
+        </p:style>
+        <p:txBody>
+          <a:bodyPr rtlCol="0" anchor="ctr"/>
+          <a:lstStyle/>
+          <a:p>
+            <a:pPr algn="ctr"/>
+          </a:p>
+        </p:txBody>
+      </p:sp>
+      <p:sp>
+        <p:nvSpPr>
+          <p:cNvPr id="9" name="TextBox 8"/>
+          <p:cNvSpPr txBox="1"/>
+          <p:nvPr/>
+        </p:nvSpPr>
+        <p:spPr>
+          <a:xfrm>
+            <a:off x="6583680" y="1280160"/>
+            <a:ext cx="4846320" cy="457200"/>
+          </a:xfrm>
+          <a:prstGeom prst="rect">
+            <a:avLst/>
+          </a:prstGeom>
+          <a:noFill/>
+        </p:spPr>
+        <p:txBody>
+          <a:bodyPr wrap="square">
+            <a:spAutoFit/>
+          </a:bodyPr>
+          <a:lstStyle/>
+          <a:p>
+            <a:pPr algn="l">
+              <a:defRPr sz="1600" b="1">
+                <a:solidFill>
+                  <a:srgbClr val="DC2E2E"/>
+                </a:solidFill>
+                <a:latin typeface="맑은 고딕"/>
+              </a:defRPr>
+            </a:pPr>
+            <a:r>
+              <a:t>v1.0 투자 계획 (위험도순)</a:t>
+            </a:r>
+          </a:p>
+        </p:txBody>
+      </p:sp>
+      <p:sp>
+        <p:nvSpPr>
+          <p:cNvPr id="10" name="TextBox 9"/>
+          <p:cNvSpPr txBox="1"/>
+          <p:nvPr/>
+        </p:nvSpPr>
+        <p:spPr>
+          <a:xfrm>
+            <a:off x="6583680" y="1737360"/>
+            <a:ext cx="4846320" cy="4480560"/>
+          </a:xfrm>
+          <a:prstGeom prst="rect">
+            <a:avLst/>
+          </a:prstGeom>
+          <a:noFill/>
+        </p:spPr>
+        <p:txBody>
+          <a:bodyPr wrap="square">
+            <a:spAutoFit/>
+          </a:bodyPr>
+          <a:lstStyle/>
+          <a:p>
+            <a:pPr>
+              <a:lnSpc>
+                <a:spcPct val="135000"/>
+              </a:lnSpc>
+              <a:spcBef>
+                <a:spcPts val="600"/>
+              </a:spcBef>
+              <a:spcAft>
+                <a:spcPts val="200"/>
+              </a:spcAft>
+              <a:defRPr sz="1400">
+                <a:solidFill>
+                  <a:srgbClr val="1F1F1F"/>
+                </a:solidFill>
+                <a:latin typeface="맑은 고딕"/>
+              </a:defRPr>
+            </a:pPr>
+            <a:r>
+              <a:t>① RBAC 권한 게이트 테스트 (보안 직결)</a:t>
+            </a:r>
+          </a:p>
+          <a:p>
+            <a:pPr>
+              <a:lnSpc>
+                <a:spcPct val="135000"/>
+              </a:lnSpc>
+              <a:spcBef>
+                <a:spcPts val="600"/>
+              </a:spcBef>
+              <a:spcAft>
+                <a:spcPts val="200"/>
+              </a:spcAft>
+              <a:defRPr sz="1400">
+                <a:solidFill>
+                  <a:srgbClr val="1F1F1F"/>
+                </a:solidFill>
+                <a:latin typeface="맑은 고딕"/>
+              </a:defRPr>
+            </a:pPr>
+            <a:r>
+              <a:t>② 알림 엔진 상태 전이 테스트</a:t>
+            </a:r>
+          </a:p>
+          <a:p>
+            <a:pPr>
+              <a:lnSpc>
+                <a:spcPct val="135000"/>
+              </a:lnSpc>
+              <a:spcBef>
+                <a:spcPts val="600"/>
+              </a:spcBef>
+              <a:spcAft>
+                <a:spcPts val="200"/>
+              </a:spcAft>
+              <a:defRPr sz="1400">
+                <a:solidFill>
+                  <a:srgbClr val="1F1F1F"/>
+                </a:solidFill>
+                <a:latin typeface="맑은 고딕"/>
+              </a:defRPr>
+            </a:pPr>
+            <a:r>
+              <a:t>③ 전원 제어 흐름 테스트 (장비 오정지 방지)</a:t>
+            </a:r>
+          </a:p>
+          <a:p>
+            <a:pPr>
+              <a:lnSpc>
+                <a:spcPct val="135000"/>
+              </a:lnSpc>
+              <a:spcBef>
+                <a:spcPts val="600"/>
+              </a:spcBef>
+              <a:spcAft>
+                <a:spcPts val="200"/>
+              </a:spcAft>
+              <a:defRPr sz="1400">
+                <a:solidFill>
+                  <a:srgbClr val="1F1F1F"/>
+                </a:solidFill>
+                <a:latin typeface="맑은 고딕"/>
+              </a:defRPr>
+            </a:pPr>
+            <a:r>
+              <a:t>이월 보안 항목: 알림 조직 필터(S3) 등 — 사유까지 문서화 완료</a:t>
+            </a:r>
+          </a:p>
+          <a:p>
+            <a:pPr>
+              <a:lnSpc>
+                <a:spcPct val="135000"/>
+              </a:lnSpc>
+              <a:spcBef>
+                <a:spcPts val="600"/>
+              </a:spcBef>
+              <a:spcAft>
+                <a:spcPts val="200"/>
+              </a:spcAft>
+              <a:defRPr sz="1400">
+                <a:solidFill>
+                  <a:srgbClr val="1F1F1F"/>
+                </a:solidFill>
+                <a:latin typeface="맑은 고딕"/>
+              </a:defRPr>
+            </a:pPr>
+            <a:r>
+              <a:t>실패→규칙→도구 선순환 지속 (예: DB 사고 → 위험 명령 차단 훅)</a:t>
+            </a:r>
+          </a:p>
+        </p:txBody>
+      </p:sp>
+      <p:sp>
+        <p:nvSpPr>
+          <p:cNvPr id="11" name="TextBox 10"/>
+          <p:cNvSpPr txBox="1"/>
+          <p:nvPr/>
+        </p:nvSpPr>
+        <p:spPr>
+          <a:xfrm>
+            <a:off x="10972800" y="6492240"/>
+            <a:ext cx="914400" cy="274320"/>
+          </a:xfrm>
+          <a:prstGeom prst="rect">
+            <a:avLst/>
+          </a:prstGeom>
+          <a:noFill/>
+        </p:spPr>
+        <p:txBody>
+          <a:bodyPr wrap="square">
+            <a:spAutoFit/>
+          </a:bodyPr>
+          <a:lstStyle/>
+          <a:p>
+            <a:pPr algn="r">
+              <a:defRPr sz="1000" b="0">
+                <a:solidFill>
+                  <a:srgbClr val="8C8C9A"/>
+                </a:solidFill>
+                <a:latin typeface="맑은 고딕"/>
+              </a:defRPr>
+            </a:pPr>
+            <a:r>
+              <a:t>28</a:t>
+            </a:r>
+          </a:p>
+        </p:txBody>
+      </p:sp>
+    </p:spTree>
+  </p:cSld>
+  <p:clrMapOvr>
+    <a:masterClrMapping/>
+  </p:clrMapOvr>
+</p:sld>
+</file>
+
+<file path=ppt/slides/slide29.xml><?xml version="1.0" encoding="utf-8"?>
+<p:sld xmlns:a="http://schemas.openxmlformats.org/drawingml/2006/main" xmlns:p="http://schemas.openxmlformats.org/presentationml/2006/main" xmlns:r="http://schemas.openxmlformats.org/officeDocument/2006/relationships">
+  <p:cSld>
+    <p:bg>
+      <p:bgPr>
+        <a:solidFill>
+          <a:srgbClr val="FFFFFF"/>
+        </a:solidFill>
+        <a:effectLst/>
+      </p:bgPr>
+    </p:bg>
+    <p:spTree>
+      <p:nvGrpSpPr>
+        <p:cNvPr id="1" name=""/>
+        <p:cNvGrpSpPr/>
+        <p:nvPr/>
+      </p:nvGrpSpPr>
+      <p:grpSpPr/>
+      <p:sp>
+        <p:nvSpPr>
+          <p:cNvPr id="2" name="Rectangle 1"/>
+          <p:cNvSpPr/>
+          <p:nvPr/>
+        </p:nvSpPr>
+        <p:spPr>
+          <a:xfrm>
+            <a:off x="0" y="0"/>
+            <a:ext cx="109728" cy="6858000"/>
+          </a:xfrm>
+          <a:prstGeom prst="rect">
+            <a:avLst/>
+          </a:prstGeom>
+          <a:solidFill>
+            <a:srgbClr val="16A34A"/>
+          </a:solidFill>
+          <a:ln>
+            <a:noFill/>
+          </a:ln>
+          <a:effectLst/>
+        </p:spPr>
+        <p:style>
+          <a:lnRef idx="1">
+            <a:schemeClr val="accent1"/>
+          </a:lnRef>
+          <a:fillRef idx="3">
+            <a:schemeClr val="accent1"/>
+          </a:fillRef>
+          <a:effectRef idx="2">
+            <a:schemeClr val="accent1"/>
+          </a:effectRef>
+          <a:fontRef idx="minor">
+            <a:schemeClr val="lt1"/>
+          </a:fontRef>
+        </p:style>
+        <p:txBody>
+          <a:bodyPr rtlCol="0" anchor="ctr"/>
+          <a:lstStyle/>
+          <a:p>
+            <a:pPr algn="ctr"/>
+          </a:p>
+        </p:txBody>
+      </p:sp>
+      <p:sp>
+        <p:nvSpPr>
+          <p:cNvPr id="3" name="Oval 2"/>
+          <p:cNvSpPr/>
+          <p:nvPr/>
+        </p:nvSpPr>
+        <p:spPr>
+          <a:xfrm>
+            <a:off x="1371600" y="2011680"/>
+            <a:ext cx="1097280" cy="1097280"/>
+          </a:xfrm>
+          <a:prstGeom prst="ellipse">
+            <a:avLst/>
+          </a:prstGeom>
+          <a:solidFill>
+            <a:srgbClr val="16A34A"/>
+          </a:solidFill>
+          <a:ln>
+            <a:noFill/>
+          </a:ln>
+          <a:effectLst/>
+        </p:spPr>
+        <p:style>
+          <a:lnRef idx="1">
+            <a:schemeClr val="accent1"/>
+          </a:lnRef>
+          <a:fillRef idx="3">
+            <a:schemeClr val="accent1"/>
+          </a:fillRef>
+          <a:effectRef idx="2">
+            <a:schemeClr val="accent1"/>
+          </a:effectRef>
+          <a:fontRef idx="minor">
+            <a:schemeClr val="lt1"/>
+          </a:fontRef>
+        </p:style>
+        <p:txBody>
+          <a:bodyPr rtlCol="0" anchor="ctr"/>
+          <a:lstStyle/>
+          <a:p>
+            <a:pPr algn="ctr">
+              <a:spcBef>
+                <a:spcPts val="1200"/>
+              </a:spcBef>
+              <a:defRPr sz="3600" b="1">
+                <a:solidFill>
+                  <a:srgbClr val="FFFFFF"/>
+                </a:solidFill>
+                <a:latin typeface="맑은 고딕"/>
+              </a:defRPr>
+            </a:pPr>
+            <a:r>
+              <a:t>6</a:t>
+            </a:r>
+          </a:p>
+        </p:txBody>
+      </p:sp>
+      <p:sp>
+        <p:nvSpPr>
+          <p:cNvPr id="4" name="TextBox 3"/>
+          <p:cNvSpPr txBox="1"/>
+          <p:nvPr/>
+        </p:nvSpPr>
+        <p:spPr>
+          <a:xfrm>
+            <a:off x="2926080" y="1828800"/>
+            <a:ext cx="8229600" cy="914400"/>
+          </a:xfrm>
+          <a:prstGeom prst="rect">
+            <a:avLst/>
+          </a:prstGeom>
+          <a:noFill/>
+        </p:spPr>
+        <p:txBody>
+          <a:bodyPr wrap="square">
+            <a:spAutoFit/>
+          </a:bodyPr>
+          <a:lstStyle/>
+          <a:p>
+            <a:pPr algn="l">
+              <a:defRPr sz="4000" b="1">
+                <a:solidFill>
+                  <a:srgbClr val="1F1F1F"/>
+                </a:solidFill>
+                <a:latin typeface="맑은 고딕"/>
+              </a:defRPr>
+            </a:pPr>
+            <a:r>
+              <a:t>향후 운영 계획</a:t>
+            </a:r>
+          </a:p>
+        </p:txBody>
+      </p:sp>
+      <p:sp>
+        <p:nvSpPr>
+          <p:cNvPr id="5" name="TextBox 4"/>
+          <p:cNvSpPr txBox="1"/>
+          <p:nvPr/>
+        </p:nvSpPr>
+        <p:spPr>
+          <a:xfrm>
+            <a:off x="2926080" y="2926080"/>
+            <a:ext cx="8229600" cy="548640"/>
+          </a:xfrm>
+          <a:prstGeom prst="rect">
+            <a:avLst/>
+          </a:prstGeom>
+          <a:noFill/>
+        </p:spPr>
+        <p:txBody>
+          <a:bodyPr wrap="square">
+            <a:spAutoFit/>
+          </a:bodyPr>
+          <a:lstStyle/>
+          <a:p>
+            <a:pPr algn="l">
+              <a:defRPr sz="1800" b="0">
+                <a:solidFill>
+                  <a:srgbClr val="5A5A6E"/>
+                </a:solidFill>
+                <a:latin typeface="맑은 고딕"/>
+              </a:defRPr>
+            </a:pPr>
+            <a:r>
+              <a:t>이미 갖춰진 체계 + 신규 과제 7건</a:t>
+            </a:r>
+          </a:p>
+        </p:txBody>
+      </p:sp>
+      <p:sp>
+        <p:nvSpPr>
+          <p:cNvPr id="6" name="Rectangle 5"/>
+          <p:cNvSpPr/>
+          <p:nvPr/>
+        </p:nvSpPr>
+        <p:spPr>
+          <a:xfrm>
+            <a:off x="2926080" y="3657600"/>
+            <a:ext cx="3657600" cy="36576"/>
+          </a:xfrm>
+          <a:prstGeom prst="rect">
+            <a:avLst/>
+          </a:prstGeom>
+          <a:solidFill>
+            <a:srgbClr val="16A34A"/>
+          </a:solidFill>
+          <a:ln>
+            <a:noFill/>
+          </a:ln>
+          <a:effectLst/>
+        </p:spPr>
+        <p:style>
+          <a:lnRef idx="1">
+            <a:schemeClr val="accent1"/>
+          </a:lnRef>
+          <a:fillRef idx="3">
+            <a:schemeClr val="accent1"/>
+          </a:fillRef>
+          <a:effectRef idx="2">
+            <a:schemeClr val="accent1"/>
+          </a:effectRef>
+          <a:fontRef idx="minor">
+            <a:schemeClr val="lt1"/>
+          </a:fontRef>
+        </p:style>
+        <p:txBody>
+          <a:bodyPr rtlCol="0" anchor="ctr"/>
+          <a:lstStyle/>
+          <a:p>
+            <a:pPr algn="ctr"/>
+          </a:p>
+        </p:txBody>
+      </p:sp>
+      <p:sp>
+        <p:nvSpPr>
+          <p:cNvPr id="7" name="Rectangle 6"/>
+          <p:cNvSpPr/>
+          <p:nvPr/>
+        </p:nvSpPr>
+        <p:spPr>
+          <a:xfrm>
+            <a:off x="0" y="6748272"/>
+            <a:ext cx="12191695" cy="54864"/>
+          </a:xfrm>
+          <a:prstGeom prst="rect">
+            <a:avLst/>
+          </a:prstGeom>
+          <a:solidFill>
+            <a:srgbClr val="16A34A"/>
+          </a:solidFill>
+          <a:ln>
+            <a:noFill/>
+          </a:ln>
+          <a:effectLst/>
+        </p:spPr>
+        <p:style>
+          <a:lnRef idx="1">
+            <a:schemeClr val="accent1"/>
+          </a:lnRef>
+          <a:fillRef idx="3">
+            <a:schemeClr val="accent1"/>
+          </a:fillRef>
+          <a:effectRef idx="2">
+            <a:schemeClr val="accent1"/>
+          </a:effectRef>
+          <a:fontRef idx="minor">
+            <a:schemeClr val="lt1"/>
+          </a:fontRef>
+        </p:style>
+        <p:txBody>
+          <a:bodyPr rtlCol="0" anchor="ctr"/>
+          <a:lstStyle/>
+          <a:p>
+            <a:pPr algn="ctr"/>
+          </a:p>
+        </p:txBody>
+      </p:sp>
+    </p:spTree>
+  </p:cSld>
+  <p:clrMapOvr>
+    <a:masterClrMapping/>
+  </p:clrMapOvr>
+</p:sld>
+</file>
+
+<file path=ppt/slides/slide3.xml><?xml version="1.0" encoding="utf-8"?>
+<p:sld xmlns:a="http://schemas.openxmlformats.org/drawingml/2006/main" xmlns:p="http://schemas.openxmlformats.org/presentationml/2006/main" xmlns:r="http://schemas.openxmlformats.org/officeDocument/2006/relationships">
+  <p:cSld>
+    <p:bg>
+      <p:bgPr>
+        <a:solidFill>
+          <a:srgbClr val="FFFFFF"/>
+        </a:solidFill>
+        <a:effectLst/>
+      </p:bgPr>
+    </p:bg>
+    <p:spTree>
+      <p:nvGrpSpPr>
+        <p:cNvPr id="1" name=""/>
+        <p:cNvGrpSpPr/>
+        <p:nvPr/>
+      </p:nvGrpSpPr>
+      <p:grpSpPr/>
+      <p:sp>
+        <p:nvSpPr>
+          <p:cNvPr id="2" name="Rectangle 1"/>
+          <p:cNvSpPr/>
+          <p:nvPr/>
+        </p:nvSpPr>
+        <p:spPr>
+          <a:xfrm>
+            <a:off x="0" y="0"/>
+            <a:ext cx="12191695" cy="45720"/>
+          </a:xfrm>
+          <a:prstGeom prst="rect">
+            <a:avLst/>
+          </a:prstGeom>
+          <a:solidFill>
+            <a:srgbClr val="0070C0"/>
+          </a:solidFill>
+          <a:ln>
+            <a:noFill/>
+          </a:ln>
+          <a:effectLst/>
+        </p:spPr>
+        <p:style>
+          <a:lnRef idx="1">
+            <a:schemeClr val="accent1"/>
+          </a:lnRef>
+          <a:fillRef idx="3">
+            <a:schemeClr val="accent1"/>
+          </a:fillRef>
+          <a:effectRef idx="2">
+            <a:schemeClr val="accent1"/>
+          </a:effectRef>
+          <a:fontRef idx="minor">
+            <a:schemeClr val="lt1"/>
+          </a:fontRef>
+        </p:style>
+        <p:txBody>
+          <a:bodyPr rtlCol="0" anchor="ctr"/>
+          <a:lstStyle/>
+          <a:p>
+            <a:pPr algn="ctr"/>
+          </a:p>
+        </p:txBody>
+      </p:sp>
+      <p:sp>
+        <p:nvSpPr>
+          <p:cNvPr id="3" name="TextBox 2"/>
+          <p:cNvSpPr txBox="1"/>
+          <p:nvPr/>
+        </p:nvSpPr>
+        <p:spPr>
+          <a:xfrm>
+            <a:off x="548640" y="274320"/>
+            <a:ext cx="10972800" cy="640080"/>
+          </a:xfrm>
+          <a:prstGeom prst="rect">
+            <a:avLst/>
+          </a:prstGeom>
+          <a:noFill/>
+        </p:spPr>
+        <p:txBody>
+          <a:bodyPr wrap="square">
+            <a:spAutoFit/>
+          </a:bodyPr>
+          <a:lstStyle/>
+          <a:p>
+            <a:pPr algn="l">
+              <a:defRPr sz="2600" b="1">
+                <a:solidFill>
+                  <a:srgbClr val="1F1F1F"/>
+                </a:solidFill>
+                <a:latin typeface="맑은 고딕"/>
+              </a:defRPr>
+            </a:pPr>
+            <a:r>
+              <a:t>목차</a:t>
+            </a:r>
+          </a:p>
+        </p:txBody>
+      </p:sp>
+      <p:sp>
+        <p:nvSpPr>
+          <p:cNvPr id="4" name="Rectangle 3"/>
+          <p:cNvSpPr/>
+          <p:nvPr/>
+        </p:nvSpPr>
+        <p:spPr>
+          <a:xfrm>
+            <a:off x="548640" y="914400"/>
+            <a:ext cx="1828800" cy="32004"/>
+          </a:xfrm>
+          <a:prstGeom prst="rect">
+            <a:avLst/>
+          </a:prstGeom>
+          <a:solidFill>
+            <a:srgbClr val="0070C0"/>
+          </a:solidFill>
+          <a:ln>
+            <a:noFill/>
+          </a:ln>
+          <a:effectLst/>
+        </p:spPr>
+        <p:style>
+          <a:lnRef idx="1">
+            <a:schemeClr val="accent1"/>
+          </a:lnRef>
+          <a:fillRef idx="3">
+            <a:schemeClr val="accent1"/>
+          </a:fillRef>
+          <a:effectRef idx="2">
+            <a:schemeClr val="accent1"/>
+          </a:effectRef>
+          <a:fontRef idx="minor">
+            <a:schemeClr val="lt1"/>
+          </a:fontRef>
+        </p:style>
+        <p:txBody>
+          <a:bodyPr rtlCol="0" anchor="ctr"/>
+          <a:lstStyle/>
+          <a:p>
+            <a:pPr algn="ctr"/>
+          </a:p>
+        </p:txBody>
+      </p:sp>
+      <p:sp>
+        <p:nvSpPr>
+          <p:cNvPr id="5" name="Rounded Rectangle 4"/>
+          <p:cNvSpPr/>
+          <p:nvPr/>
+        </p:nvSpPr>
+        <p:spPr>
+          <a:xfrm>
+            <a:off x="457200" y="1188720"/>
+            <a:ext cx="11247120" cy="5212080"/>
+          </a:xfrm>
+          <a:prstGeom prst="roundRect">
+            <a:avLst/>
+          </a:prstGeom>
+          <a:solidFill>
+            <a:srgbClr val="F8F9FB"/>
+          </a:solidFill>
+          <a:ln w="12700">
+            <a:solidFill>
+              <a:srgbClr val="E0E0E8"/>
+            </a:solidFill>
+          </a:ln>
+          <a:effectLst/>
+        </p:spPr>
+        <p:style>
+          <a:lnRef idx="1">
+            <a:schemeClr val="accent1"/>
+          </a:lnRef>
+          <a:fillRef idx="3">
+            <a:schemeClr val="accent1"/>
+          </a:fillRef>
+          <a:effectRef idx="2">
+            <a:schemeClr val="accent1"/>
+          </a:effectRef>
+          <a:fontRef idx="minor">
+            <a:schemeClr val="lt1"/>
+          </a:fontRef>
+        </p:style>
+        <p:txBody>
+          <a:bodyPr rtlCol="0" anchor="ctr"/>
+          <a:lstStyle/>
+          <a:p>
+            <a:pPr algn="ctr"/>
+          </a:p>
+        </p:txBody>
+      </p:sp>
+      <p:sp>
+        <p:nvSpPr>
+          <p:cNvPr id="6" name="TextBox 5"/>
+          <p:cNvSpPr txBox="1"/>
+          <p:nvPr/>
+        </p:nvSpPr>
+        <p:spPr>
+          <a:xfrm>
+            <a:off x="822960" y="1371600"/>
+            <a:ext cx="10515600" cy="4846320"/>
+          </a:xfrm>
+          <a:prstGeom prst="rect">
+            <a:avLst/>
+          </a:prstGeom>
+          <a:noFill/>
+        </p:spPr>
+        <p:txBody>
+          <a:bodyPr wrap="square">
+            <a:spAutoFit/>
+          </a:bodyPr>
+          <a:lstStyle/>
+          <a:p>
+            <a:pPr>
+              <a:lnSpc>
+                <a:spcPct val="140000"/>
+              </a:lnSpc>
+              <a:spcBef>
+                <a:spcPts val="600"/>
+              </a:spcBef>
+              <a:spcAft>
+                <a:spcPts val="200"/>
+              </a:spcAft>
+              <a:defRPr sz="1600">
+                <a:solidFill>
+                  <a:srgbClr val="1F1F1F"/>
+                </a:solidFill>
+                <a:latin typeface="맑은 고딕"/>
+              </a:defRPr>
+            </a:pPr>
+            <a:r>
+              <a:t>1. 프로젝트 개요 — 배경·시스템 소개·핵심 수치</a:t>
+            </a:r>
+          </a:p>
+          <a:p>
+            <a:pPr>
+              <a:lnSpc>
+                <a:spcPct val="140000"/>
+              </a:lnSpc>
+              <a:spcBef>
+                <a:spcPts val="600"/>
+              </a:spcBef>
+              <a:spcAft>
+                <a:spcPts val="200"/>
+              </a:spcAft>
+              <a:defRPr sz="1600">
+                <a:solidFill>
+                  <a:srgbClr val="1F1F1F"/>
+                </a:solidFill>
+                <a:latin typeface="맑은 고딕"/>
+              </a:defRPr>
+            </a:pPr>
+            <a:r>
+              <a:t>2. AI 활용 방법 — 구현·병렬 감사·문서 생성·운영 지원 (상세 사례)</a:t>
+            </a:r>
+          </a:p>
+          <a:p>
+            <a:pPr>
+              <a:lnSpc>
+                <a:spcPct val="140000"/>
+              </a:lnSpc>
+              <a:spcBef>
+                <a:spcPts val="600"/>
+              </a:spcBef>
+              <a:spcAft>
+                <a:spcPts val="200"/>
+              </a:spcAft>
+              <a:defRPr sz="1600">
+                <a:solidFill>
+                  <a:srgbClr val="1F1F1F"/>
+                </a:solidFill>
+                <a:latin typeface="맑은 고딕"/>
+              </a:defRPr>
+            </a:pPr>
+            <a:r>
+              <a:t>3. 개발 비용·기간 단축 효과 — 기능점수(FP)·맨먼스 기준</a:t>
+            </a:r>
+          </a:p>
+          <a:p>
+            <a:pPr>
+              <a:lnSpc>
+                <a:spcPct val="140000"/>
+              </a:lnSpc>
+              <a:spcBef>
+                <a:spcPts val="600"/>
+              </a:spcBef>
+              <a:spcAft>
+                <a:spcPts val="200"/>
+              </a:spcAft>
+              <a:defRPr sz="1600">
+                <a:solidFill>
+                  <a:srgbClr val="1F1F1F"/>
+                </a:solidFill>
+                <a:latin typeface="맑은 고딕"/>
+              </a:defRPr>
+            </a:pPr>
+            <a:r>
+              <a:t>4. 업무 자동화·생산성 향상 — Before/After와 절감 추정</a:t>
+            </a:r>
+          </a:p>
+          <a:p>
+            <a:pPr>
+              <a:lnSpc>
+                <a:spcPct val="140000"/>
+              </a:lnSpc>
+              <a:spcBef>
+                <a:spcPts val="600"/>
+              </a:spcBef>
+              <a:spcAft>
+                <a:spcPts val="200"/>
+              </a:spcAft>
+              <a:defRPr sz="1600">
+                <a:solidFill>
+                  <a:srgbClr val="1F1F1F"/>
+                </a:solidFill>
+                <a:latin typeface="맑은 고딕"/>
+              </a:defRPr>
+            </a:pPr>
+            <a:r>
+              <a:t>5. 에러 감소·품질 개선 — 3층 방어 체계와 실증 데이터</a:t>
+            </a:r>
+          </a:p>
+          <a:p>
+            <a:pPr>
+              <a:lnSpc>
+                <a:spcPct val="140000"/>
+              </a:lnSpc>
+              <a:spcBef>
+                <a:spcPts val="600"/>
+              </a:spcBef>
+              <a:spcAft>
+                <a:spcPts val="200"/>
+              </a:spcAft>
+              <a:defRPr sz="1600">
+                <a:solidFill>
+                  <a:srgbClr val="1F1F1F"/>
+                </a:solidFill>
+                <a:latin typeface="맑은 고딕"/>
+              </a:defRPr>
+            </a:pPr>
+            <a:r>
+              <a:t>6. 향후 운영 계획 — 점검·장애 대응·백업·릴리즈</a:t>
+            </a:r>
+          </a:p>
+          <a:p>
+            <a:pPr>
+              <a:lnSpc>
+                <a:spcPct val="140000"/>
+              </a:lnSpc>
+              <a:spcBef>
+                <a:spcPts val="600"/>
+              </a:spcBef>
+              <a:spcAft>
+                <a:spcPts val="200"/>
+              </a:spcAft>
+              <a:defRPr sz="1600">
+                <a:solidFill>
+                  <a:srgbClr val="1F1F1F"/>
+                </a:solidFill>
+                <a:latin typeface="맑은 고딕"/>
+              </a:defRPr>
+            </a:pPr>
+            <a:r>
+              <a:t>7. AI 기반 업무 혁신 방향성 — 조직 확산 제안</a:t>
+            </a:r>
+          </a:p>
+        </p:txBody>
+      </p:sp>
+      <p:sp>
+        <p:nvSpPr>
+          <p:cNvPr id="7" name="TextBox 6"/>
+          <p:cNvSpPr txBox="1"/>
+          <p:nvPr/>
+        </p:nvSpPr>
+        <p:spPr>
+          <a:xfrm>
+            <a:off x="10972800" y="6492240"/>
+            <a:ext cx="914400" cy="274320"/>
+          </a:xfrm>
+          <a:prstGeom prst="rect">
+            <a:avLst/>
+          </a:prstGeom>
+          <a:noFill/>
+        </p:spPr>
+        <p:txBody>
+          <a:bodyPr wrap="square">
+            <a:spAutoFit/>
+          </a:bodyPr>
+          <a:lstStyle/>
+          <a:p>
+            <a:pPr algn="r">
+              <a:defRPr sz="1000" b="0">
+                <a:solidFill>
+                  <a:srgbClr val="8C8C9A"/>
+                </a:solidFill>
+                <a:latin typeface="맑은 고딕"/>
+              </a:defRPr>
+            </a:pPr>
+            <a:r>
+              <a:t>3</a:t>
+            </a:r>
+          </a:p>
+        </p:txBody>
+      </p:sp>
+    </p:spTree>
+  </p:cSld>
+  <p:clrMapOvr>
+    <a:masterClrMapping/>
+  </p:clrMapOvr>
+</p:sld>
+</file>
+
+<file path=ppt/slides/slide30.xml><?xml version="1.0" encoding="utf-8"?>
 <p:sld xmlns:a="http://schemas.openxmlformats.org/drawingml/2006/main" xmlns:p="http://schemas.openxmlformats.org/presentationml/2006/main" xmlns:r="http://schemas.openxmlformats.org/officeDocument/2006/relationships">
   <p:cSld>
     <p:bg>
@@ -12061,7 +15794,7 @@
               </a:defRPr>
             </a:pPr>
             <a:r>
-              <a:t>24</a:t>
+              <a:t>30</a:t>
             </a:r>
           </a:p>
         </p:txBody>
@@ -12074,7 +15807,7 @@
 </p:sld>
 </file>
 
-<file path=ppt/slides/slide25.xml><?xml version="1.0" encoding="utf-8"?>
+<file path=ppt/slides/slide31.xml><?xml version="1.0" encoding="utf-8"?>
 <p:sld xmlns:a="http://schemas.openxmlformats.org/drawingml/2006/main" xmlns:p="http://schemas.openxmlformats.org/presentationml/2006/main" xmlns:r="http://schemas.openxmlformats.org/officeDocument/2006/relationships">
   <p:cSld>
     <p:bg>
@@ -12467,7 +16200,7 @@
               </a:defRPr>
             </a:pPr>
             <a:r>
-              <a:t>25</a:t>
+              <a:t>31</a:t>
             </a:r>
           </a:p>
         </p:txBody>
@@ -12480,7 +16213,7 @@
 </p:sld>
 </file>
 
-<file path=ppt/slides/slide26.xml><?xml version="1.0" encoding="utf-8"?>
+<file path=ppt/slides/slide32.xml><?xml version="1.0" encoding="utf-8"?>
 <p:sld xmlns:a="http://schemas.openxmlformats.org/drawingml/2006/main" xmlns:p="http://schemas.openxmlformats.org/presentationml/2006/main" xmlns:r="http://schemas.openxmlformats.org/officeDocument/2006/relationships">
   <p:cSld>
     <p:bg>
@@ -12767,7 +16500,7 @@
 </p:sld>
 </file>
 
-<file path=ppt/slides/slide27.xml><?xml version="1.0" encoding="utf-8"?>
+<file path=ppt/slides/slide33.xml><?xml version="1.0" encoding="utf-8"?>
 <p:sld xmlns:a="http://schemas.openxmlformats.org/drawingml/2006/main" xmlns:p="http://schemas.openxmlformats.org/presentationml/2006/main" xmlns:r="http://schemas.openxmlformats.org/officeDocument/2006/relationships">
   <p:cSld>
     <p:bg>
@@ -13163,7 +16896,7 @@
               </a:defRPr>
             </a:pPr>
             <a:r>
-              <a:t>27</a:t>
+              <a:t>33</a:t>
             </a:r>
           </a:p>
         </p:txBody>
@@ -13176,7 +16909,7 @@
 </p:sld>
 </file>
 
-<file path=ppt/slides/slide28.xml><?xml version="1.0" encoding="utf-8"?>
+<file path=ppt/slides/slide34.xml><?xml version="1.0" encoding="utf-8"?>
 <p:sld xmlns:a="http://schemas.openxmlformats.org/drawingml/2006/main" xmlns:p="http://schemas.openxmlformats.org/presentationml/2006/main" xmlns:r="http://schemas.openxmlformats.org/officeDocument/2006/relationships">
   <p:cSld>
     <p:bg>
@@ -13757,7 +17490,7 @@
               </a:defRPr>
             </a:pPr>
             <a:r>
-              <a:t>28</a:t>
+              <a:t>34</a:t>
             </a:r>
           </a:p>
         </p:txBody>
@@ -13770,7 +17503,7 @@
 </p:sld>
 </file>
 
-<file path=ppt/slides/slide29.xml><?xml version="1.0" encoding="utf-8"?>
+<file path=ppt/slides/slide35.xml><?xml version="1.0" encoding="utf-8"?>
 <p:sld xmlns:a="http://schemas.openxmlformats.org/drawingml/2006/main" xmlns:p="http://schemas.openxmlformats.org/presentationml/2006/main" xmlns:r="http://schemas.openxmlformats.org/officeDocument/2006/relationships">
   <p:cSld>
     <p:bg>
@@ -14015,7 +17748,7 @@
               </a:defRPr>
             </a:pPr>
             <a:r>
-              <a:t>29</a:t>
+              <a:t>35</a:t>
             </a:r>
           </a:p>
         </p:txBody>
@@ -14028,416 +17761,7 @@
 </p:sld>
 </file>
 
-<file path=ppt/slides/slide3.xml><?xml version="1.0" encoding="utf-8"?>
-<p:sld xmlns:a="http://schemas.openxmlformats.org/drawingml/2006/main" xmlns:p="http://schemas.openxmlformats.org/presentationml/2006/main" xmlns:r="http://schemas.openxmlformats.org/officeDocument/2006/relationships">
-  <p:cSld>
-    <p:bg>
-      <p:bgPr>
-        <a:solidFill>
-          <a:srgbClr val="FFFFFF"/>
-        </a:solidFill>
-        <a:effectLst/>
-      </p:bgPr>
-    </p:bg>
-    <p:spTree>
-      <p:nvGrpSpPr>
-        <p:cNvPr id="1" name=""/>
-        <p:cNvGrpSpPr/>
-        <p:nvPr/>
-      </p:nvGrpSpPr>
-      <p:grpSpPr/>
-      <p:sp>
-        <p:nvSpPr>
-          <p:cNvPr id="2" name="Rectangle 1"/>
-          <p:cNvSpPr/>
-          <p:nvPr/>
-        </p:nvSpPr>
-        <p:spPr>
-          <a:xfrm>
-            <a:off x="0" y="0"/>
-            <a:ext cx="12191695" cy="45720"/>
-          </a:xfrm>
-          <a:prstGeom prst="rect">
-            <a:avLst/>
-          </a:prstGeom>
-          <a:solidFill>
-            <a:srgbClr val="0070C0"/>
-          </a:solidFill>
-          <a:ln>
-            <a:noFill/>
-          </a:ln>
-          <a:effectLst/>
-        </p:spPr>
-        <p:style>
-          <a:lnRef idx="1">
-            <a:schemeClr val="accent1"/>
-          </a:lnRef>
-          <a:fillRef idx="3">
-            <a:schemeClr val="accent1"/>
-          </a:fillRef>
-          <a:effectRef idx="2">
-            <a:schemeClr val="accent1"/>
-          </a:effectRef>
-          <a:fontRef idx="minor">
-            <a:schemeClr val="lt1"/>
-          </a:fontRef>
-        </p:style>
-        <p:txBody>
-          <a:bodyPr rtlCol="0" anchor="ctr"/>
-          <a:lstStyle/>
-          <a:p>
-            <a:pPr algn="ctr"/>
-          </a:p>
-        </p:txBody>
-      </p:sp>
-      <p:sp>
-        <p:nvSpPr>
-          <p:cNvPr id="3" name="TextBox 2"/>
-          <p:cNvSpPr txBox="1"/>
-          <p:nvPr/>
-        </p:nvSpPr>
-        <p:spPr>
-          <a:xfrm>
-            <a:off x="548640" y="274320"/>
-            <a:ext cx="10972800" cy="640080"/>
-          </a:xfrm>
-          <a:prstGeom prst="rect">
-            <a:avLst/>
-          </a:prstGeom>
-          <a:noFill/>
-        </p:spPr>
-        <p:txBody>
-          <a:bodyPr wrap="square">
-            <a:spAutoFit/>
-          </a:bodyPr>
-          <a:lstStyle/>
-          <a:p>
-            <a:pPr algn="l">
-              <a:defRPr sz="2600" b="1">
-                <a:solidFill>
-                  <a:srgbClr val="1F1F1F"/>
-                </a:solidFill>
-                <a:latin typeface="맑은 고딕"/>
-              </a:defRPr>
-            </a:pPr>
-            <a:r>
-              <a:t>목차</a:t>
-            </a:r>
-          </a:p>
-        </p:txBody>
-      </p:sp>
-      <p:sp>
-        <p:nvSpPr>
-          <p:cNvPr id="4" name="Rectangle 3"/>
-          <p:cNvSpPr/>
-          <p:nvPr/>
-        </p:nvSpPr>
-        <p:spPr>
-          <a:xfrm>
-            <a:off x="548640" y="914400"/>
-            <a:ext cx="1828800" cy="32004"/>
-          </a:xfrm>
-          <a:prstGeom prst="rect">
-            <a:avLst/>
-          </a:prstGeom>
-          <a:solidFill>
-            <a:srgbClr val="0070C0"/>
-          </a:solidFill>
-          <a:ln>
-            <a:noFill/>
-          </a:ln>
-          <a:effectLst/>
-        </p:spPr>
-        <p:style>
-          <a:lnRef idx="1">
-            <a:schemeClr val="accent1"/>
-          </a:lnRef>
-          <a:fillRef idx="3">
-            <a:schemeClr val="accent1"/>
-          </a:fillRef>
-          <a:effectRef idx="2">
-            <a:schemeClr val="accent1"/>
-          </a:effectRef>
-          <a:fontRef idx="minor">
-            <a:schemeClr val="lt1"/>
-          </a:fontRef>
-        </p:style>
-        <p:txBody>
-          <a:bodyPr rtlCol="0" anchor="ctr"/>
-          <a:lstStyle/>
-          <a:p>
-            <a:pPr algn="ctr"/>
-          </a:p>
-        </p:txBody>
-      </p:sp>
-      <p:sp>
-        <p:nvSpPr>
-          <p:cNvPr id="5" name="Rounded Rectangle 4"/>
-          <p:cNvSpPr/>
-          <p:nvPr/>
-        </p:nvSpPr>
-        <p:spPr>
-          <a:xfrm>
-            <a:off x="457200" y="1188720"/>
-            <a:ext cx="11247120" cy="5212080"/>
-          </a:xfrm>
-          <a:prstGeom prst="roundRect">
-            <a:avLst/>
-          </a:prstGeom>
-          <a:solidFill>
-            <a:srgbClr val="F8F9FB"/>
-          </a:solidFill>
-          <a:ln w="12700">
-            <a:solidFill>
-              <a:srgbClr val="E0E0E8"/>
-            </a:solidFill>
-          </a:ln>
-          <a:effectLst/>
-        </p:spPr>
-        <p:style>
-          <a:lnRef idx="1">
-            <a:schemeClr val="accent1"/>
-          </a:lnRef>
-          <a:fillRef idx="3">
-            <a:schemeClr val="accent1"/>
-          </a:fillRef>
-          <a:effectRef idx="2">
-            <a:schemeClr val="accent1"/>
-          </a:effectRef>
-          <a:fontRef idx="minor">
-            <a:schemeClr val="lt1"/>
-          </a:fontRef>
-        </p:style>
-        <p:txBody>
-          <a:bodyPr rtlCol="0" anchor="ctr"/>
-          <a:lstStyle/>
-          <a:p>
-            <a:pPr algn="ctr"/>
-          </a:p>
-        </p:txBody>
-      </p:sp>
-      <p:sp>
-        <p:nvSpPr>
-          <p:cNvPr id="6" name="TextBox 5"/>
-          <p:cNvSpPr txBox="1"/>
-          <p:nvPr/>
-        </p:nvSpPr>
-        <p:spPr>
-          <a:xfrm>
-            <a:off x="822960" y="1371600"/>
-            <a:ext cx="10515600" cy="4846320"/>
-          </a:xfrm>
-          <a:prstGeom prst="rect">
-            <a:avLst/>
-          </a:prstGeom>
-          <a:noFill/>
-        </p:spPr>
-        <p:txBody>
-          <a:bodyPr wrap="square">
-            <a:spAutoFit/>
-          </a:bodyPr>
-          <a:lstStyle/>
-          <a:p>
-            <a:pPr>
-              <a:lnSpc>
-                <a:spcPct val="140000"/>
-              </a:lnSpc>
-              <a:spcBef>
-                <a:spcPts val="600"/>
-              </a:spcBef>
-              <a:spcAft>
-                <a:spcPts val="200"/>
-              </a:spcAft>
-              <a:defRPr sz="1600">
-                <a:solidFill>
-                  <a:srgbClr val="1F1F1F"/>
-                </a:solidFill>
-                <a:latin typeface="맑은 고딕"/>
-              </a:defRPr>
-            </a:pPr>
-            <a:r>
-              <a:t>1. 프로젝트 개요 — 배경·시스템 소개·핵심 수치</a:t>
-            </a:r>
-          </a:p>
-          <a:p>
-            <a:pPr>
-              <a:lnSpc>
-                <a:spcPct val="140000"/>
-              </a:lnSpc>
-              <a:spcBef>
-                <a:spcPts val="600"/>
-              </a:spcBef>
-              <a:spcAft>
-                <a:spcPts val="200"/>
-              </a:spcAft>
-              <a:defRPr sz="1600">
-                <a:solidFill>
-                  <a:srgbClr val="1F1F1F"/>
-                </a:solidFill>
-                <a:latin typeface="맑은 고딕"/>
-              </a:defRPr>
-            </a:pPr>
-            <a:r>
-              <a:t>2. AI 활용 방법 — 구현·병렬 감사·문서 생성·운영 지원 (상세 사례)</a:t>
-            </a:r>
-          </a:p>
-          <a:p>
-            <a:pPr>
-              <a:lnSpc>
-                <a:spcPct val="140000"/>
-              </a:lnSpc>
-              <a:spcBef>
-                <a:spcPts val="600"/>
-              </a:spcBef>
-              <a:spcAft>
-                <a:spcPts val="200"/>
-              </a:spcAft>
-              <a:defRPr sz="1600">
-                <a:solidFill>
-                  <a:srgbClr val="1F1F1F"/>
-                </a:solidFill>
-                <a:latin typeface="맑은 고딕"/>
-              </a:defRPr>
-            </a:pPr>
-            <a:r>
-              <a:t>3. 개발 비용·기간 단축 효과 — 기능점수(FP)·맨먼스 기준</a:t>
-            </a:r>
-          </a:p>
-          <a:p>
-            <a:pPr>
-              <a:lnSpc>
-                <a:spcPct val="140000"/>
-              </a:lnSpc>
-              <a:spcBef>
-                <a:spcPts val="600"/>
-              </a:spcBef>
-              <a:spcAft>
-                <a:spcPts val="200"/>
-              </a:spcAft>
-              <a:defRPr sz="1600">
-                <a:solidFill>
-                  <a:srgbClr val="1F1F1F"/>
-                </a:solidFill>
-                <a:latin typeface="맑은 고딕"/>
-              </a:defRPr>
-            </a:pPr>
-            <a:r>
-              <a:t>4. 업무 자동화·생산성 향상 — Before/After와 절감 추정</a:t>
-            </a:r>
-          </a:p>
-          <a:p>
-            <a:pPr>
-              <a:lnSpc>
-                <a:spcPct val="140000"/>
-              </a:lnSpc>
-              <a:spcBef>
-                <a:spcPts val="600"/>
-              </a:spcBef>
-              <a:spcAft>
-                <a:spcPts val="200"/>
-              </a:spcAft>
-              <a:defRPr sz="1600">
-                <a:solidFill>
-                  <a:srgbClr val="1F1F1F"/>
-                </a:solidFill>
-                <a:latin typeface="맑은 고딕"/>
-              </a:defRPr>
-            </a:pPr>
-            <a:r>
-              <a:t>5. 에러 감소·품질 개선 — 3층 방어 체계와 실증 데이터</a:t>
-            </a:r>
-          </a:p>
-          <a:p>
-            <a:pPr>
-              <a:lnSpc>
-                <a:spcPct val="140000"/>
-              </a:lnSpc>
-              <a:spcBef>
-                <a:spcPts val="600"/>
-              </a:spcBef>
-              <a:spcAft>
-                <a:spcPts val="200"/>
-              </a:spcAft>
-              <a:defRPr sz="1600">
-                <a:solidFill>
-                  <a:srgbClr val="1F1F1F"/>
-                </a:solidFill>
-                <a:latin typeface="맑은 고딕"/>
-              </a:defRPr>
-            </a:pPr>
-            <a:r>
-              <a:t>6. 향후 운영 계획 — 점검·장애 대응·백업·릴리즈</a:t>
-            </a:r>
-          </a:p>
-          <a:p>
-            <a:pPr>
-              <a:lnSpc>
-                <a:spcPct val="140000"/>
-              </a:lnSpc>
-              <a:spcBef>
-                <a:spcPts val="600"/>
-              </a:spcBef>
-              <a:spcAft>
-                <a:spcPts val="200"/>
-              </a:spcAft>
-              <a:defRPr sz="1600">
-                <a:solidFill>
-                  <a:srgbClr val="1F1F1F"/>
-                </a:solidFill>
-                <a:latin typeface="맑은 고딕"/>
-              </a:defRPr>
-            </a:pPr>
-            <a:r>
-              <a:t>7. AI 기반 업무 혁신 방향성 — 조직 확산 제안</a:t>
-            </a:r>
-          </a:p>
-        </p:txBody>
-      </p:sp>
-      <p:sp>
-        <p:nvSpPr>
-          <p:cNvPr id="7" name="TextBox 6"/>
-          <p:cNvSpPr txBox="1"/>
-          <p:nvPr/>
-        </p:nvSpPr>
-        <p:spPr>
-          <a:xfrm>
-            <a:off x="10972800" y="6492240"/>
-            <a:ext cx="914400" cy="274320"/>
-          </a:xfrm>
-          <a:prstGeom prst="rect">
-            <a:avLst/>
-          </a:prstGeom>
-          <a:noFill/>
-        </p:spPr>
-        <p:txBody>
-          <a:bodyPr wrap="square">
-            <a:spAutoFit/>
-          </a:bodyPr>
-          <a:lstStyle/>
-          <a:p>
-            <a:pPr algn="r">
-              <a:defRPr sz="1000" b="0">
-                <a:solidFill>
-                  <a:srgbClr val="8C8C9A"/>
-                </a:solidFill>
-                <a:latin typeface="맑은 고딕"/>
-              </a:defRPr>
-            </a:pPr>
-            <a:r>
-              <a:t>3</a:t>
-            </a:r>
-          </a:p>
-        </p:txBody>
-      </p:sp>
-    </p:spTree>
-  </p:cSld>
-  <p:clrMapOvr>
-    <a:masterClrMapping/>
-  </p:clrMapOvr>
-</p:sld>
-</file>
-
-<file path=ppt/slides/slide30.xml><?xml version="1.0" encoding="utf-8"?>
+<file path=ppt/slides/slide36.xml><?xml version="1.0" encoding="utf-8"?>
 <p:sld xmlns:a="http://schemas.openxmlformats.org/drawingml/2006/main" xmlns:p="http://schemas.openxmlformats.org/presentationml/2006/main" xmlns:r="http://schemas.openxmlformats.org/officeDocument/2006/relationships">
   <p:cSld>
     <p:bg>
